--- a/docs/pptx/whole/jx-linsubhr-sens-sideeffect.pptx
+++ b/docs/pptx/whole/jx-linsubhr-sens-sideeffect.pptx
@@ -5339,7 +5339,7 @@
           <p:spPr>
             <a:xfrm>
               <a:off x="817517" y="1896563"/>
-              <a:ext cx="6236116" cy="82021"/>
+              <a:ext cx="6833128" cy="82021"/>
             </a:xfrm>
             <a:prstGeom prst="rect">
               <a:avLst/>
@@ -5371,7 +5371,7 @@
                   <a:latin typeface="Helvetica"/>
                   <a:cs typeface="Helvetica"/>
                 </a:rPr>
-                <a:t>subHR per 0.1 ratio decline: 1.19 (1.08-1.32), p = &lt;0.001  |  per IQR decline (Δ = 0.27): 1.62 (1.22-2.14)  |  IQR: [0.71, 0.98]</a:t>
+                <a:t>subHR per 0.1 ratio decline: 1.19 (1.08-1.32), p_Bonf = 0.004 (n = 6)  |  per IQR decline (Δ = 0.27): 1.62 (1.22-2.14)  |  IQR: [0.71, 0.98]</a:t>
               </a:r>
             </a:p>
           </p:txBody>

--- a/docs/pptx/whole/jx-linsubhr-sens-sideeffect.pptx
+++ b/docs/pptx/whole/jx-linsubhr-sens-sideeffect.pptx
@@ -5062,8 +5062,8 @@
           </p:nvSpPr>
           <p:spPr>
             <a:xfrm>
-              <a:off x="1980137" y="5785772"/>
-              <a:ext cx="155356" cy="80101"/>
+              <a:off x="1977028" y="5785772"/>
+              <a:ext cx="161574" cy="80101"/>
             </a:xfrm>
             <a:prstGeom prst="rect">
               <a:avLst/>
@@ -5095,7 +5095,7 @@
                   <a:latin typeface="Helvetica"/>
                   <a:cs typeface="Helvetica"/>
                 </a:rPr>
-                <a:t>0.6</a:t>
+                <a:t>-40</a:t>
               </a:r>
             </a:p>
           </p:txBody>
@@ -5108,8 +5108,8 @@
           </p:nvSpPr>
           <p:spPr>
             <a:xfrm>
-              <a:off x="3731922" y="5785772"/>
-              <a:ext cx="155356" cy="80101"/>
+              <a:off x="3728813" y="5785772"/>
+              <a:ext cx="161574" cy="80101"/>
             </a:xfrm>
             <a:prstGeom prst="rect">
               <a:avLst/>
@@ -5141,7 +5141,7 @@
                   <a:latin typeface="Helvetica"/>
                   <a:cs typeface="Helvetica"/>
                 </a:rPr>
-                <a:t>0.8</a:t>
+                <a:t>-20</a:t>
               </a:r>
             </a:p>
           </p:txBody>
@@ -5154,8 +5154,8 @@
           </p:nvSpPr>
           <p:spPr>
             <a:xfrm>
-              <a:off x="5483707" y="5785772"/>
-              <a:ext cx="155356" cy="80101"/>
+              <a:off x="5530296" y="5785772"/>
+              <a:ext cx="62179" cy="80101"/>
             </a:xfrm>
             <a:prstGeom prst="rect">
               <a:avLst/>
@@ -5187,7 +5187,7 @@
                   <a:latin typeface="Helvetica"/>
                   <a:cs typeface="Helvetica"/>
                 </a:rPr>
-                <a:t>1.0</a:t>
+                <a:t>0</a:t>
               </a:r>
             </a:p>
           </p:txBody>
@@ -5200,8 +5200,8 @@
           </p:nvSpPr>
           <p:spPr>
             <a:xfrm>
-              <a:off x="7235493" y="5785772"/>
-              <a:ext cx="155356" cy="80101"/>
+              <a:off x="7250992" y="5785772"/>
+              <a:ext cx="124358" cy="80101"/>
             </a:xfrm>
             <a:prstGeom prst="rect">
               <a:avLst/>
@@ -5233,7 +5233,7 @@
                   <a:latin typeface="Helvetica"/>
                   <a:cs typeface="Helvetica"/>
                 </a:rPr>
-                <a:t>1.2</a:t>
+                <a:t>20</a:t>
               </a:r>
             </a:p>
           </p:txBody>
@@ -5246,8 +5246,8 @@
           </p:nvSpPr>
           <p:spPr>
             <a:xfrm>
-              <a:off x="2691419" y="5925448"/>
-              <a:ext cx="4051889" cy="100218"/>
+              <a:off x="1561815" y="5925448"/>
+              <a:ext cx="6311097" cy="100218"/>
             </a:xfrm>
             <a:prstGeom prst="rect">
               <a:avLst/>
@@ -5279,7 +5279,7 @@
                   <a:latin typeface="Helvetica"/>
                   <a:cs typeface="Helvetica"/>
                 </a:rPr>
-                <a:t>Sensitivity eGFR Ratio (CKD-EPI 2012 CysC / CKD-EPI 2021 Cr)</a:t>
+                <a:t>Sensitivity eGFR Difference (%): 100 × (CKD-EPI 2012 CysC − CKD-EPI 2021 Cr) / CKD-EPI 2021 Cr</a:t>
               </a:r>
             </a:p>
           </p:txBody>
@@ -5339,7 +5339,7 @@
           <p:spPr>
             <a:xfrm>
               <a:off x="817517" y="1896563"/>
-              <a:ext cx="6833128" cy="82021"/>
+              <a:ext cx="6959864" cy="82021"/>
             </a:xfrm>
             <a:prstGeom prst="rect">
               <a:avLst/>
@@ -5371,7 +5371,7 @@
                   <a:latin typeface="Helvetica"/>
                   <a:cs typeface="Helvetica"/>
                 </a:rPr>
-                <a:t>subHR per 0.1 ratio decline: 1.19 (1.08-1.32), p_Bonf = 0.004 (n = 6)  |  per IQR decline (Δ = 0.27): 1.62 (1.22-2.14)  |  IQR: [0.71, 0.98]</a:t>
+                <a:t>subHR per 10 % decline: 1.19 (1.08-1.32), p_Bonf = 0.004 (n = 6)  |  per IQR decline (Δ = 27.5 %): 1.62 (1.22-2.14)  |  IQR: [-29.1, -1.6] %</a:t>
               </a:r>
             </a:p>
           </p:txBody>

--- a/docs/pptx/whole/jx-linsubhr-sens-sideeffect.pptx
+++ b/docs/pptx/whole/jx-linsubhr-sens-sideeffect.pptx
@@ -2265,34 +2265,26 @@
         </p:sp>
         <p:sp>
           <p:nvSpPr>
-            <p:cNvPr id="4" name="pl4"/>
+            <p:cNvPr id="4" name="rc4"/>
             <p:cNvSpPr/>
             <p:nvPr/>
           </p:nvSpPr>
           <p:spPr>
             <a:xfrm>
-              <a:off x="817517" y="5142518"/>
-              <a:ext cx="7799693" cy="0"/>
+              <a:off x="457200" y="1600200"/>
+              <a:ext cx="8229600" cy="4525962"/>
             </a:xfrm>
-            <a:custGeom>
+            <a:prstGeom prst="rect">
               <a:avLst/>
-              <a:pathLst>
-                <a:path w="7799693" h="0">
-                  <a:moveTo>
-                    <a:pt x="0" y="0"/>
-                  </a:moveTo>
-                  <a:lnTo>
-                    <a:pt x="7799693" y="0"/>
-                  </a:lnTo>
-                  <a:lnTo>
-                    <a:pt x="7799693" y="0"/>
-                  </a:lnTo>
-                </a:path>
-              </a:pathLst>
-            </a:custGeom>
-            <a:ln w="6775" cap="flat">
+            </a:prstGeom>
+            <a:solidFill>
+              <a:srgbClr val="FFFFFF">
+                <a:alpha val="100000"/>
+              </a:srgbClr>
+            </a:solidFill>
+            <a:ln w="13550" cap="rnd">
               <a:solidFill>
-                <a:srgbClr val="EBEBEB">
+                <a:srgbClr val="FFFFFF">
                   <a:alpha val="100000"/>
                 </a:srgbClr>
               </a:solidFill>
@@ -2314,21 +2306,21 @@
           </p:nvSpPr>
           <p:spPr>
             <a:xfrm>
-              <a:off x="817517" y="4313054"/>
-              <a:ext cx="7799693" cy="0"/>
+              <a:off x="887106" y="3250627"/>
+              <a:ext cx="7660515" cy="0"/>
             </a:xfrm>
             <a:custGeom>
               <a:avLst/>
               <a:pathLst>
-                <a:path w="7799693" h="0">
+                <a:path w="7660515" h="0">
                   <a:moveTo>
                     <a:pt x="0" y="0"/>
                   </a:moveTo>
                   <a:lnTo>
-                    <a:pt x="7799693" y="0"/>
-                  </a:lnTo>
-                  <a:lnTo>
-                    <a:pt x="7799693" y="0"/>
+                    <a:pt x="7660515" y="0"/>
+                  </a:lnTo>
+                  <a:lnTo>
+                    <a:pt x="7660515" y="0"/>
                   </a:lnTo>
                 </a:path>
               </a:pathLst>
@@ -2357,21 +2349,21 @@
           </p:nvSpPr>
           <p:spPr>
             <a:xfrm>
-              <a:off x="817517" y="3483591"/>
-              <a:ext cx="7799693" cy="0"/>
+              <a:off x="887106" y="2951293"/>
+              <a:ext cx="7660515" cy="0"/>
             </a:xfrm>
             <a:custGeom>
               <a:avLst/>
               <a:pathLst>
-                <a:path w="7799693" h="0">
+                <a:path w="7660515" h="0">
                   <a:moveTo>
                     <a:pt x="0" y="0"/>
                   </a:moveTo>
                   <a:lnTo>
-                    <a:pt x="7799693" y="0"/>
-                  </a:lnTo>
-                  <a:lnTo>
-                    <a:pt x="7799693" y="0"/>
+                    <a:pt x="7660515" y="0"/>
+                  </a:lnTo>
+                  <a:lnTo>
+                    <a:pt x="7660515" y="0"/>
                   </a:lnTo>
                 </a:path>
               </a:pathLst>
@@ -2400,21 +2392,21 @@
           </p:nvSpPr>
           <p:spPr>
             <a:xfrm>
-              <a:off x="817517" y="2654127"/>
-              <a:ext cx="7799693" cy="0"/>
+              <a:off x="887106" y="2651959"/>
+              <a:ext cx="7660515" cy="0"/>
             </a:xfrm>
             <a:custGeom>
               <a:avLst/>
               <a:pathLst>
-                <a:path w="7799693" h="0">
+                <a:path w="7660515" h="0">
                   <a:moveTo>
                     <a:pt x="0" y="0"/>
                   </a:moveTo>
                   <a:lnTo>
-                    <a:pt x="7799693" y="0"/>
-                  </a:lnTo>
-                  <a:lnTo>
-                    <a:pt x="7799693" y="0"/>
+                    <a:pt x="7660515" y="0"/>
+                  </a:lnTo>
+                  <a:lnTo>
+                    <a:pt x="7660515" y="0"/>
                   </a:lnTo>
                 </a:path>
               </a:pathLst>
@@ -2443,21 +2435,21 @@
           </p:nvSpPr>
           <p:spPr>
             <a:xfrm>
-              <a:off x="1181923" y="2073503"/>
-              <a:ext cx="0" cy="3649639"/>
+              <a:off x="887106" y="2352625"/>
+              <a:ext cx="7660515" cy="0"/>
             </a:xfrm>
             <a:custGeom>
               <a:avLst/>
               <a:pathLst>
-                <a:path w="0" h="3649639">
+                <a:path w="7660515" h="0">
                   <a:moveTo>
-                    <a:pt x="0" y="3649639"/>
+                    <a:pt x="0" y="0"/>
                   </a:moveTo>
                   <a:lnTo>
-                    <a:pt x="0" y="0"/>
-                  </a:lnTo>
-                  <a:lnTo>
-                    <a:pt x="0" y="0"/>
+                    <a:pt x="7660515" y="0"/>
+                  </a:lnTo>
+                  <a:lnTo>
+                    <a:pt x="7660515" y="0"/>
                   </a:lnTo>
                 </a:path>
               </a:pathLst>
@@ -2486,15 +2478,15 @@
           </p:nvSpPr>
           <p:spPr>
             <a:xfrm>
-              <a:off x="2933708" y="2073503"/>
-              <a:ext cx="0" cy="3649639"/>
+              <a:off x="1245010" y="2143092"/>
+              <a:ext cx="0" cy="1317069"/>
             </a:xfrm>
             <a:custGeom>
               <a:avLst/>
               <a:pathLst>
-                <a:path w="0" h="3649639">
+                <a:path w="0" h="1317069">
                   <a:moveTo>
-                    <a:pt x="0" y="3649639"/>
+                    <a:pt x="0" y="1317069"/>
                   </a:moveTo>
                   <a:lnTo>
                     <a:pt x="0" y="0"/>
@@ -2529,15 +2521,15 @@
           </p:nvSpPr>
           <p:spPr>
             <a:xfrm>
-              <a:off x="4685493" y="2073503"/>
-              <a:ext cx="0" cy="3649639"/>
+              <a:off x="2965536" y="2143092"/>
+              <a:ext cx="0" cy="1317069"/>
             </a:xfrm>
             <a:custGeom>
               <a:avLst/>
               <a:pathLst>
-                <a:path w="0" h="3649639">
+                <a:path w="0" h="1317069">
                   <a:moveTo>
-                    <a:pt x="0" y="3649639"/>
+                    <a:pt x="0" y="1317069"/>
                   </a:moveTo>
                   <a:lnTo>
                     <a:pt x="0" y="0"/>
@@ -2572,15 +2564,15 @@
           </p:nvSpPr>
           <p:spPr>
             <a:xfrm>
-              <a:off x="6437278" y="2073503"/>
-              <a:ext cx="0" cy="3649639"/>
+              <a:off x="4686062" y="2143092"/>
+              <a:ext cx="0" cy="1317069"/>
             </a:xfrm>
             <a:custGeom>
               <a:avLst/>
               <a:pathLst>
-                <a:path w="0" h="3649639">
+                <a:path w="0" h="1317069">
                   <a:moveTo>
-                    <a:pt x="0" y="3649639"/>
+                    <a:pt x="0" y="1317069"/>
                   </a:moveTo>
                   <a:lnTo>
                     <a:pt x="0" y="0"/>
@@ -2615,15 +2607,15 @@
           </p:nvSpPr>
           <p:spPr>
             <a:xfrm>
-              <a:off x="8189063" y="2073503"/>
-              <a:ext cx="0" cy="3649639"/>
+              <a:off x="6406588" y="2143092"/>
+              <a:ext cx="0" cy="1317069"/>
             </a:xfrm>
             <a:custGeom>
               <a:avLst/>
               <a:pathLst>
-                <a:path w="0" h="3649639">
+                <a:path w="0" h="1317069">
                   <a:moveTo>
-                    <a:pt x="0" y="3649639"/>
+                    <a:pt x="0" y="1317069"/>
                   </a:moveTo>
                   <a:lnTo>
                     <a:pt x="0" y="0"/>
@@ -2658,26 +2650,26 @@
           </p:nvSpPr>
           <p:spPr>
             <a:xfrm>
-              <a:off x="817517" y="5557249"/>
-              <a:ext cx="7799693" cy="0"/>
+              <a:off x="8127114" y="2143092"/>
+              <a:ext cx="0" cy="1317069"/>
             </a:xfrm>
             <a:custGeom>
               <a:avLst/>
               <a:pathLst>
-                <a:path w="7799693" h="0">
+                <a:path w="0" h="1317069">
                   <a:moveTo>
+                    <a:pt x="0" y="1317069"/>
+                  </a:moveTo>
+                  <a:lnTo>
                     <a:pt x="0" y="0"/>
-                  </a:moveTo>
-                  <a:lnTo>
-                    <a:pt x="7799693" y="0"/>
-                  </a:lnTo>
-                  <a:lnTo>
-                    <a:pt x="7799693" y="0"/>
+                  </a:lnTo>
+                  <a:lnTo>
+                    <a:pt x="0" y="0"/>
                   </a:lnTo>
                 </a:path>
               </a:pathLst>
             </a:custGeom>
-            <a:ln w="13550" cap="flat">
+            <a:ln w="6775" cap="flat">
               <a:solidFill>
                 <a:srgbClr val="EBEBEB">
                   <a:alpha val="100000"/>
@@ -2701,21 +2693,21 @@
           </p:nvSpPr>
           <p:spPr>
             <a:xfrm>
-              <a:off x="817517" y="4727786"/>
-              <a:ext cx="7799693" cy="0"/>
+              <a:off x="887106" y="3400294"/>
+              <a:ext cx="7660515" cy="0"/>
             </a:xfrm>
             <a:custGeom>
               <a:avLst/>
               <a:pathLst>
-                <a:path w="7799693" h="0">
+                <a:path w="7660515" h="0">
                   <a:moveTo>
                     <a:pt x="0" y="0"/>
                   </a:moveTo>
                   <a:lnTo>
-                    <a:pt x="7799693" y="0"/>
-                  </a:lnTo>
-                  <a:lnTo>
-                    <a:pt x="7799693" y="0"/>
+                    <a:pt x="7660515" y="0"/>
+                  </a:lnTo>
+                  <a:lnTo>
+                    <a:pt x="7660515" y="0"/>
                   </a:lnTo>
                 </a:path>
               </a:pathLst>
@@ -2744,21 +2736,21 @@
           </p:nvSpPr>
           <p:spPr>
             <a:xfrm>
-              <a:off x="817517" y="3898322"/>
-              <a:ext cx="7799693" cy="0"/>
+              <a:off x="887106" y="3100960"/>
+              <a:ext cx="7660515" cy="0"/>
             </a:xfrm>
             <a:custGeom>
               <a:avLst/>
               <a:pathLst>
-                <a:path w="7799693" h="0">
+                <a:path w="7660515" h="0">
                   <a:moveTo>
                     <a:pt x="0" y="0"/>
                   </a:moveTo>
                   <a:lnTo>
-                    <a:pt x="7799693" y="0"/>
-                  </a:lnTo>
-                  <a:lnTo>
-                    <a:pt x="7799693" y="0"/>
+                    <a:pt x="7660515" y="0"/>
+                  </a:lnTo>
+                  <a:lnTo>
+                    <a:pt x="7660515" y="0"/>
                   </a:lnTo>
                 </a:path>
               </a:pathLst>
@@ -2787,21 +2779,21 @@
           </p:nvSpPr>
           <p:spPr>
             <a:xfrm>
-              <a:off x="817517" y="3068859"/>
-              <a:ext cx="7799693" cy="0"/>
+              <a:off x="887106" y="2801626"/>
+              <a:ext cx="7660515" cy="0"/>
             </a:xfrm>
             <a:custGeom>
               <a:avLst/>
               <a:pathLst>
-                <a:path w="7799693" h="0">
+                <a:path w="7660515" h="0">
                   <a:moveTo>
                     <a:pt x="0" y="0"/>
                   </a:moveTo>
                   <a:lnTo>
-                    <a:pt x="7799693" y="0"/>
-                  </a:lnTo>
-                  <a:lnTo>
-                    <a:pt x="7799693" y="0"/>
+                    <a:pt x="7660515" y="0"/>
+                  </a:lnTo>
+                  <a:lnTo>
+                    <a:pt x="7660515" y="0"/>
                   </a:lnTo>
                 </a:path>
               </a:pathLst>
@@ -2830,21 +2822,21 @@
           </p:nvSpPr>
           <p:spPr>
             <a:xfrm>
-              <a:off x="817517" y="2239395"/>
-              <a:ext cx="7799693" cy="0"/>
+              <a:off x="887106" y="2502292"/>
+              <a:ext cx="7660515" cy="0"/>
             </a:xfrm>
             <a:custGeom>
               <a:avLst/>
               <a:pathLst>
-                <a:path w="7799693" h="0">
+                <a:path w="7660515" h="0">
                   <a:moveTo>
                     <a:pt x="0" y="0"/>
                   </a:moveTo>
                   <a:lnTo>
-                    <a:pt x="7799693" y="0"/>
-                  </a:lnTo>
-                  <a:lnTo>
-                    <a:pt x="7799693" y="0"/>
+                    <a:pt x="7660515" y="0"/>
+                  </a:lnTo>
+                  <a:lnTo>
+                    <a:pt x="7660515" y="0"/>
                   </a:lnTo>
                 </a:path>
               </a:pathLst>
@@ -2873,21 +2865,21 @@
           </p:nvSpPr>
           <p:spPr>
             <a:xfrm>
-              <a:off x="2057816" y="2073503"/>
-              <a:ext cx="0" cy="3649639"/>
+              <a:off x="887106" y="2202958"/>
+              <a:ext cx="7660515" cy="0"/>
             </a:xfrm>
             <a:custGeom>
               <a:avLst/>
               <a:pathLst>
-                <a:path w="0" h="3649639">
+                <a:path w="7660515" h="0">
                   <a:moveTo>
-                    <a:pt x="0" y="3649639"/>
+                    <a:pt x="0" y="0"/>
                   </a:moveTo>
                   <a:lnTo>
-                    <a:pt x="0" y="0"/>
-                  </a:lnTo>
-                  <a:lnTo>
-                    <a:pt x="0" y="0"/>
+                    <a:pt x="7660515" y="0"/>
+                  </a:lnTo>
+                  <a:lnTo>
+                    <a:pt x="7660515" y="0"/>
                   </a:lnTo>
                 </a:path>
               </a:pathLst>
@@ -2916,15 +2908,15 @@
           </p:nvSpPr>
           <p:spPr>
             <a:xfrm>
-              <a:off x="3809601" y="2073503"/>
-              <a:ext cx="0" cy="3649639"/>
+              <a:off x="2105273" y="2143092"/>
+              <a:ext cx="0" cy="1317069"/>
             </a:xfrm>
             <a:custGeom>
               <a:avLst/>
               <a:pathLst>
-                <a:path w="0" h="3649639">
+                <a:path w="0" h="1317069">
                   <a:moveTo>
-                    <a:pt x="0" y="3649639"/>
+                    <a:pt x="0" y="1317069"/>
                   </a:moveTo>
                   <a:lnTo>
                     <a:pt x="0" y="0"/>
@@ -2959,15 +2951,15 @@
           </p:nvSpPr>
           <p:spPr>
             <a:xfrm>
-              <a:off x="5561386" y="2073503"/>
-              <a:ext cx="0" cy="3649639"/>
+              <a:off x="3825799" y="2143092"/>
+              <a:ext cx="0" cy="1317069"/>
             </a:xfrm>
             <a:custGeom>
               <a:avLst/>
               <a:pathLst>
-                <a:path w="0" h="3649639">
+                <a:path w="0" h="1317069">
                   <a:moveTo>
-                    <a:pt x="0" y="3649639"/>
+                    <a:pt x="0" y="1317069"/>
                   </a:moveTo>
                   <a:lnTo>
                     <a:pt x="0" y="0"/>
@@ -3002,15 +2994,15 @@
           </p:nvSpPr>
           <p:spPr>
             <a:xfrm>
-              <a:off x="7313171" y="2073503"/>
-              <a:ext cx="0" cy="3649639"/>
+              <a:off x="5546325" y="2143092"/>
+              <a:ext cx="0" cy="1317069"/>
             </a:xfrm>
             <a:custGeom>
               <a:avLst/>
               <a:pathLst>
-                <a:path w="0" h="3649639">
+                <a:path w="0" h="1317069">
                   <a:moveTo>
-                    <a:pt x="0" y="3649639"/>
+                    <a:pt x="0" y="1317069"/>
                   </a:moveTo>
                   <a:lnTo>
                     <a:pt x="0" y="0"/>
@@ -3039,618 +3031,661 @@
         </p:sp>
         <p:sp>
           <p:nvSpPr>
-            <p:cNvPr id="22" name="pg22"/>
+            <p:cNvPr id="22" name="pl22"/>
             <p:cNvSpPr/>
             <p:nvPr/>
           </p:nvSpPr>
           <p:spPr>
             <a:xfrm>
-              <a:off x="1172049" y="3387494"/>
-              <a:ext cx="7090630" cy="1940457"/>
+              <a:off x="7266851" y="2143092"/>
+              <a:ext cx="0" cy="1317069"/>
             </a:xfrm>
             <a:custGeom>
               <a:avLst/>
               <a:pathLst>
-                <a:path w="7090630" h="1940457">
+                <a:path w="0" h="1317069">
+                  <a:moveTo>
+                    <a:pt x="0" y="1317069"/>
+                  </a:moveTo>
+                  <a:lnTo>
+                    <a:pt x="0" y="0"/>
+                  </a:lnTo>
+                  <a:lnTo>
+                    <a:pt x="0" y="0"/>
+                  </a:lnTo>
+                </a:path>
+              </a:pathLst>
+            </a:custGeom>
+            <a:ln w="13550" cap="flat">
+              <a:solidFill>
+                <a:srgbClr val="EBEBEB">
+                  <a:alpha val="100000"/>
+                </a:srgbClr>
+              </a:solidFill>
+              <a:prstDash val="solid"/>
+              <a:round/>
+            </a:ln>
+          </p:spPr>
+          <p:txBody>
+            <a:bodyPr/>
+            <a:lstStyle/>
+            <a:p/>
+          </p:txBody>
+        </p:sp>
+        <p:sp>
+          <p:nvSpPr>
+            <p:cNvPr id="23" name="pg23"/>
+            <p:cNvSpPr/>
+            <p:nvPr/>
+          </p:nvSpPr>
+          <p:spPr>
+            <a:xfrm>
+              <a:off x="1235312" y="2617280"/>
+              <a:ext cx="6964104" cy="700265"/>
+            </a:xfrm>
+            <a:custGeom>
+              <a:avLst/>
+              <a:pathLst>
+                <a:path w="6964104" h="700265">
                   <a:moveTo>
                     <a:pt x="0" y="0"/>
                   </a:moveTo>
                   <a:lnTo>
-                    <a:pt x="71622" y="48699"/>
-                  </a:lnTo>
-                  <a:lnTo>
-                    <a:pt x="143245" y="96306"/>
-                  </a:lnTo>
-                  <a:lnTo>
-                    <a:pt x="214867" y="142844"/>
-                  </a:lnTo>
-                  <a:lnTo>
-                    <a:pt x="286490" y="188337"/>
-                  </a:lnTo>
-                  <a:lnTo>
-                    <a:pt x="358112" y="232810"/>
-                  </a:lnTo>
-                  <a:lnTo>
-                    <a:pt x="429735" y="276284"/>
-                  </a:lnTo>
-                  <a:lnTo>
-                    <a:pt x="501357" y="318782"/>
-                  </a:lnTo>
-                  <a:lnTo>
-                    <a:pt x="572980" y="360327"/>
-                  </a:lnTo>
-                  <a:lnTo>
-                    <a:pt x="644602" y="400939"/>
-                  </a:lnTo>
-                  <a:lnTo>
-                    <a:pt x="716225" y="440640"/>
-                  </a:lnTo>
-                  <a:lnTo>
-                    <a:pt x="787847" y="479449"/>
-                  </a:lnTo>
-                  <a:lnTo>
-                    <a:pt x="859470" y="517388"/>
-                  </a:lnTo>
-                  <a:lnTo>
-                    <a:pt x="931092" y="554475"/>
-                  </a:lnTo>
-                  <a:lnTo>
-                    <a:pt x="1002715" y="590729"/>
-                  </a:lnTo>
-                  <a:lnTo>
-                    <a:pt x="1074337" y="626170"/>
-                  </a:lnTo>
-                  <a:lnTo>
-                    <a:pt x="1145960" y="660816"/>
-                  </a:lnTo>
-                  <a:lnTo>
-                    <a:pt x="1217582" y="694683"/>
-                  </a:lnTo>
-                  <a:lnTo>
-                    <a:pt x="1289205" y="727791"/>
-                  </a:lnTo>
-                  <a:lnTo>
-                    <a:pt x="1360827" y="760156"/>
-                  </a:lnTo>
-                  <a:lnTo>
-                    <a:pt x="1432450" y="791794"/>
-                  </a:lnTo>
-                  <a:lnTo>
-                    <a:pt x="1504073" y="822722"/>
-                  </a:lnTo>
-                  <a:lnTo>
-                    <a:pt x="1575695" y="852956"/>
-                  </a:lnTo>
-                  <a:lnTo>
-                    <a:pt x="1647318" y="882511"/>
-                  </a:lnTo>
-                  <a:lnTo>
-                    <a:pt x="1718940" y="911403"/>
-                  </a:lnTo>
-                  <a:lnTo>
-                    <a:pt x="1790563" y="939646"/>
-                  </a:lnTo>
-                  <a:lnTo>
-                    <a:pt x="1862185" y="967256"/>
-                  </a:lnTo>
-                  <a:lnTo>
-                    <a:pt x="1933808" y="994245"/>
-                  </a:lnTo>
-                  <a:lnTo>
-                    <a:pt x="2005430" y="1020629"/>
-                  </a:lnTo>
-                  <a:lnTo>
-                    <a:pt x="2077053" y="1046421"/>
-                  </a:lnTo>
-                  <a:lnTo>
-                    <a:pt x="2148675" y="1071634"/>
-                  </a:lnTo>
-                  <a:lnTo>
-                    <a:pt x="2220298" y="1096281"/>
-                  </a:lnTo>
-                  <a:lnTo>
-                    <a:pt x="2291920" y="1120375"/>
-                  </a:lnTo>
-                  <a:lnTo>
-                    <a:pt x="2363543" y="1143928"/>
-                  </a:lnTo>
-                  <a:lnTo>
-                    <a:pt x="2435165" y="1166953"/>
-                  </a:lnTo>
-                  <a:lnTo>
-                    <a:pt x="2506788" y="1189460"/>
-                  </a:lnTo>
-                  <a:lnTo>
-                    <a:pt x="2578410" y="1211463"/>
-                  </a:lnTo>
-                  <a:lnTo>
-                    <a:pt x="2650033" y="1232971"/>
-                  </a:lnTo>
-                  <a:lnTo>
-                    <a:pt x="2721655" y="1253997"/>
-                  </a:lnTo>
-                  <a:lnTo>
-                    <a:pt x="2793278" y="1274551"/>
-                  </a:lnTo>
-                  <a:lnTo>
-                    <a:pt x="2864901" y="1294644"/>
-                  </a:lnTo>
-                  <a:lnTo>
-                    <a:pt x="2936523" y="1314285"/>
-                  </a:lnTo>
-                  <a:lnTo>
-                    <a:pt x="3008146" y="1333486"/>
-                  </a:lnTo>
-                  <a:lnTo>
-                    <a:pt x="3079768" y="1343475"/>
-                  </a:lnTo>
-                  <a:lnTo>
-                    <a:pt x="3151391" y="1348425"/>
-                  </a:lnTo>
-                  <a:lnTo>
-                    <a:pt x="3223013" y="1353346"/>
-                  </a:lnTo>
-                  <a:lnTo>
-                    <a:pt x="3294636" y="1358237"/>
-                  </a:lnTo>
-                  <a:lnTo>
-                    <a:pt x="3366258" y="1363098"/>
-                  </a:lnTo>
-                  <a:lnTo>
-                    <a:pt x="3437881" y="1367931"/>
-                  </a:lnTo>
-                  <a:lnTo>
-                    <a:pt x="3509503" y="1372734"/>
-                  </a:lnTo>
-                  <a:lnTo>
-                    <a:pt x="3581126" y="1377509"/>
-                  </a:lnTo>
-                  <a:lnTo>
-                    <a:pt x="3652748" y="1382255"/>
-                  </a:lnTo>
-                  <a:lnTo>
-                    <a:pt x="3724371" y="1386973"/>
-                  </a:lnTo>
-                  <a:lnTo>
-                    <a:pt x="3795993" y="1391663"/>
-                  </a:lnTo>
-                  <a:lnTo>
-                    <a:pt x="3867616" y="1396324"/>
-                  </a:lnTo>
-                  <a:lnTo>
-                    <a:pt x="3939238" y="1400957"/>
-                  </a:lnTo>
-                  <a:lnTo>
-                    <a:pt x="4010861" y="1405563"/>
-                  </a:lnTo>
-                  <a:lnTo>
-                    <a:pt x="4082483" y="1410141"/>
-                  </a:lnTo>
-                  <a:lnTo>
-                    <a:pt x="4154106" y="1414692"/>
-                  </a:lnTo>
-                  <a:lnTo>
-                    <a:pt x="4225729" y="1419215"/>
-                  </a:lnTo>
-                  <a:lnTo>
-                    <a:pt x="4297351" y="1423712"/>
-                  </a:lnTo>
-                  <a:lnTo>
-                    <a:pt x="4368974" y="1428181"/>
-                  </a:lnTo>
-                  <a:lnTo>
-                    <a:pt x="4440596" y="1432624"/>
-                  </a:lnTo>
-                  <a:lnTo>
-                    <a:pt x="4512219" y="1437040"/>
-                  </a:lnTo>
-                  <a:lnTo>
-                    <a:pt x="4583841" y="1441429"/>
-                  </a:lnTo>
-                  <a:lnTo>
-                    <a:pt x="4655464" y="1445792"/>
-                  </a:lnTo>
-                  <a:lnTo>
-                    <a:pt x="4727086" y="1450129"/>
-                  </a:lnTo>
-                  <a:lnTo>
-                    <a:pt x="4798709" y="1454441"/>
-                  </a:lnTo>
-                  <a:lnTo>
-                    <a:pt x="4870331" y="1458726"/>
-                  </a:lnTo>
-                  <a:lnTo>
-                    <a:pt x="4941954" y="1462985"/>
-                  </a:lnTo>
-                  <a:lnTo>
-                    <a:pt x="5013576" y="1467220"/>
-                  </a:lnTo>
-                  <a:lnTo>
-                    <a:pt x="5085199" y="1471428"/>
-                  </a:lnTo>
-                  <a:lnTo>
-                    <a:pt x="5156821" y="1475612"/>
-                  </a:lnTo>
-                  <a:lnTo>
-                    <a:pt x="5228444" y="1479770"/>
-                  </a:lnTo>
-                  <a:lnTo>
-                    <a:pt x="5300066" y="1483904"/>
-                  </a:lnTo>
-                  <a:lnTo>
-                    <a:pt x="5371689" y="1488013"/>
-                  </a:lnTo>
-                  <a:lnTo>
-                    <a:pt x="5443311" y="1492097"/>
-                  </a:lnTo>
-                  <a:lnTo>
-                    <a:pt x="5514934" y="1496156"/>
-                  </a:lnTo>
-                  <a:lnTo>
-                    <a:pt x="5586557" y="1500192"/>
-                  </a:lnTo>
-                  <a:lnTo>
-                    <a:pt x="5658179" y="1504203"/>
-                  </a:lnTo>
-                  <a:lnTo>
-                    <a:pt x="5729802" y="1508190"/>
-                  </a:lnTo>
-                  <a:lnTo>
-                    <a:pt x="5801424" y="1512153"/>
-                  </a:lnTo>
-                  <a:lnTo>
-                    <a:pt x="5873047" y="1516093"/>
-                  </a:lnTo>
-                  <a:lnTo>
-                    <a:pt x="5944669" y="1520009"/>
-                  </a:lnTo>
-                  <a:lnTo>
-                    <a:pt x="6016292" y="1523901"/>
-                  </a:lnTo>
-                  <a:lnTo>
-                    <a:pt x="6087914" y="1527771"/>
-                  </a:lnTo>
-                  <a:lnTo>
-                    <a:pt x="6159537" y="1531617"/>
-                  </a:lnTo>
-                  <a:lnTo>
-                    <a:pt x="6231159" y="1535439"/>
-                  </a:lnTo>
-                  <a:lnTo>
-                    <a:pt x="6302782" y="1539240"/>
-                  </a:lnTo>
-                  <a:lnTo>
-                    <a:pt x="6374404" y="1543017"/>
-                  </a:lnTo>
-                  <a:lnTo>
-                    <a:pt x="6446027" y="1546771"/>
-                  </a:lnTo>
-                  <a:lnTo>
-                    <a:pt x="6517649" y="1550504"/>
-                  </a:lnTo>
-                  <a:lnTo>
-                    <a:pt x="6589272" y="1554213"/>
-                  </a:lnTo>
-                  <a:lnTo>
-                    <a:pt x="6660894" y="1557901"/>
-                  </a:lnTo>
-                  <a:lnTo>
-                    <a:pt x="6732517" y="1561566"/>
-                  </a:lnTo>
-                  <a:lnTo>
-                    <a:pt x="6804139" y="1565210"/>
-                  </a:lnTo>
-                  <a:lnTo>
-                    <a:pt x="6875762" y="1568832"/>
-                  </a:lnTo>
-                  <a:lnTo>
-                    <a:pt x="6947385" y="1572432"/>
-                  </a:lnTo>
-                  <a:lnTo>
-                    <a:pt x="7019007" y="1576010"/>
-                  </a:lnTo>
-                  <a:lnTo>
-                    <a:pt x="7090630" y="1579567"/>
-                  </a:lnTo>
-                  <a:lnTo>
-                    <a:pt x="7090630" y="1940457"/>
-                  </a:lnTo>
-                  <a:lnTo>
-                    <a:pt x="7019007" y="1935192"/>
-                  </a:lnTo>
-                  <a:lnTo>
-                    <a:pt x="6947385" y="1929807"/>
-                  </a:lnTo>
-                  <a:lnTo>
-                    <a:pt x="6875762" y="1924297"/>
-                  </a:lnTo>
-                  <a:lnTo>
-                    <a:pt x="6804139" y="1918662"/>
-                  </a:lnTo>
-                  <a:lnTo>
-                    <a:pt x="6732517" y="1912896"/>
-                  </a:lnTo>
-                  <a:lnTo>
-                    <a:pt x="6660894" y="1906999"/>
-                  </a:lnTo>
-                  <a:lnTo>
-                    <a:pt x="6589272" y="1900966"/>
-                  </a:lnTo>
-                  <a:lnTo>
-                    <a:pt x="6517649" y="1894795"/>
-                  </a:lnTo>
-                  <a:lnTo>
-                    <a:pt x="6446027" y="1888482"/>
-                  </a:lnTo>
-                  <a:lnTo>
-                    <a:pt x="6374404" y="1882023"/>
-                  </a:lnTo>
-                  <a:lnTo>
-                    <a:pt x="6302782" y="1875417"/>
-                  </a:lnTo>
-                  <a:lnTo>
-                    <a:pt x="6231159" y="1868659"/>
-                  </a:lnTo>
-                  <a:lnTo>
-                    <a:pt x="6159537" y="1861746"/>
-                  </a:lnTo>
-                  <a:lnTo>
-                    <a:pt x="6087914" y="1854674"/>
-                  </a:lnTo>
-                  <a:lnTo>
-                    <a:pt x="6016292" y="1847440"/>
-                  </a:lnTo>
-                  <a:lnTo>
-                    <a:pt x="5944669" y="1840039"/>
-                  </a:lnTo>
-                  <a:lnTo>
-                    <a:pt x="5873047" y="1832469"/>
-                  </a:lnTo>
-                  <a:lnTo>
-                    <a:pt x="5801424" y="1824725"/>
-                  </a:lnTo>
-                  <a:lnTo>
-                    <a:pt x="5729802" y="1816803"/>
-                  </a:lnTo>
-                  <a:lnTo>
-                    <a:pt x="5658179" y="1808699"/>
-                  </a:lnTo>
-                  <a:lnTo>
-                    <a:pt x="5586557" y="1800409"/>
-                  </a:lnTo>
-                  <a:lnTo>
-                    <a:pt x="5514934" y="1791929"/>
-                  </a:lnTo>
-                  <a:lnTo>
-                    <a:pt x="5443311" y="1783254"/>
-                  </a:lnTo>
-                  <a:lnTo>
-                    <a:pt x="5371689" y="1774380"/>
-                  </a:lnTo>
-                  <a:lnTo>
-                    <a:pt x="5300066" y="1765302"/>
-                  </a:lnTo>
-                  <a:lnTo>
-                    <a:pt x="5228444" y="1756016"/>
-                  </a:lnTo>
-                  <a:lnTo>
-                    <a:pt x="5156821" y="1746517"/>
-                  </a:lnTo>
-                  <a:lnTo>
-                    <a:pt x="5085199" y="1736799"/>
-                  </a:lnTo>
-                  <a:lnTo>
-                    <a:pt x="5013576" y="1726858"/>
-                  </a:lnTo>
-                  <a:lnTo>
-                    <a:pt x="4941954" y="1716689"/>
-                  </a:lnTo>
-                  <a:lnTo>
-                    <a:pt x="4870331" y="1706287"/>
-                  </a:lnTo>
-                  <a:lnTo>
-                    <a:pt x="4798709" y="1695646"/>
-                  </a:lnTo>
-                  <a:lnTo>
-                    <a:pt x="4727086" y="1684760"/>
-                  </a:lnTo>
-                  <a:lnTo>
-                    <a:pt x="4655464" y="1673624"/>
-                  </a:lnTo>
-                  <a:lnTo>
-                    <a:pt x="4583841" y="1662233"/>
-                  </a:lnTo>
-                  <a:lnTo>
-                    <a:pt x="4512219" y="1650580"/>
-                  </a:lnTo>
-                  <a:lnTo>
-                    <a:pt x="4440596" y="1638660"/>
-                  </a:lnTo>
-                  <a:lnTo>
-                    <a:pt x="4368974" y="1626466"/>
-                  </a:lnTo>
-                  <a:lnTo>
-                    <a:pt x="4297351" y="1613992"/>
-                  </a:lnTo>
-                  <a:lnTo>
-                    <a:pt x="4225729" y="1601232"/>
-                  </a:lnTo>
-                  <a:lnTo>
-                    <a:pt x="4154106" y="1588179"/>
-                  </a:lnTo>
-                  <a:lnTo>
-                    <a:pt x="4082483" y="1574826"/>
-                  </a:lnTo>
-                  <a:lnTo>
-                    <a:pt x="4010861" y="1561166"/>
-                  </a:lnTo>
-                  <a:lnTo>
-                    <a:pt x="3939238" y="1547193"/>
-                  </a:lnTo>
-                  <a:lnTo>
-                    <a:pt x="3867616" y="1532899"/>
-                  </a:lnTo>
-                  <a:lnTo>
-                    <a:pt x="3795993" y="1518276"/>
-                  </a:lnTo>
-                  <a:lnTo>
-                    <a:pt x="3724371" y="1503318"/>
-                  </a:lnTo>
-                  <a:lnTo>
-                    <a:pt x="3652748" y="1488017"/>
-                  </a:lnTo>
-                  <a:lnTo>
-                    <a:pt x="3581126" y="1472364"/>
-                  </a:lnTo>
-                  <a:lnTo>
-                    <a:pt x="3509503" y="1456352"/>
-                  </a:lnTo>
-                  <a:lnTo>
-                    <a:pt x="3437881" y="1439972"/>
-                  </a:lnTo>
-                  <a:lnTo>
-                    <a:pt x="3366258" y="1423216"/>
-                  </a:lnTo>
-                  <a:lnTo>
-                    <a:pt x="3294636" y="1406076"/>
-                  </a:lnTo>
-                  <a:lnTo>
-                    <a:pt x="3223013" y="1388541"/>
-                  </a:lnTo>
-                  <a:lnTo>
-                    <a:pt x="3151391" y="1370605"/>
-                  </a:lnTo>
-                  <a:lnTo>
-                    <a:pt x="3079768" y="1352256"/>
-                  </a:lnTo>
-                  <a:lnTo>
-                    <a:pt x="3008146" y="1338496"/>
-                  </a:lnTo>
-                  <a:lnTo>
-                    <a:pt x="2936523" y="1333486"/>
-                  </a:lnTo>
-                  <a:lnTo>
-                    <a:pt x="2864901" y="1328446"/>
-                  </a:lnTo>
-                  <a:lnTo>
-                    <a:pt x="2793278" y="1323375"/>
-                  </a:lnTo>
-                  <a:lnTo>
-                    <a:pt x="2721655" y="1318274"/>
-                  </a:lnTo>
-                  <a:lnTo>
-                    <a:pt x="2650033" y="1313142"/>
-                  </a:lnTo>
-                  <a:lnTo>
-                    <a:pt x="2578410" y="1307980"/>
-                  </a:lnTo>
-                  <a:lnTo>
-                    <a:pt x="2506788" y="1302786"/>
-                  </a:lnTo>
-                  <a:lnTo>
-                    <a:pt x="2435165" y="1297561"/>
-                  </a:lnTo>
-                  <a:lnTo>
-                    <a:pt x="2363543" y="1292304"/>
-                  </a:lnTo>
-                  <a:lnTo>
-                    <a:pt x="2291920" y="1287016"/>
-                  </a:lnTo>
-                  <a:lnTo>
-                    <a:pt x="2220298" y="1281696"/>
-                  </a:lnTo>
-                  <a:lnTo>
-                    <a:pt x="2148675" y="1276343"/>
-                  </a:lnTo>
-                  <a:lnTo>
-                    <a:pt x="2077053" y="1270959"/>
-                  </a:lnTo>
-                  <a:lnTo>
-                    <a:pt x="2005430" y="1265542"/>
-                  </a:lnTo>
-                  <a:lnTo>
-                    <a:pt x="1933808" y="1260092"/>
-                  </a:lnTo>
-                  <a:lnTo>
-                    <a:pt x="1862185" y="1254610"/>
-                  </a:lnTo>
-                  <a:lnTo>
-                    <a:pt x="1790563" y="1249094"/>
-                  </a:lnTo>
-                  <a:lnTo>
-                    <a:pt x="1718940" y="1243546"/>
-                  </a:lnTo>
-                  <a:lnTo>
-                    <a:pt x="1647318" y="1237964"/>
-                  </a:lnTo>
-                  <a:lnTo>
-                    <a:pt x="1575695" y="1232348"/>
-                  </a:lnTo>
-                  <a:lnTo>
-                    <a:pt x="1504073" y="1226698"/>
-                  </a:lnTo>
-                  <a:lnTo>
-                    <a:pt x="1432450" y="1221015"/>
-                  </a:lnTo>
-                  <a:lnTo>
-                    <a:pt x="1360827" y="1215297"/>
-                  </a:lnTo>
-                  <a:lnTo>
-                    <a:pt x="1289205" y="1209544"/>
-                  </a:lnTo>
-                  <a:lnTo>
-                    <a:pt x="1217582" y="1203757"/>
-                  </a:lnTo>
-                  <a:lnTo>
-                    <a:pt x="1145960" y="1197935"/>
-                  </a:lnTo>
-                  <a:lnTo>
-                    <a:pt x="1074337" y="1192078"/>
-                  </a:lnTo>
-                  <a:lnTo>
-                    <a:pt x="1002715" y="1186186"/>
-                  </a:lnTo>
-                  <a:lnTo>
-                    <a:pt x="931092" y="1180258"/>
-                  </a:lnTo>
-                  <a:lnTo>
-                    <a:pt x="859470" y="1174294"/>
-                  </a:lnTo>
-                  <a:lnTo>
-                    <a:pt x="787847" y="1168295"/>
-                  </a:lnTo>
-                  <a:lnTo>
-                    <a:pt x="716225" y="1162259"/>
-                  </a:lnTo>
-                  <a:lnTo>
-                    <a:pt x="644602" y="1156187"/>
-                  </a:lnTo>
-                  <a:lnTo>
-                    <a:pt x="572980" y="1150078"/>
-                  </a:lnTo>
-                  <a:lnTo>
-                    <a:pt x="501357" y="1143933"/>
-                  </a:lnTo>
-                  <a:lnTo>
-                    <a:pt x="429735" y="1137750"/>
-                  </a:lnTo>
-                  <a:lnTo>
-                    <a:pt x="358112" y="1131531"/>
-                  </a:lnTo>
-                  <a:lnTo>
-                    <a:pt x="286490" y="1125273"/>
-                  </a:lnTo>
-                  <a:lnTo>
-                    <a:pt x="214867" y="1118979"/>
-                  </a:lnTo>
-                  <a:lnTo>
-                    <a:pt x="143245" y="1112646"/>
-                  </a:lnTo>
-                  <a:lnTo>
-                    <a:pt x="71622" y="1106275"/>
-                  </a:lnTo>
-                  <a:lnTo>
-                    <a:pt x="0" y="1099865"/>
+                    <a:pt x="70344" y="17574"/>
+                  </a:lnTo>
+                  <a:lnTo>
+                    <a:pt x="140688" y="34754"/>
+                  </a:lnTo>
+                  <a:lnTo>
+                    <a:pt x="211033" y="51549"/>
+                  </a:lnTo>
+                  <a:lnTo>
+                    <a:pt x="281377" y="67966"/>
+                  </a:lnTo>
+                  <a:lnTo>
+                    <a:pt x="351722" y="84015"/>
+                  </a:lnTo>
+                  <a:lnTo>
+                    <a:pt x="422066" y="99704"/>
+                  </a:lnTo>
+                  <a:lnTo>
+                    <a:pt x="492411" y="115041"/>
+                  </a:lnTo>
+                  <a:lnTo>
+                    <a:pt x="562755" y="130033"/>
+                  </a:lnTo>
+                  <a:lnTo>
+                    <a:pt x="633100" y="144689"/>
+                  </a:lnTo>
+                  <a:lnTo>
+                    <a:pt x="703444" y="159016"/>
+                  </a:lnTo>
+                  <a:lnTo>
+                    <a:pt x="773789" y="173022"/>
+                  </a:lnTo>
+                  <a:lnTo>
+                    <a:pt x="844133" y="186713"/>
+                  </a:lnTo>
+                  <a:lnTo>
+                    <a:pt x="914478" y="200097"/>
+                  </a:lnTo>
+                  <a:lnTo>
+                    <a:pt x="984822" y="213180"/>
+                  </a:lnTo>
+                  <a:lnTo>
+                    <a:pt x="1055167" y="225970"/>
+                  </a:lnTo>
+                  <a:lnTo>
+                    <a:pt x="1125511" y="238473"/>
+                  </a:lnTo>
+                  <a:lnTo>
+                    <a:pt x="1195856" y="250695"/>
+                  </a:lnTo>
+                  <a:lnTo>
+                    <a:pt x="1266200" y="262642"/>
+                  </a:lnTo>
+                  <a:lnTo>
+                    <a:pt x="1336545" y="274322"/>
+                  </a:lnTo>
+                  <a:lnTo>
+                    <a:pt x="1406889" y="285739"/>
+                  </a:lnTo>
+                  <a:lnTo>
+                    <a:pt x="1477234" y="296901"/>
+                  </a:lnTo>
+                  <a:lnTo>
+                    <a:pt x="1547578" y="307811"/>
+                  </a:lnTo>
+                  <a:lnTo>
+                    <a:pt x="1617923" y="318477"/>
+                  </a:lnTo>
+                  <a:lnTo>
+                    <a:pt x="1688267" y="328903"/>
+                  </a:lnTo>
+                  <a:lnTo>
+                    <a:pt x="1758612" y="339096"/>
+                  </a:lnTo>
+                  <a:lnTo>
+                    <a:pt x="1828956" y="349059"/>
+                  </a:lnTo>
+                  <a:lnTo>
+                    <a:pt x="1899301" y="358799"/>
+                  </a:lnTo>
+                  <a:lnTo>
+                    <a:pt x="1969645" y="368321"/>
+                  </a:lnTo>
+                  <a:lnTo>
+                    <a:pt x="2039990" y="377628"/>
+                  </a:lnTo>
+                  <a:lnTo>
+                    <a:pt x="2110334" y="386727"/>
+                  </a:lnTo>
+                  <a:lnTo>
+                    <a:pt x="2180679" y="395622"/>
+                  </a:lnTo>
+                  <a:lnTo>
+                    <a:pt x="2251023" y="404317"/>
+                  </a:lnTo>
+                  <a:lnTo>
+                    <a:pt x="2321368" y="412816"/>
+                  </a:lnTo>
+                  <a:lnTo>
+                    <a:pt x="2391712" y="421125"/>
+                  </a:lnTo>
+                  <a:lnTo>
+                    <a:pt x="2462057" y="429248"/>
+                  </a:lnTo>
+                  <a:lnTo>
+                    <a:pt x="2532401" y="437188"/>
+                  </a:lnTo>
+                  <a:lnTo>
+                    <a:pt x="2602746" y="444950"/>
+                  </a:lnTo>
+                  <a:lnTo>
+                    <a:pt x="2673090" y="452538"/>
+                  </a:lnTo>
+                  <a:lnTo>
+                    <a:pt x="2743435" y="459955"/>
+                  </a:lnTo>
+                  <a:lnTo>
+                    <a:pt x="2813779" y="467206"/>
+                  </a:lnTo>
+                  <a:lnTo>
+                    <a:pt x="2884124" y="474294"/>
+                  </a:lnTo>
+                  <a:lnTo>
+                    <a:pt x="2954468" y="481224"/>
+                  </a:lnTo>
+                  <a:lnTo>
+                    <a:pt x="3024813" y="484828"/>
+                  </a:lnTo>
+                  <a:lnTo>
+                    <a:pt x="3095157" y="486615"/>
+                  </a:lnTo>
+                  <a:lnTo>
+                    <a:pt x="3165502" y="488390"/>
+                  </a:lnTo>
+                  <a:lnTo>
+                    <a:pt x="3235846" y="490155"/>
+                  </a:lnTo>
+                  <a:lnTo>
+                    <a:pt x="3306191" y="491910"/>
+                  </a:lnTo>
+                  <a:lnTo>
+                    <a:pt x="3376535" y="493654"/>
+                  </a:lnTo>
+                  <a:lnTo>
+                    <a:pt x="3446880" y="495387"/>
+                  </a:lnTo>
+                  <a:lnTo>
+                    <a:pt x="3517224" y="497110"/>
+                  </a:lnTo>
+                  <a:lnTo>
+                    <a:pt x="3587569" y="498823"/>
+                  </a:lnTo>
+                  <a:lnTo>
+                    <a:pt x="3657913" y="500526"/>
+                  </a:lnTo>
+                  <a:lnTo>
+                    <a:pt x="3728257" y="502218"/>
+                  </a:lnTo>
+                  <a:lnTo>
+                    <a:pt x="3798602" y="503900"/>
+                  </a:lnTo>
+                  <a:lnTo>
+                    <a:pt x="3868946" y="505572"/>
+                  </a:lnTo>
+                  <a:lnTo>
+                    <a:pt x="3939291" y="507234"/>
+                  </a:lnTo>
+                  <a:lnTo>
+                    <a:pt x="4009635" y="508886"/>
+                  </a:lnTo>
+                  <a:lnTo>
+                    <a:pt x="4079980" y="510529"/>
+                  </a:lnTo>
+                  <a:lnTo>
+                    <a:pt x="4150324" y="512161"/>
+                  </a:lnTo>
+                  <a:lnTo>
+                    <a:pt x="4220669" y="513784"/>
+                  </a:lnTo>
+                  <a:lnTo>
+                    <a:pt x="4291013" y="515397"/>
+                  </a:lnTo>
+                  <a:lnTo>
+                    <a:pt x="4361358" y="517000"/>
+                  </a:lnTo>
+                  <a:lnTo>
+                    <a:pt x="4431702" y="518593"/>
+                  </a:lnTo>
+                  <a:lnTo>
+                    <a:pt x="4502047" y="520178"/>
+                  </a:lnTo>
+                  <a:lnTo>
+                    <a:pt x="4572391" y="521752"/>
+                  </a:lnTo>
+                  <a:lnTo>
+                    <a:pt x="4642736" y="523317"/>
+                  </a:lnTo>
+                  <a:lnTo>
+                    <a:pt x="4713080" y="524873"/>
+                  </a:lnTo>
+                  <a:lnTo>
+                    <a:pt x="4783425" y="526420"/>
+                  </a:lnTo>
+                  <a:lnTo>
+                    <a:pt x="4853769" y="527957"/>
+                  </a:lnTo>
+                  <a:lnTo>
+                    <a:pt x="4924114" y="529485"/>
+                  </a:lnTo>
+                  <a:lnTo>
+                    <a:pt x="4994458" y="531004"/>
+                  </a:lnTo>
+                  <a:lnTo>
+                    <a:pt x="5064803" y="532513"/>
+                  </a:lnTo>
+                  <a:lnTo>
+                    <a:pt x="5135147" y="534014"/>
+                  </a:lnTo>
+                  <a:lnTo>
+                    <a:pt x="5205492" y="535506"/>
+                  </a:lnTo>
+                  <a:lnTo>
+                    <a:pt x="5275836" y="536988"/>
+                  </a:lnTo>
+                  <a:lnTo>
+                    <a:pt x="5346181" y="538462"/>
+                  </a:lnTo>
+                  <a:lnTo>
+                    <a:pt x="5416525" y="539927"/>
+                  </a:lnTo>
+                  <a:lnTo>
+                    <a:pt x="5486870" y="541384"/>
+                  </a:lnTo>
+                  <a:lnTo>
+                    <a:pt x="5557214" y="542831"/>
+                  </a:lnTo>
+                  <a:lnTo>
+                    <a:pt x="5627559" y="544270"/>
+                  </a:lnTo>
+                  <a:lnTo>
+                    <a:pt x="5697903" y="545700"/>
+                  </a:lnTo>
+                  <a:lnTo>
+                    <a:pt x="5768248" y="547122"/>
+                  </a:lnTo>
+                  <a:lnTo>
+                    <a:pt x="5838592" y="548535"/>
+                  </a:lnTo>
+                  <a:lnTo>
+                    <a:pt x="5908937" y="549940"/>
+                  </a:lnTo>
+                  <a:lnTo>
+                    <a:pt x="5979281" y="551336"/>
+                  </a:lnTo>
+                  <a:lnTo>
+                    <a:pt x="6049626" y="552724"/>
+                  </a:lnTo>
+                  <a:lnTo>
+                    <a:pt x="6119970" y="554104"/>
+                  </a:lnTo>
+                  <a:lnTo>
+                    <a:pt x="6190315" y="555475"/>
+                  </a:lnTo>
+                  <a:lnTo>
+                    <a:pt x="6260659" y="556838"/>
+                  </a:lnTo>
+                  <a:lnTo>
+                    <a:pt x="6331004" y="558193"/>
+                  </a:lnTo>
+                  <a:lnTo>
+                    <a:pt x="6401348" y="559540"/>
+                  </a:lnTo>
+                  <a:lnTo>
+                    <a:pt x="6471693" y="560879"/>
+                  </a:lnTo>
+                  <a:lnTo>
+                    <a:pt x="6542037" y="562209"/>
+                  </a:lnTo>
+                  <a:lnTo>
+                    <a:pt x="6612382" y="563532"/>
+                  </a:lnTo>
+                  <a:lnTo>
+                    <a:pt x="6682726" y="564847"/>
+                  </a:lnTo>
+                  <a:lnTo>
+                    <a:pt x="6753071" y="566154"/>
+                  </a:lnTo>
+                  <a:lnTo>
+                    <a:pt x="6823415" y="567453"/>
+                  </a:lnTo>
+                  <a:lnTo>
+                    <a:pt x="6893760" y="568745"/>
+                  </a:lnTo>
+                  <a:lnTo>
+                    <a:pt x="6964104" y="570028"/>
+                  </a:lnTo>
+                  <a:lnTo>
+                    <a:pt x="6964104" y="700265"/>
+                  </a:lnTo>
+                  <a:lnTo>
+                    <a:pt x="6893760" y="698365"/>
+                  </a:lnTo>
+                  <a:lnTo>
+                    <a:pt x="6823415" y="696421"/>
+                  </a:lnTo>
+                  <a:lnTo>
+                    <a:pt x="6753071" y="694433"/>
+                  </a:lnTo>
+                  <a:lnTo>
+                    <a:pt x="6682726" y="692400"/>
+                  </a:lnTo>
+                  <a:lnTo>
+                    <a:pt x="6612382" y="690319"/>
+                  </a:lnTo>
+                  <a:lnTo>
+                    <a:pt x="6542037" y="688191"/>
+                  </a:lnTo>
+                  <a:lnTo>
+                    <a:pt x="6471693" y="686014"/>
+                  </a:lnTo>
+                  <a:lnTo>
+                    <a:pt x="6401348" y="683786"/>
+                  </a:lnTo>
+                  <a:lnTo>
+                    <a:pt x="6331004" y="681508"/>
+                  </a:lnTo>
+                  <a:lnTo>
+                    <a:pt x="6260659" y="679178"/>
+                  </a:lnTo>
+                  <a:lnTo>
+                    <a:pt x="6190315" y="676794"/>
+                  </a:lnTo>
+                  <a:lnTo>
+                    <a:pt x="6119970" y="674355"/>
+                  </a:lnTo>
+                  <a:lnTo>
+                    <a:pt x="6049626" y="671860"/>
+                  </a:lnTo>
+                  <a:lnTo>
+                    <a:pt x="5979281" y="669308"/>
+                  </a:lnTo>
+                  <a:lnTo>
+                    <a:pt x="5908937" y="666697"/>
+                  </a:lnTo>
+                  <a:lnTo>
+                    <a:pt x="5838592" y="664027"/>
+                  </a:lnTo>
+                  <a:lnTo>
+                    <a:pt x="5768248" y="661295"/>
+                  </a:lnTo>
+                  <a:lnTo>
+                    <a:pt x="5697903" y="658500"/>
+                  </a:lnTo>
+                  <a:lnTo>
+                    <a:pt x="5627559" y="655641"/>
+                  </a:lnTo>
+                  <a:lnTo>
+                    <a:pt x="5557214" y="652717"/>
+                  </a:lnTo>
+                  <a:lnTo>
+                    <a:pt x="5486870" y="649725"/>
+                  </a:lnTo>
+                  <a:lnTo>
+                    <a:pt x="5416525" y="646665"/>
+                  </a:lnTo>
+                  <a:lnTo>
+                    <a:pt x="5346181" y="643534"/>
+                  </a:lnTo>
+                  <a:lnTo>
+                    <a:pt x="5275836" y="640332"/>
+                  </a:lnTo>
+                  <a:lnTo>
+                    <a:pt x="5205492" y="637056"/>
+                  </a:lnTo>
+                  <a:lnTo>
+                    <a:pt x="5135147" y="633705"/>
+                  </a:lnTo>
+                  <a:lnTo>
+                    <a:pt x="5064803" y="630276"/>
+                  </a:lnTo>
+                  <a:lnTo>
+                    <a:pt x="4994458" y="626770"/>
+                  </a:lnTo>
+                  <a:lnTo>
+                    <a:pt x="4924114" y="623182"/>
+                  </a:lnTo>
+                  <a:lnTo>
+                    <a:pt x="4853769" y="619512"/>
+                  </a:lnTo>
+                  <a:lnTo>
+                    <a:pt x="4783425" y="615758"/>
+                  </a:lnTo>
+                  <a:lnTo>
+                    <a:pt x="4713080" y="611918"/>
+                  </a:lnTo>
+                  <a:lnTo>
+                    <a:pt x="4642736" y="607990"/>
+                  </a:lnTo>
+                  <a:lnTo>
+                    <a:pt x="4572391" y="603971"/>
+                  </a:lnTo>
+                  <a:lnTo>
+                    <a:pt x="4502047" y="599861"/>
+                  </a:lnTo>
+                  <a:lnTo>
+                    <a:pt x="4431702" y="595655"/>
+                  </a:lnTo>
+                  <a:lnTo>
+                    <a:pt x="4361358" y="591354"/>
+                  </a:lnTo>
+                  <a:lnTo>
+                    <a:pt x="4291013" y="586953"/>
+                  </a:lnTo>
+                  <a:lnTo>
+                    <a:pt x="4220669" y="582452"/>
+                  </a:lnTo>
+                  <a:lnTo>
+                    <a:pt x="4150324" y="577847"/>
+                  </a:lnTo>
+                  <a:lnTo>
+                    <a:pt x="4079980" y="573136"/>
+                  </a:lnTo>
+                  <a:lnTo>
+                    <a:pt x="4009635" y="568317"/>
+                  </a:lnTo>
+                  <a:lnTo>
+                    <a:pt x="3939291" y="563388"/>
+                  </a:lnTo>
+                  <a:lnTo>
+                    <a:pt x="3868946" y="558345"/>
+                  </a:lnTo>
+                  <a:lnTo>
+                    <a:pt x="3798602" y="553187"/>
+                  </a:lnTo>
+                  <a:lnTo>
+                    <a:pt x="3728257" y="547910"/>
+                  </a:lnTo>
+                  <a:lnTo>
+                    <a:pt x="3657913" y="542512"/>
+                  </a:lnTo>
+                  <a:lnTo>
+                    <a:pt x="3587569" y="536990"/>
+                  </a:lnTo>
+                  <a:lnTo>
+                    <a:pt x="3517224" y="531341"/>
+                  </a:lnTo>
+                  <a:lnTo>
+                    <a:pt x="3446880" y="525563"/>
+                  </a:lnTo>
+                  <a:lnTo>
+                    <a:pt x="3376535" y="519652"/>
+                  </a:lnTo>
+                  <a:lnTo>
+                    <a:pt x="3306191" y="513605"/>
+                  </a:lnTo>
+                  <a:lnTo>
+                    <a:pt x="3235846" y="507419"/>
+                  </a:lnTo>
+                  <a:lnTo>
+                    <a:pt x="3165502" y="501092"/>
+                  </a:lnTo>
+                  <a:lnTo>
+                    <a:pt x="3095157" y="494619"/>
+                  </a:lnTo>
+                  <a:lnTo>
+                    <a:pt x="3024813" y="487997"/>
+                  </a:lnTo>
+                  <a:lnTo>
+                    <a:pt x="2954468" y="483031"/>
+                  </a:lnTo>
+                  <a:lnTo>
+                    <a:pt x="2884124" y="481223"/>
+                  </a:lnTo>
+                  <a:lnTo>
+                    <a:pt x="2813779" y="479404"/>
+                  </a:lnTo>
+                  <a:lnTo>
+                    <a:pt x="2743435" y="477575"/>
+                  </a:lnTo>
+                  <a:lnTo>
+                    <a:pt x="2673090" y="475734"/>
+                  </a:lnTo>
+                  <a:lnTo>
+                    <a:pt x="2602746" y="473882"/>
+                  </a:lnTo>
+                  <a:lnTo>
+                    <a:pt x="2532401" y="472019"/>
+                  </a:lnTo>
+                  <a:lnTo>
+                    <a:pt x="2462057" y="470144"/>
+                  </a:lnTo>
+                  <a:lnTo>
+                    <a:pt x="2391712" y="468259"/>
+                  </a:lnTo>
+                  <a:lnTo>
+                    <a:pt x="2321368" y="466362"/>
+                  </a:lnTo>
+                  <a:lnTo>
+                    <a:pt x="2251023" y="464453"/>
+                  </a:lnTo>
+                  <a:lnTo>
+                    <a:pt x="2180679" y="462533"/>
+                  </a:lnTo>
+                  <a:lnTo>
+                    <a:pt x="2110334" y="460602"/>
+                  </a:lnTo>
+                  <a:lnTo>
+                    <a:pt x="2039990" y="458659"/>
+                  </a:lnTo>
+                  <a:lnTo>
+                    <a:pt x="1969645" y="456704"/>
+                  </a:lnTo>
+                  <a:lnTo>
+                    <a:pt x="1899301" y="454737"/>
+                  </a:lnTo>
+                  <a:lnTo>
+                    <a:pt x="1828956" y="452759"/>
+                  </a:lnTo>
+                  <a:lnTo>
+                    <a:pt x="1758612" y="450768"/>
+                  </a:lnTo>
+                  <a:lnTo>
+                    <a:pt x="1688267" y="448766"/>
+                  </a:lnTo>
+                  <a:lnTo>
+                    <a:pt x="1617923" y="446752"/>
+                  </a:lnTo>
+                  <a:lnTo>
+                    <a:pt x="1547578" y="444725"/>
+                  </a:lnTo>
+                  <a:lnTo>
+                    <a:pt x="1477234" y="442686"/>
+                  </a:lnTo>
+                  <a:lnTo>
+                    <a:pt x="1406889" y="440635"/>
+                  </a:lnTo>
+                  <a:lnTo>
+                    <a:pt x="1336545" y="438572"/>
+                  </a:lnTo>
+                  <a:lnTo>
+                    <a:pt x="1266200" y="436496"/>
+                  </a:lnTo>
+                  <a:lnTo>
+                    <a:pt x="1195856" y="434407"/>
+                  </a:lnTo>
+                  <a:lnTo>
+                    <a:pt x="1125511" y="432306"/>
+                  </a:lnTo>
+                  <a:lnTo>
+                    <a:pt x="1055167" y="430193"/>
+                  </a:lnTo>
+                  <a:lnTo>
+                    <a:pt x="984822" y="428066"/>
+                  </a:lnTo>
+                  <a:lnTo>
+                    <a:pt x="914478" y="425927"/>
+                  </a:lnTo>
+                  <a:lnTo>
+                    <a:pt x="844133" y="423775"/>
+                  </a:lnTo>
+                  <a:lnTo>
+                    <a:pt x="773789" y="421610"/>
+                  </a:lnTo>
+                  <a:lnTo>
+                    <a:pt x="703444" y="419432"/>
+                  </a:lnTo>
+                  <a:lnTo>
+                    <a:pt x="633100" y="417240"/>
+                  </a:lnTo>
+                  <a:lnTo>
+                    <a:pt x="562755" y="415036"/>
+                  </a:lnTo>
+                  <a:lnTo>
+                    <a:pt x="492411" y="412818"/>
+                  </a:lnTo>
+                  <a:lnTo>
+                    <a:pt x="422066" y="410587"/>
+                  </a:lnTo>
+                  <a:lnTo>
+                    <a:pt x="351722" y="408342"/>
+                  </a:lnTo>
+                  <a:lnTo>
+                    <a:pt x="281377" y="406084"/>
+                  </a:lnTo>
+                  <a:lnTo>
+                    <a:pt x="211033" y="403813"/>
+                  </a:lnTo>
+                  <a:lnTo>
+                    <a:pt x="140688" y="401527"/>
+                  </a:lnTo>
+                  <a:lnTo>
+                    <a:pt x="70344" y="399228"/>
+                  </a:lnTo>
+                  <a:lnTo>
+                    <a:pt x="0" y="396915"/>
                   </a:lnTo>
                   <a:close/>
                 </a:path>
@@ -3670,643 +3705,318 @@
         </p:sp>
         <p:sp>
           <p:nvSpPr>
-            <p:cNvPr id="23" name="pl23"/>
-            <p:cNvSpPr/>
-            <p:nvPr/>
-          </p:nvSpPr>
-          <p:spPr>
-            <a:xfrm>
-              <a:off x="1172049" y="3387494"/>
-              <a:ext cx="7090630" cy="1579567"/>
-            </a:xfrm>
-            <a:custGeom>
-              <a:avLst/>
-              <a:pathLst>
-                <a:path w="7090630" h="1579567">
-                  <a:moveTo>
-                    <a:pt x="0" y="0"/>
-                  </a:moveTo>
-                  <a:lnTo>
-                    <a:pt x="71622" y="48699"/>
-                  </a:lnTo>
-                  <a:lnTo>
-                    <a:pt x="143245" y="96306"/>
-                  </a:lnTo>
-                  <a:lnTo>
-                    <a:pt x="214867" y="142844"/>
-                  </a:lnTo>
-                  <a:lnTo>
-                    <a:pt x="286490" y="188337"/>
-                  </a:lnTo>
-                  <a:lnTo>
-                    <a:pt x="358112" y="232810"/>
-                  </a:lnTo>
-                  <a:lnTo>
-                    <a:pt x="429735" y="276284"/>
-                  </a:lnTo>
-                  <a:lnTo>
-                    <a:pt x="501357" y="318782"/>
-                  </a:lnTo>
-                  <a:lnTo>
-                    <a:pt x="572980" y="360327"/>
-                  </a:lnTo>
-                  <a:lnTo>
-                    <a:pt x="644602" y="400939"/>
-                  </a:lnTo>
-                  <a:lnTo>
-                    <a:pt x="716225" y="440640"/>
-                  </a:lnTo>
-                  <a:lnTo>
-                    <a:pt x="787847" y="479449"/>
-                  </a:lnTo>
-                  <a:lnTo>
-                    <a:pt x="859470" y="517388"/>
-                  </a:lnTo>
-                  <a:lnTo>
-                    <a:pt x="931092" y="554475"/>
-                  </a:lnTo>
-                  <a:lnTo>
-                    <a:pt x="1002715" y="590729"/>
-                  </a:lnTo>
-                  <a:lnTo>
-                    <a:pt x="1074337" y="626170"/>
-                  </a:lnTo>
-                  <a:lnTo>
-                    <a:pt x="1145960" y="660816"/>
-                  </a:lnTo>
-                  <a:lnTo>
-                    <a:pt x="1217582" y="694683"/>
-                  </a:lnTo>
-                  <a:lnTo>
-                    <a:pt x="1289205" y="727791"/>
-                  </a:lnTo>
-                  <a:lnTo>
-                    <a:pt x="1360827" y="760156"/>
-                  </a:lnTo>
-                  <a:lnTo>
-                    <a:pt x="1432450" y="791794"/>
-                  </a:lnTo>
-                  <a:lnTo>
-                    <a:pt x="1504073" y="822722"/>
-                  </a:lnTo>
-                  <a:lnTo>
-                    <a:pt x="1575695" y="852956"/>
-                  </a:lnTo>
-                  <a:lnTo>
-                    <a:pt x="1647318" y="882511"/>
-                  </a:lnTo>
-                  <a:lnTo>
-                    <a:pt x="1718940" y="911403"/>
-                  </a:lnTo>
-                  <a:lnTo>
-                    <a:pt x="1790563" y="939646"/>
-                  </a:lnTo>
-                  <a:lnTo>
-                    <a:pt x="1862185" y="967256"/>
-                  </a:lnTo>
-                  <a:lnTo>
-                    <a:pt x="1933808" y="994245"/>
-                  </a:lnTo>
-                  <a:lnTo>
-                    <a:pt x="2005430" y="1020629"/>
-                  </a:lnTo>
-                  <a:lnTo>
-                    <a:pt x="2077053" y="1046421"/>
-                  </a:lnTo>
-                  <a:lnTo>
-                    <a:pt x="2148675" y="1071634"/>
-                  </a:lnTo>
-                  <a:lnTo>
-                    <a:pt x="2220298" y="1096281"/>
-                  </a:lnTo>
-                  <a:lnTo>
-                    <a:pt x="2291920" y="1120375"/>
-                  </a:lnTo>
-                  <a:lnTo>
-                    <a:pt x="2363543" y="1143928"/>
-                  </a:lnTo>
-                  <a:lnTo>
-                    <a:pt x="2435165" y="1166953"/>
-                  </a:lnTo>
-                  <a:lnTo>
-                    <a:pt x="2506788" y="1189460"/>
-                  </a:lnTo>
-                  <a:lnTo>
-                    <a:pt x="2578410" y="1211463"/>
-                  </a:lnTo>
-                  <a:lnTo>
-                    <a:pt x="2650033" y="1232971"/>
-                  </a:lnTo>
-                  <a:lnTo>
-                    <a:pt x="2721655" y="1253997"/>
-                  </a:lnTo>
-                  <a:lnTo>
-                    <a:pt x="2793278" y="1274551"/>
-                  </a:lnTo>
-                  <a:lnTo>
-                    <a:pt x="2864901" y="1294644"/>
-                  </a:lnTo>
-                  <a:lnTo>
-                    <a:pt x="2936523" y="1314285"/>
-                  </a:lnTo>
-                  <a:lnTo>
-                    <a:pt x="3008146" y="1333486"/>
-                  </a:lnTo>
-                  <a:lnTo>
-                    <a:pt x="3079768" y="1343475"/>
-                  </a:lnTo>
-                  <a:lnTo>
-                    <a:pt x="3151391" y="1348425"/>
-                  </a:lnTo>
-                  <a:lnTo>
-                    <a:pt x="3223013" y="1353346"/>
-                  </a:lnTo>
-                  <a:lnTo>
-                    <a:pt x="3294636" y="1358237"/>
-                  </a:lnTo>
-                  <a:lnTo>
-                    <a:pt x="3366258" y="1363098"/>
-                  </a:lnTo>
-                  <a:lnTo>
-                    <a:pt x="3437881" y="1367931"/>
-                  </a:lnTo>
-                  <a:lnTo>
-                    <a:pt x="3509503" y="1372734"/>
-                  </a:lnTo>
-                  <a:lnTo>
-                    <a:pt x="3581126" y="1377509"/>
-                  </a:lnTo>
-                  <a:lnTo>
-                    <a:pt x="3652748" y="1382255"/>
-                  </a:lnTo>
-                  <a:lnTo>
-                    <a:pt x="3724371" y="1386973"/>
-                  </a:lnTo>
-                  <a:lnTo>
-                    <a:pt x="3795993" y="1391663"/>
-                  </a:lnTo>
-                  <a:lnTo>
-                    <a:pt x="3867616" y="1396324"/>
-                  </a:lnTo>
-                  <a:lnTo>
-                    <a:pt x="3939238" y="1400957"/>
-                  </a:lnTo>
-                  <a:lnTo>
-                    <a:pt x="4010861" y="1405563"/>
-                  </a:lnTo>
-                  <a:lnTo>
-                    <a:pt x="4082483" y="1410141"/>
-                  </a:lnTo>
-                  <a:lnTo>
-                    <a:pt x="4154106" y="1414692"/>
-                  </a:lnTo>
-                  <a:lnTo>
-                    <a:pt x="4225729" y="1419215"/>
-                  </a:lnTo>
-                  <a:lnTo>
-                    <a:pt x="4297351" y="1423712"/>
-                  </a:lnTo>
-                  <a:lnTo>
-                    <a:pt x="4368974" y="1428181"/>
-                  </a:lnTo>
-                  <a:lnTo>
-                    <a:pt x="4440596" y="1432624"/>
-                  </a:lnTo>
-                  <a:lnTo>
-                    <a:pt x="4512219" y="1437040"/>
-                  </a:lnTo>
-                  <a:lnTo>
-                    <a:pt x="4583841" y="1441429"/>
-                  </a:lnTo>
-                  <a:lnTo>
-                    <a:pt x="4655464" y="1445792"/>
-                  </a:lnTo>
-                  <a:lnTo>
-                    <a:pt x="4727086" y="1450129"/>
-                  </a:lnTo>
-                  <a:lnTo>
-                    <a:pt x="4798709" y="1454441"/>
-                  </a:lnTo>
-                  <a:lnTo>
-                    <a:pt x="4870331" y="1458726"/>
-                  </a:lnTo>
-                  <a:lnTo>
-                    <a:pt x="4941954" y="1462985"/>
-                  </a:lnTo>
-                  <a:lnTo>
-                    <a:pt x="5013576" y="1467220"/>
-                  </a:lnTo>
-                  <a:lnTo>
-                    <a:pt x="5085199" y="1471428"/>
-                  </a:lnTo>
-                  <a:lnTo>
-                    <a:pt x="5156821" y="1475612"/>
-                  </a:lnTo>
-                  <a:lnTo>
-                    <a:pt x="5228444" y="1479770"/>
-                  </a:lnTo>
-                  <a:lnTo>
-                    <a:pt x="5300066" y="1483904"/>
-                  </a:lnTo>
-                  <a:lnTo>
-                    <a:pt x="5371689" y="1488013"/>
-                  </a:lnTo>
-                  <a:lnTo>
-                    <a:pt x="5443311" y="1492097"/>
-                  </a:lnTo>
-                  <a:lnTo>
-                    <a:pt x="5514934" y="1496156"/>
-                  </a:lnTo>
-                  <a:lnTo>
-                    <a:pt x="5586557" y="1500192"/>
-                  </a:lnTo>
-                  <a:lnTo>
-                    <a:pt x="5658179" y="1504203"/>
-                  </a:lnTo>
-                  <a:lnTo>
-                    <a:pt x="5729802" y="1508190"/>
-                  </a:lnTo>
-                  <a:lnTo>
-                    <a:pt x="5801424" y="1512153"/>
-                  </a:lnTo>
-                  <a:lnTo>
-                    <a:pt x="5873047" y="1516093"/>
-                  </a:lnTo>
-                  <a:lnTo>
-                    <a:pt x="5944669" y="1520009"/>
-                  </a:lnTo>
-                  <a:lnTo>
-                    <a:pt x="6016292" y="1523901"/>
-                  </a:lnTo>
-                  <a:lnTo>
-                    <a:pt x="6087914" y="1527771"/>
-                  </a:lnTo>
-                  <a:lnTo>
-                    <a:pt x="6159537" y="1531617"/>
-                  </a:lnTo>
-                  <a:lnTo>
-                    <a:pt x="6231159" y="1535439"/>
-                  </a:lnTo>
-                  <a:lnTo>
-                    <a:pt x="6302782" y="1539240"/>
-                  </a:lnTo>
-                  <a:lnTo>
-                    <a:pt x="6374404" y="1543017"/>
-                  </a:lnTo>
-                  <a:lnTo>
-                    <a:pt x="6446027" y="1546771"/>
-                  </a:lnTo>
-                  <a:lnTo>
-                    <a:pt x="6517649" y="1550504"/>
-                  </a:lnTo>
-                  <a:lnTo>
-                    <a:pt x="6589272" y="1554213"/>
-                  </a:lnTo>
-                  <a:lnTo>
-                    <a:pt x="6660894" y="1557901"/>
-                  </a:lnTo>
-                  <a:lnTo>
-                    <a:pt x="6732517" y="1561566"/>
-                  </a:lnTo>
-                  <a:lnTo>
-                    <a:pt x="6804139" y="1565210"/>
-                  </a:lnTo>
-                  <a:lnTo>
-                    <a:pt x="6875762" y="1568832"/>
-                  </a:lnTo>
-                  <a:lnTo>
-                    <a:pt x="6947385" y="1572432"/>
-                  </a:lnTo>
-                  <a:lnTo>
-                    <a:pt x="7019007" y="1576010"/>
-                  </a:lnTo>
-                  <a:lnTo>
-                    <a:pt x="7090630" y="1579567"/>
-                  </a:lnTo>
-                </a:path>
-              </a:pathLst>
-            </a:custGeom>
-          </p:spPr>
-          <p:txBody>
-            <a:bodyPr/>
-            <a:lstStyle/>
-            <a:p/>
-          </p:txBody>
-        </p:sp>
-        <p:sp>
-          <p:nvSpPr>
             <p:cNvPr id="24" name="pl24"/>
             <p:cNvSpPr/>
             <p:nvPr/>
           </p:nvSpPr>
           <p:spPr>
             <a:xfrm>
-              <a:off x="1172049" y="4487360"/>
-              <a:ext cx="7090630" cy="840591"/>
+              <a:off x="1235312" y="2617280"/>
+              <a:ext cx="6964104" cy="570028"/>
             </a:xfrm>
             <a:custGeom>
               <a:avLst/>
               <a:pathLst>
-                <a:path w="7090630" h="840591">
+                <a:path w="6964104" h="570028">
                   <a:moveTo>
-                    <a:pt x="7090630" y="840591"/>
+                    <a:pt x="0" y="0"/>
                   </a:moveTo>
                   <a:lnTo>
-                    <a:pt x="7019007" y="835327"/>
-                  </a:lnTo>
-                  <a:lnTo>
-                    <a:pt x="6947385" y="829941"/>
-                  </a:lnTo>
-                  <a:lnTo>
-                    <a:pt x="6875762" y="824432"/>
-                  </a:lnTo>
-                  <a:lnTo>
-                    <a:pt x="6804139" y="818796"/>
-                  </a:lnTo>
-                  <a:lnTo>
-                    <a:pt x="6732517" y="813031"/>
-                  </a:lnTo>
-                  <a:lnTo>
-                    <a:pt x="6660894" y="807133"/>
-                  </a:lnTo>
-                  <a:lnTo>
-                    <a:pt x="6589272" y="801100"/>
-                  </a:lnTo>
-                  <a:lnTo>
-                    <a:pt x="6517649" y="794929"/>
-                  </a:lnTo>
-                  <a:lnTo>
-                    <a:pt x="6446027" y="788616"/>
-                  </a:lnTo>
-                  <a:lnTo>
-                    <a:pt x="6374404" y="782158"/>
-                  </a:lnTo>
-                  <a:lnTo>
-                    <a:pt x="6302782" y="775552"/>
-                  </a:lnTo>
-                  <a:lnTo>
-                    <a:pt x="6231159" y="768794"/>
-                  </a:lnTo>
-                  <a:lnTo>
-                    <a:pt x="6159537" y="761880"/>
-                  </a:lnTo>
-                  <a:lnTo>
-                    <a:pt x="6087914" y="754808"/>
-                  </a:lnTo>
-                  <a:lnTo>
-                    <a:pt x="6016292" y="747574"/>
-                  </a:lnTo>
-                  <a:lnTo>
-                    <a:pt x="5944669" y="740174"/>
-                  </a:lnTo>
-                  <a:lnTo>
-                    <a:pt x="5873047" y="732603"/>
-                  </a:lnTo>
-                  <a:lnTo>
-                    <a:pt x="5801424" y="724859"/>
-                  </a:lnTo>
-                  <a:lnTo>
-                    <a:pt x="5729802" y="716937"/>
-                  </a:lnTo>
-                  <a:lnTo>
-                    <a:pt x="5658179" y="708834"/>
-                  </a:lnTo>
-                  <a:lnTo>
-                    <a:pt x="5586557" y="700544"/>
-                  </a:lnTo>
-                  <a:lnTo>
-                    <a:pt x="5514934" y="692064"/>
-                  </a:lnTo>
-                  <a:lnTo>
-                    <a:pt x="5443311" y="683389"/>
-                  </a:lnTo>
-                  <a:lnTo>
-                    <a:pt x="5371689" y="674515"/>
-                  </a:lnTo>
-                  <a:lnTo>
-                    <a:pt x="5300066" y="665437"/>
-                  </a:lnTo>
-                  <a:lnTo>
-                    <a:pt x="5228444" y="656150"/>
-                  </a:lnTo>
-                  <a:lnTo>
-                    <a:pt x="5156821" y="646651"/>
-                  </a:lnTo>
-                  <a:lnTo>
-                    <a:pt x="5085199" y="636933"/>
-                  </a:lnTo>
-                  <a:lnTo>
-                    <a:pt x="5013576" y="626993"/>
-                  </a:lnTo>
-                  <a:lnTo>
-                    <a:pt x="4941954" y="616824"/>
-                  </a:lnTo>
-                  <a:lnTo>
-                    <a:pt x="4870331" y="606421"/>
-                  </a:lnTo>
-                  <a:lnTo>
-                    <a:pt x="4798709" y="595780"/>
-                  </a:lnTo>
-                  <a:lnTo>
-                    <a:pt x="4727086" y="584894"/>
-                  </a:lnTo>
-                  <a:lnTo>
-                    <a:pt x="4655464" y="573759"/>
-                  </a:lnTo>
-                  <a:lnTo>
-                    <a:pt x="4583841" y="562368"/>
-                  </a:lnTo>
-                  <a:lnTo>
-                    <a:pt x="4512219" y="550715"/>
-                  </a:lnTo>
-                  <a:lnTo>
-                    <a:pt x="4440596" y="538795"/>
-                  </a:lnTo>
-                  <a:lnTo>
-                    <a:pt x="4368974" y="526601"/>
-                  </a:lnTo>
-                  <a:lnTo>
-                    <a:pt x="4297351" y="514127"/>
-                  </a:lnTo>
-                  <a:lnTo>
-                    <a:pt x="4225729" y="501366"/>
-                  </a:lnTo>
-                  <a:lnTo>
-                    <a:pt x="4154106" y="488313"/>
-                  </a:lnTo>
-                  <a:lnTo>
-                    <a:pt x="4082483" y="474960"/>
-                  </a:lnTo>
-                  <a:lnTo>
-                    <a:pt x="4010861" y="461300"/>
-                  </a:lnTo>
-                  <a:lnTo>
-                    <a:pt x="3939238" y="447327"/>
-                  </a:lnTo>
-                  <a:lnTo>
-                    <a:pt x="3867616" y="433033"/>
-                  </a:lnTo>
-                  <a:lnTo>
-                    <a:pt x="3795993" y="418411"/>
-                  </a:lnTo>
-                  <a:lnTo>
-                    <a:pt x="3724371" y="403453"/>
-                  </a:lnTo>
-                  <a:lnTo>
-                    <a:pt x="3652748" y="388151"/>
-                  </a:lnTo>
-                  <a:lnTo>
-                    <a:pt x="3581126" y="372498"/>
-                  </a:lnTo>
-                  <a:lnTo>
-                    <a:pt x="3509503" y="356486"/>
-                  </a:lnTo>
-                  <a:lnTo>
-                    <a:pt x="3437881" y="340106"/>
-                  </a:lnTo>
-                  <a:lnTo>
-                    <a:pt x="3366258" y="323351"/>
-                  </a:lnTo>
-                  <a:lnTo>
-                    <a:pt x="3294636" y="306210"/>
-                  </a:lnTo>
-                  <a:lnTo>
-                    <a:pt x="3223013" y="288676"/>
-                  </a:lnTo>
-                  <a:lnTo>
-                    <a:pt x="3151391" y="270739"/>
-                  </a:lnTo>
-                  <a:lnTo>
-                    <a:pt x="3079768" y="252391"/>
-                  </a:lnTo>
-                  <a:lnTo>
-                    <a:pt x="3008146" y="238630"/>
-                  </a:lnTo>
-                  <a:lnTo>
-                    <a:pt x="2936523" y="233620"/>
-                  </a:lnTo>
-                  <a:lnTo>
-                    <a:pt x="2864901" y="228580"/>
-                  </a:lnTo>
-                  <a:lnTo>
-                    <a:pt x="2793278" y="223510"/>
-                  </a:lnTo>
-                  <a:lnTo>
-                    <a:pt x="2721655" y="218408"/>
-                  </a:lnTo>
-                  <a:lnTo>
-                    <a:pt x="2650033" y="213277"/>
-                  </a:lnTo>
-                  <a:lnTo>
-                    <a:pt x="2578410" y="208114"/>
-                  </a:lnTo>
-                  <a:lnTo>
-                    <a:pt x="2506788" y="202920"/>
-                  </a:lnTo>
-                  <a:lnTo>
-                    <a:pt x="2435165" y="197695"/>
-                  </a:lnTo>
-                  <a:lnTo>
-                    <a:pt x="2363543" y="192438"/>
-                  </a:lnTo>
-                  <a:lnTo>
-                    <a:pt x="2291920" y="187150"/>
-                  </a:lnTo>
-                  <a:lnTo>
-                    <a:pt x="2220298" y="181830"/>
-                  </a:lnTo>
-                  <a:lnTo>
-                    <a:pt x="2148675" y="176478"/>
-                  </a:lnTo>
-                  <a:lnTo>
-                    <a:pt x="2077053" y="171093"/>
-                  </a:lnTo>
-                  <a:lnTo>
-                    <a:pt x="2005430" y="165676"/>
-                  </a:lnTo>
-                  <a:lnTo>
-                    <a:pt x="1933808" y="160227"/>
-                  </a:lnTo>
-                  <a:lnTo>
-                    <a:pt x="1862185" y="154744"/>
-                  </a:lnTo>
-                  <a:lnTo>
-                    <a:pt x="1790563" y="149229"/>
-                  </a:lnTo>
-                  <a:lnTo>
-                    <a:pt x="1718940" y="143680"/>
-                  </a:lnTo>
-                  <a:lnTo>
-                    <a:pt x="1647318" y="138098"/>
-                  </a:lnTo>
-                  <a:lnTo>
-                    <a:pt x="1575695" y="132482"/>
-                  </a:lnTo>
-                  <a:lnTo>
-                    <a:pt x="1504073" y="126833"/>
-                  </a:lnTo>
-                  <a:lnTo>
-                    <a:pt x="1432450" y="121149"/>
-                  </a:lnTo>
-                  <a:lnTo>
-                    <a:pt x="1360827" y="115431"/>
-                  </a:lnTo>
-                  <a:lnTo>
-                    <a:pt x="1289205" y="109679"/>
-                  </a:lnTo>
-                  <a:lnTo>
-                    <a:pt x="1217582" y="103892"/>
-                  </a:lnTo>
-                  <a:lnTo>
-                    <a:pt x="1145960" y="98070"/>
-                  </a:lnTo>
-                  <a:lnTo>
-                    <a:pt x="1074337" y="92213"/>
-                  </a:lnTo>
-                  <a:lnTo>
-                    <a:pt x="1002715" y="86320"/>
-                  </a:lnTo>
-                  <a:lnTo>
-                    <a:pt x="931092" y="80392"/>
-                  </a:lnTo>
-                  <a:lnTo>
-                    <a:pt x="859470" y="74429"/>
-                  </a:lnTo>
-                  <a:lnTo>
-                    <a:pt x="787847" y="68429"/>
-                  </a:lnTo>
-                  <a:lnTo>
-                    <a:pt x="716225" y="62394"/>
-                  </a:lnTo>
-                  <a:lnTo>
-                    <a:pt x="644602" y="56322"/>
-                  </a:lnTo>
-                  <a:lnTo>
-                    <a:pt x="572980" y="50213"/>
-                  </a:lnTo>
-                  <a:lnTo>
-                    <a:pt x="501357" y="44067"/>
-                  </a:lnTo>
-                  <a:lnTo>
-                    <a:pt x="429735" y="37885"/>
-                  </a:lnTo>
-                  <a:lnTo>
-                    <a:pt x="358112" y="31665"/>
-                  </a:lnTo>
-                  <a:lnTo>
-                    <a:pt x="286490" y="25408"/>
-                  </a:lnTo>
-                  <a:lnTo>
-                    <a:pt x="214867" y="19113"/>
-                  </a:lnTo>
-                  <a:lnTo>
-                    <a:pt x="143245" y="12780"/>
-                  </a:lnTo>
-                  <a:lnTo>
-                    <a:pt x="71622" y="6409"/>
-                  </a:lnTo>
-                  <a:lnTo>
-                    <a:pt x="0" y="0"/>
+                    <a:pt x="70344" y="17574"/>
+                  </a:lnTo>
+                  <a:lnTo>
+                    <a:pt x="140688" y="34754"/>
+                  </a:lnTo>
+                  <a:lnTo>
+                    <a:pt x="211033" y="51549"/>
+                  </a:lnTo>
+                  <a:lnTo>
+                    <a:pt x="281377" y="67966"/>
+                  </a:lnTo>
+                  <a:lnTo>
+                    <a:pt x="351722" y="84015"/>
+                  </a:lnTo>
+                  <a:lnTo>
+                    <a:pt x="422066" y="99704"/>
+                  </a:lnTo>
+                  <a:lnTo>
+                    <a:pt x="492411" y="115041"/>
+                  </a:lnTo>
+                  <a:lnTo>
+                    <a:pt x="562755" y="130033"/>
+                  </a:lnTo>
+                  <a:lnTo>
+                    <a:pt x="633100" y="144689"/>
+                  </a:lnTo>
+                  <a:lnTo>
+                    <a:pt x="703444" y="159016"/>
+                  </a:lnTo>
+                  <a:lnTo>
+                    <a:pt x="773789" y="173022"/>
+                  </a:lnTo>
+                  <a:lnTo>
+                    <a:pt x="844133" y="186713"/>
+                  </a:lnTo>
+                  <a:lnTo>
+                    <a:pt x="914478" y="200097"/>
+                  </a:lnTo>
+                  <a:lnTo>
+                    <a:pt x="984822" y="213180"/>
+                  </a:lnTo>
+                  <a:lnTo>
+                    <a:pt x="1055167" y="225970"/>
+                  </a:lnTo>
+                  <a:lnTo>
+                    <a:pt x="1125511" y="238473"/>
+                  </a:lnTo>
+                  <a:lnTo>
+                    <a:pt x="1195856" y="250695"/>
+                  </a:lnTo>
+                  <a:lnTo>
+                    <a:pt x="1266200" y="262642"/>
+                  </a:lnTo>
+                  <a:lnTo>
+                    <a:pt x="1336545" y="274322"/>
+                  </a:lnTo>
+                  <a:lnTo>
+                    <a:pt x="1406889" y="285739"/>
+                  </a:lnTo>
+                  <a:lnTo>
+                    <a:pt x="1477234" y="296901"/>
+                  </a:lnTo>
+                  <a:lnTo>
+                    <a:pt x="1547578" y="307811"/>
+                  </a:lnTo>
+                  <a:lnTo>
+                    <a:pt x="1617923" y="318477"/>
+                  </a:lnTo>
+                  <a:lnTo>
+                    <a:pt x="1688267" y="328903"/>
+                  </a:lnTo>
+                  <a:lnTo>
+                    <a:pt x="1758612" y="339096"/>
+                  </a:lnTo>
+                  <a:lnTo>
+                    <a:pt x="1828956" y="349059"/>
+                  </a:lnTo>
+                  <a:lnTo>
+                    <a:pt x="1899301" y="358799"/>
+                  </a:lnTo>
+                  <a:lnTo>
+                    <a:pt x="1969645" y="368321"/>
+                  </a:lnTo>
+                  <a:lnTo>
+                    <a:pt x="2039990" y="377628"/>
+                  </a:lnTo>
+                  <a:lnTo>
+                    <a:pt x="2110334" y="386727"/>
+                  </a:lnTo>
+                  <a:lnTo>
+                    <a:pt x="2180679" y="395622"/>
+                  </a:lnTo>
+                  <a:lnTo>
+                    <a:pt x="2251023" y="404317"/>
+                  </a:lnTo>
+                  <a:lnTo>
+                    <a:pt x="2321368" y="412816"/>
+                  </a:lnTo>
+                  <a:lnTo>
+                    <a:pt x="2391712" y="421125"/>
+                  </a:lnTo>
+                  <a:lnTo>
+                    <a:pt x="2462057" y="429248"/>
+                  </a:lnTo>
+                  <a:lnTo>
+                    <a:pt x="2532401" y="437188"/>
+                  </a:lnTo>
+                  <a:lnTo>
+                    <a:pt x="2602746" y="444950"/>
+                  </a:lnTo>
+                  <a:lnTo>
+                    <a:pt x="2673090" y="452538"/>
+                  </a:lnTo>
+                  <a:lnTo>
+                    <a:pt x="2743435" y="459955"/>
+                  </a:lnTo>
+                  <a:lnTo>
+                    <a:pt x="2813779" y="467206"/>
+                  </a:lnTo>
+                  <a:lnTo>
+                    <a:pt x="2884124" y="474294"/>
+                  </a:lnTo>
+                  <a:lnTo>
+                    <a:pt x="2954468" y="481224"/>
+                  </a:lnTo>
+                  <a:lnTo>
+                    <a:pt x="3024813" y="484828"/>
+                  </a:lnTo>
+                  <a:lnTo>
+                    <a:pt x="3095157" y="486615"/>
+                  </a:lnTo>
+                  <a:lnTo>
+                    <a:pt x="3165502" y="488390"/>
+                  </a:lnTo>
+                  <a:lnTo>
+                    <a:pt x="3235846" y="490155"/>
+                  </a:lnTo>
+                  <a:lnTo>
+                    <a:pt x="3306191" y="491910"/>
+                  </a:lnTo>
+                  <a:lnTo>
+                    <a:pt x="3376535" y="493654"/>
+                  </a:lnTo>
+                  <a:lnTo>
+                    <a:pt x="3446880" y="495387"/>
+                  </a:lnTo>
+                  <a:lnTo>
+                    <a:pt x="3517224" y="497110"/>
+                  </a:lnTo>
+                  <a:lnTo>
+                    <a:pt x="3587569" y="498823"/>
+                  </a:lnTo>
+                  <a:lnTo>
+                    <a:pt x="3657913" y="500526"/>
+                  </a:lnTo>
+                  <a:lnTo>
+                    <a:pt x="3728257" y="502218"/>
+                  </a:lnTo>
+                  <a:lnTo>
+                    <a:pt x="3798602" y="503900"/>
+                  </a:lnTo>
+                  <a:lnTo>
+                    <a:pt x="3868946" y="505572"/>
+                  </a:lnTo>
+                  <a:lnTo>
+                    <a:pt x="3939291" y="507234"/>
+                  </a:lnTo>
+                  <a:lnTo>
+                    <a:pt x="4009635" y="508886"/>
+                  </a:lnTo>
+                  <a:lnTo>
+                    <a:pt x="4079980" y="510529"/>
+                  </a:lnTo>
+                  <a:lnTo>
+                    <a:pt x="4150324" y="512161"/>
+                  </a:lnTo>
+                  <a:lnTo>
+                    <a:pt x="4220669" y="513784"/>
+                  </a:lnTo>
+                  <a:lnTo>
+                    <a:pt x="4291013" y="515397"/>
+                  </a:lnTo>
+                  <a:lnTo>
+                    <a:pt x="4361358" y="517000"/>
+                  </a:lnTo>
+                  <a:lnTo>
+                    <a:pt x="4431702" y="518593"/>
+                  </a:lnTo>
+                  <a:lnTo>
+                    <a:pt x="4502047" y="520178"/>
+                  </a:lnTo>
+                  <a:lnTo>
+                    <a:pt x="4572391" y="521752"/>
+                  </a:lnTo>
+                  <a:lnTo>
+                    <a:pt x="4642736" y="523317"/>
+                  </a:lnTo>
+                  <a:lnTo>
+                    <a:pt x="4713080" y="524873"/>
+                  </a:lnTo>
+                  <a:lnTo>
+                    <a:pt x="4783425" y="526420"/>
+                  </a:lnTo>
+                  <a:lnTo>
+                    <a:pt x="4853769" y="527957"/>
+                  </a:lnTo>
+                  <a:lnTo>
+                    <a:pt x="4924114" y="529485"/>
+                  </a:lnTo>
+                  <a:lnTo>
+                    <a:pt x="4994458" y="531004"/>
+                  </a:lnTo>
+                  <a:lnTo>
+                    <a:pt x="5064803" y="532513"/>
+                  </a:lnTo>
+                  <a:lnTo>
+                    <a:pt x="5135147" y="534014"/>
+                  </a:lnTo>
+                  <a:lnTo>
+                    <a:pt x="5205492" y="535506"/>
+                  </a:lnTo>
+                  <a:lnTo>
+                    <a:pt x="5275836" y="536988"/>
+                  </a:lnTo>
+                  <a:lnTo>
+                    <a:pt x="5346181" y="538462"/>
+                  </a:lnTo>
+                  <a:lnTo>
+                    <a:pt x="5416525" y="539927"/>
+                  </a:lnTo>
+                  <a:lnTo>
+                    <a:pt x="5486870" y="541384"/>
+                  </a:lnTo>
+                  <a:lnTo>
+                    <a:pt x="5557214" y="542831"/>
+                  </a:lnTo>
+                  <a:lnTo>
+                    <a:pt x="5627559" y="544270"/>
+                  </a:lnTo>
+                  <a:lnTo>
+                    <a:pt x="5697903" y="545700"/>
+                  </a:lnTo>
+                  <a:lnTo>
+                    <a:pt x="5768248" y="547122"/>
+                  </a:lnTo>
+                  <a:lnTo>
+                    <a:pt x="5838592" y="548535"/>
+                  </a:lnTo>
+                  <a:lnTo>
+                    <a:pt x="5908937" y="549940"/>
+                  </a:lnTo>
+                  <a:lnTo>
+                    <a:pt x="5979281" y="551336"/>
+                  </a:lnTo>
+                  <a:lnTo>
+                    <a:pt x="6049626" y="552724"/>
+                  </a:lnTo>
+                  <a:lnTo>
+                    <a:pt x="6119970" y="554104"/>
+                  </a:lnTo>
+                  <a:lnTo>
+                    <a:pt x="6190315" y="555475"/>
+                  </a:lnTo>
+                  <a:lnTo>
+                    <a:pt x="6260659" y="556838"/>
+                  </a:lnTo>
+                  <a:lnTo>
+                    <a:pt x="6331004" y="558193"/>
+                  </a:lnTo>
+                  <a:lnTo>
+                    <a:pt x="6401348" y="559540"/>
+                  </a:lnTo>
+                  <a:lnTo>
+                    <a:pt x="6471693" y="560879"/>
+                  </a:lnTo>
+                  <a:lnTo>
+                    <a:pt x="6542037" y="562209"/>
+                  </a:lnTo>
+                  <a:lnTo>
+                    <a:pt x="6612382" y="563532"/>
+                  </a:lnTo>
+                  <a:lnTo>
+                    <a:pt x="6682726" y="564847"/>
+                  </a:lnTo>
+                  <a:lnTo>
+                    <a:pt x="6753071" y="566154"/>
+                  </a:lnTo>
+                  <a:lnTo>
+                    <a:pt x="6823415" y="567453"/>
+                  </a:lnTo>
+                  <a:lnTo>
+                    <a:pt x="6893760" y="568745"/>
+                  </a:lnTo>
+                  <a:lnTo>
+                    <a:pt x="6964104" y="570028"/>
                   </a:lnTo>
                 </a:path>
               </a:pathLst>
@@ -4326,312 +4036,637 @@
           </p:nvSpPr>
           <p:spPr>
             <a:xfrm>
-              <a:off x="1172049" y="4033635"/>
-              <a:ext cx="7090630" cy="1155743"/>
+              <a:off x="1235312" y="3014196"/>
+              <a:ext cx="6964104" cy="303349"/>
             </a:xfrm>
             <a:custGeom>
               <a:avLst/>
               <a:pathLst>
-                <a:path w="7090630" h="1155743">
+                <a:path w="6964104" h="303349">
+                  <a:moveTo>
+                    <a:pt x="6964104" y="303349"/>
+                  </a:moveTo>
+                  <a:lnTo>
+                    <a:pt x="6893760" y="301449"/>
+                  </a:lnTo>
+                  <a:lnTo>
+                    <a:pt x="6823415" y="299506"/>
+                  </a:lnTo>
+                  <a:lnTo>
+                    <a:pt x="6753071" y="297518"/>
+                  </a:lnTo>
+                  <a:lnTo>
+                    <a:pt x="6682726" y="295484"/>
+                  </a:lnTo>
+                  <a:lnTo>
+                    <a:pt x="6612382" y="293403"/>
+                  </a:lnTo>
+                  <a:lnTo>
+                    <a:pt x="6542037" y="291275"/>
+                  </a:lnTo>
+                  <a:lnTo>
+                    <a:pt x="6471693" y="289098"/>
+                  </a:lnTo>
+                  <a:lnTo>
+                    <a:pt x="6401348" y="286871"/>
+                  </a:lnTo>
+                  <a:lnTo>
+                    <a:pt x="6331004" y="284593"/>
+                  </a:lnTo>
+                  <a:lnTo>
+                    <a:pt x="6260659" y="282262"/>
+                  </a:lnTo>
+                  <a:lnTo>
+                    <a:pt x="6190315" y="279878"/>
+                  </a:lnTo>
+                  <a:lnTo>
+                    <a:pt x="6119970" y="277439"/>
+                  </a:lnTo>
+                  <a:lnTo>
+                    <a:pt x="6049626" y="274944"/>
+                  </a:lnTo>
+                  <a:lnTo>
+                    <a:pt x="5979281" y="272392"/>
+                  </a:lnTo>
+                  <a:lnTo>
+                    <a:pt x="5908937" y="269782"/>
+                  </a:lnTo>
+                  <a:lnTo>
+                    <a:pt x="5838592" y="267111"/>
+                  </a:lnTo>
+                  <a:lnTo>
+                    <a:pt x="5768248" y="264379"/>
+                  </a:lnTo>
+                  <a:lnTo>
+                    <a:pt x="5697903" y="261584"/>
+                  </a:lnTo>
+                  <a:lnTo>
+                    <a:pt x="5627559" y="258726"/>
+                  </a:lnTo>
+                  <a:lnTo>
+                    <a:pt x="5557214" y="255801"/>
+                  </a:lnTo>
+                  <a:lnTo>
+                    <a:pt x="5486870" y="252809"/>
+                  </a:lnTo>
+                  <a:lnTo>
+                    <a:pt x="5416525" y="249749"/>
+                  </a:lnTo>
+                  <a:lnTo>
+                    <a:pt x="5346181" y="246619"/>
+                  </a:lnTo>
+                  <a:lnTo>
+                    <a:pt x="5275836" y="243416"/>
+                  </a:lnTo>
+                  <a:lnTo>
+                    <a:pt x="5205492" y="240140"/>
+                  </a:lnTo>
+                  <a:lnTo>
+                    <a:pt x="5135147" y="236789"/>
+                  </a:lnTo>
+                  <a:lnTo>
+                    <a:pt x="5064803" y="233361"/>
+                  </a:lnTo>
+                  <a:lnTo>
+                    <a:pt x="4994458" y="229854"/>
+                  </a:lnTo>
+                  <a:lnTo>
+                    <a:pt x="4924114" y="226267"/>
+                  </a:lnTo>
+                  <a:lnTo>
+                    <a:pt x="4853769" y="222597"/>
+                  </a:lnTo>
+                  <a:lnTo>
+                    <a:pt x="4783425" y="218843"/>
+                  </a:lnTo>
+                  <a:lnTo>
+                    <a:pt x="4713080" y="215003"/>
+                  </a:lnTo>
+                  <a:lnTo>
+                    <a:pt x="4642736" y="211074"/>
+                  </a:lnTo>
+                  <a:lnTo>
+                    <a:pt x="4572391" y="207056"/>
+                  </a:lnTo>
+                  <a:lnTo>
+                    <a:pt x="4502047" y="202945"/>
+                  </a:lnTo>
+                  <a:lnTo>
+                    <a:pt x="4431702" y="198740"/>
+                  </a:lnTo>
+                  <a:lnTo>
+                    <a:pt x="4361358" y="194438"/>
+                  </a:lnTo>
+                  <a:lnTo>
+                    <a:pt x="4291013" y="190037"/>
+                  </a:lnTo>
+                  <a:lnTo>
+                    <a:pt x="4220669" y="185536"/>
+                  </a:lnTo>
+                  <a:lnTo>
+                    <a:pt x="4150324" y="180931"/>
+                  </a:lnTo>
+                  <a:lnTo>
+                    <a:pt x="4079980" y="176220"/>
+                  </a:lnTo>
+                  <a:lnTo>
+                    <a:pt x="4009635" y="171402"/>
+                  </a:lnTo>
+                  <a:lnTo>
+                    <a:pt x="3939291" y="166472"/>
+                  </a:lnTo>
+                  <a:lnTo>
+                    <a:pt x="3868946" y="161429"/>
+                  </a:lnTo>
+                  <a:lnTo>
+                    <a:pt x="3798602" y="156271"/>
+                  </a:lnTo>
+                  <a:lnTo>
+                    <a:pt x="3728257" y="150994"/>
+                  </a:lnTo>
+                  <a:lnTo>
+                    <a:pt x="3657913" y="145596"/>
+                  </a:lnTo>
+                  <a:lnTo>
+                    <a:pt x="3587569" y="140074"/>
+                  </a:lnTo>
+                  <a:lnTo>
+                    <a:pt x="3517224" y="134426"/>
+                  </a:lnTo>
+                  <a:lnTo>
+                    <a:pt x="3446880" y="128647"/>
+                  </a:lnTo>
+                  <a:lnTo>
+                    <a:pt x="3376535" y="122736"/>
+                  </a:lnTo>
+                  <a:lnTo>
+                    <a:pt x="3306191" y="116689"/>
+                  </a:lnTo>
+                  <a:lnTo>
+                    <a:pt x="3235846" y="110504"/>
+                  </a:lnTo>
+                  <a:lnTo>
+                    <a:pt x="3165502" y="104176"/>
+                  </a:lnTo>
+                  <a:lnTo>
+                    <a:pt x="3095157" y="97703"/>
+                  </a:lnTo>
+                  <a:lnTo>
+                    <a:pt x="3024813" y="91081"/>
+                  </a:lnTo>
+                  <a:lnTo>
+                    <a:pt x="2954468" y="86116"/>
+                  </a:lnTo>
+                  <a:lnTo>
+                    <a:pt x="2884124" y="84308"/>
+                  </a:lnTo>
+                  <a:lnTo>
+                    <a:pt x="2813779" y="82489"/>
+                  </a:lnTo>
+                  <a:lnTo>
+                    <a:pt x="2743435" y="80659"/>
+                  </a:lnTo>
+                  <a:lnTo>
+                    <a:pt x="2673090" y="78818"/>
+                  </a:lnTo>
+                  <a:lnTo>
+                    <a:pt x="2602746" y="76966"/>
+                  </a:lnTo>
+                  <a:lnTo>
+                    <a:pt x="2532401" y="75103"/>
+                  </a:lnTo>
+                  <a:lnTo>
+                    <a:pt x="2462057" y="73229"/>
+                  </a:lnTo>
+                  <a:lnTo>
+                    <a:pt x="2391712" y="71343"/>
+                  </a:lnTo>
+                  <a:lnTo>
+                    <a:pt x="2321368" y="69446"/>
+                  </a:lnTo>
+                  <a:lnTo>
+                    <a:pt x="2251023" y="67538"/>
+                  </a:lnTo>
+                  <a:lnTo>
+                    <a:pt x="2180679" y="65618"/>
+                  </a:lnTo>
+                  <a:lnTo>
+                    <a:pt x="2110334" y="63686"/>
+                  </a:lnTo>
+                  <a:lnTo>
+                    <a:pt x="2039990" y="61743"/>
+                  </a:lnTo>
+                  <a:lnTo>
+                    <a:pt x="1969645" y="59788"/>
+                  </a:lnTo>
+                  <a:lnTo>
+                    <a:pt x="1899301" y="57822"/>
+                  </a:lnTo>
+                  <a:lnTo>
+                    <a:pt x="1828956" y="55843"/>
+                  </a:lnTo>
+                  <a:lnTo>
+                    <a:pt x="1758612" y="53853"/>
+                  </a:lnTo>
+                  <a:lnTo>
+                    <a:pt x="1688267" y="51850"/>
+                  </a:lnTo>
+                  <a:lnTo>
+                    <a:pt x="1617923" y="49836"/>
+                  </a:lnTo>
+                  <a:lnTo>
+                    <a:pt x="1547578" y="47809"/>
+                  </a:lnTo>
+                  <a:lnTo>
+                    <a:pt x="1477234" y="45771"/>
+                  </a:lnTo>
+                  <a:lnTo>
+                    <a:pt x="1406889" y="43719"/>
+                  </a:lnTo>
+                  <a:lnTo>
+                    <a:pt x="1336545" y="41656"/>
+                  </a:lnTo>
+                  <a:lnTo>
+                    <a:pt x="1266200" y="39580"/>
+                  </a:lnTo>
+                  <a:lnTo>
+                    <a:pt x="1195856" y="37492"/>
+                  </a:lnTo>
+                  <a:lnTo>
+                    <a:pt x="1125511" y="35391"/>
+                  </a:lnTo>
+                  <a:lnTo>
+                    <a:pt x="1055167" y="33277"/>
+                  </a:lnTo>
+                  <a:lnTo>
+                    <a:pt x="984822" y="31151"/>
+                  </a:lnTo>
+                  <a:lnTo>
+                    <a:pt x="914478" y="29011"/>
+                  </a:lnTo>
+                  <a:lnTo>
+                    <a:pt x="844133" y="26859"/>
+                  </a:lnTo>
+                  <a:lnTo>
+                    <a:pt x="773789" y="24694"/>
+                  </a:lnTo>
+                  <a:lnTo>
+                    <a:pt x="703444" y="22516"/>
+                  </a:lnTo>
+                  <a:lnTo>
+                    <a:pt x="633100" y="20325"/>
+                  </a:lnTo>
+                  <a:lnTo>
+                    <a:pt x="562755" y="18120"/>
+                  </a:lnTo>
+                  <a:lnTo>
+                    <a:pt x="492411" y="15903"/>
+                  </a:lnTo>
+                  <a:lnTo>
+                    <a:pt x="422066" y="13671"/>
+                  </a:lnTo>
+                  <a:lnTo>
+                    <a:pt x="351722" y="11427"/>
+                  </a:lnTo>
+                  <a:lnTo>
+                    <a:pt x="281377" y="9169"/>
+                  </a:lnTo>
+                  <a:lnTo>
+                    <a:pt x="211033" y="6897"/>
+                  </a:lnTo>
+                  <a:lnTo>
+                    <a:pt x="140688" y="4612"/>
+                  </a:lnTo>
+                  <a:lnTo>
+                    <a:pt x="70344" y="2313"/>
+                  </a:lnTo>
+                  <a:lnTo>
+                    <a:pt x="0" y="0"/>
+                  </a:lnTo>
+                </a:path>
+              </a:pathLst>
+            </a:custGeom>
+          </p:spPr>
+          <p:txBody>
+            <a:bodyPr/>
+            <a:lstStyle/>
+            <a:p/>
+          </p:txBody>
+        </p:sp>
+        <p:sp>
+          <p:nvSpPr>
+            <p:cNvPr id="26" name="pl26"/>
+            <p:cNvSpPr/>
+            <p:nvPr/>
+          </p:nvSpPr>
+          <p:spPr>
+            <a:xfrm>
+              <a:off x="1235312" y="2850457"/>
+              <a:ext cx="6964104" cy="417080"/>
+            </a:xfrm>
+            <a:custGeom>
+              <a:avLst/>
+              <a:pathLst>
+                <a:path w="6964104" h="417080">
                   <a:moveTo>
                     <a:pt x="0" y="0"/>
                   </a:moveTo>
                   <a:lnTo>
-                    <a:pt x="71622" y="21714"/>
-                  </a:lnTo>
-                  <a:lnTo>
-                    <a:pt x="143245" y="43119"/>
-                  </a:lnTo>
-                  <a:lnTo>
-                    <a:pt x="214867" y="64220"/>
-                  </a:lnTo>
-                  <a:lnTo>
-                    <a:pt x="286490" y="85019"/>
-                  </a:lnTo>
-                  <a:lnTo>
-                    <a:pt x="358112" y="105522"/>
-                  </a:lnTo>
-                  <a:lnTo>
-                    <a:pt x="429735" y="125733"/>
-                  </a:lnTo>
-                  <a:lnTo>
-                    <a:pt x="501357" y="145655"/>
-                  </a:lnTo>
-                  <a:lnTo>
-                    <a:pt x="572980" y="165294"/>
-                  </a:lnTo>
-                  <a:lnTo>
-                    <a:pt x="644602" y="184653"/>
-                  </a:lnTo>
-                  <a:lnTo>
-                    <a:pt x="716225" y="203736"/>
-                  </a:lnTo>
-                  <a:lnTo>
-                    <a:pt x="787847" y="222547"/>
-                  </a:lnTo>
-                  <a:lnTo>
-                    <a:pt x="859470" y="241090"/>
-                  </a:lnTo>
-                  <a:lnTo>
-                    <a:pt x="931092" y="259369"/>
-                  </a:lnTo>
-                  <a:lnTo>
-                    <a:pt x="1002715" y="277387"/>
-                  </a:lnTo>
-                  <a:lnTo>
-                    <a:pt x="1074337" y="295148"/>
-                  </a:lnTo>
-                  <a:lnTo>
-                    <a:pt x="1145960" y="312656"/>
-                  </a:lnTo>
-                  <a:lnTo>
-                    <a:pt x="1217582" y="329915"/>
-                  </a:lnTo>
-                  <a:lnTo>
-                    <a:pt x="1289205" y="346928"/>
-                  </a:lnTo>
-                  <a:lnTo>
-                    <a:pt x="1360827" y="363698"/>
-                  </a:lnTo>
-                  <a:lnTo>
-                    <a:pt x="1432450" y="380229"/>
-                  </a:lnTo>
-                  <a:lnTo>
-                    <a:pt x="1504073" y="396525"/>
-                  </a:lnTo>
-                  <a:lnTo>
-                    <a:pt x="1575695" y="412588"/>
-                  </a:lnTo>
-                  <a:lnTo>
-                    <a:pt x="1647318" y="428423"/>
-                  </a:lnTo>
-                  <a:lnTo>
-                    <a:pt x="1718940" y="444031"/>
-                  </a:lnTo>
-                  <a:lnTo>
-                    <a:pt x="1790563" y="459418"/>
-                  </a:lnTo>
-                  <a:lnTo>
-                    <a:pt x="1862185" y="474585"/>
-                  </a:lnTo>
-                  <a:lnTo>
-                    <a:pt x="1933808" y="489536"/>
-                  </a:lnTo>
-                  <a:lnTo>
-                    <a:pt x="2005430" y="504273"/>
-                  </a:lnTo>
-                  <a:lnTo>
-                    <a:pt x="2077053" y="518801"/>
-                  </a:lnTo>
-                  <a:lnTo>
-                    <a:pt x="2148675" y="533122"/>
-                  </a:lnTo>
-                  <a:lnTo>
-                    <a:pt x="2220298" y="547238"/>
-                  </a:lnTo>
-                  <a:lnTo>
-                    <a:pt x="2291920" y="561154"/>
-                  </a:lnTo>
-                  <a:lnTo>
-                    <a:pt x="2363543" y="574871"/>
-                  </a:lnTo>
-                  <a:lnTo>
-                    <a:pt x="2435165" y="588392"/>
-                  </a:lnTo>
-                  <a:lnTo>
-                    <a:pt x="2506788" y="601721"/>
-                  </a:lnTo>
-                  <a:lnTo>
-                    <a:pt x="2578410" y="614860"/>
-                  </a:lnTo>
-                  <a:lnTo>
-                    <a:pt x="2650033" y="627812"/>
-                  </a:lnTo>
-                  <a:lnTo>
-                    <a:pt x="2721655" y="640579"/>
-                  </a:lnTo>
-                  <a:lnTo>
-                    <a:pt x="2793278" y="653164"/>
-                  </a:lnTo>
-                  <a:lnTo>
-                    <a:pt x="2864901" y="665570"/>
-                  </a:lnTo>
-                  <a:lnTo>
-                    <a:pt x="2936523" y="677799"/>
-                  </a:lnTo>
-                  <a:lnTo>
-                    <a:pt x="3008146" y="689853"/>
-                  </a:lnTo>
-                  <a:lnTo>
-                    <a:pt x="3079768" y="701736"/>
-                  </a:lnTo>
-                  <a:lnTo>
-                    <a:pt x="3151391" y="713449"/>
-                  </a:lnTo>
-                  <a:lnTo>
-                    <a:pt x="3223013" y="724996"/>
-                  </a:lnTo>
-                  <a:lnTo>
-                    <a:pt x="3294636" y="736378"/>
-                  </a:lnTo>
-                  <a:lnTo>
-                    <a:pt x="3366258" y="747598"/>
-                  </a:lnTo>
-                  <a:lnTo>
-                    <a:pt x="3437881" y="758658"/>
-                  </a:lnTo>
-                  <a:lnTo>
-                    <a:pt x="3509503" y="769560"/>
-                  </a:lnTo>
-                  <a:lnTo>
-                    <a:pt x="3581126" y="780307"/>
-                  </a:lnTo>
-                  <a:lnTo>
-                    <a:pt x="3652748" y="790900"/>
-                  </a:lnTo>
-                  <a:lnTo>
-                    <a:pt x="3724371" y="801343"/>
-                  </a:lnTo>
-                  <a:lnTo>
-                    <a:pt x="3795993" y="811637"/>
-                  </a:lnTo>
-                  <a:lnTo>
-                    <a:pt x="3867616" y="821784"/>
-                  </a:lnTo>
-                  <a:lnTo>
-                    <a:pt x="3939238" y="831787"/>
-                  </a:lnTo>
-                  <a:lnTo>
-                    <a:pt x="4010861" y="841647"/>
-                  </a:lnTo>
-                  <a:lnTo>
-                    <a:pt x="4082483" y="851366"/>
-                  </a:lnTo>
-                  <a:lnTo>
-                    <a:pt x="4154106" y="860947"/>
-                  </a:lnTo>
-                  <a:lnTo>
-                    <a:pt x="4225729" y="870391"/>
-                  </a:lnTo>
-                  <a:lnTo>
-                    <a:pt x="4297351" y="879701"/>
-                  </a:lnTo>
-                  <a:lnTo>
-                    <a:pt x="4368974" y="888878"/>
-                  </a:lnTo>
-                  <a:lnTo>
-                    <a:pt x="4440596" y="897925"/>
-                  </a:lnTo>
-                  <a:lnTo>
-                    <a:pt x="4512219" y="906842"/>
-                  </a:lnTo>
-                  <a:lnTo>
-                    <a:pt x="4583841" y="915632"/>
-                  </a:lnTo>
-                  <a:lnTo>
-                    <a:pt x="4655464" y="924297"/>
-                  </a:lnTo>
-                  <a:lnTo>
-                    <a:pt x="4727086" y="932839"/>
-                  </a:lnTo>
-                  <a:lnTo>
-                    <a:pt x="4798709" y="941258"/>
-                  </a:lnTo>
-                  <a:lnTo>
-                    <a:pt x="4870331" y="949558"/>
-                  </a:lnTo>
-                  <a:lnTo>
-                    <a:pt x="4941954" y="957740"/>
-                  </a:lnTo>
-                  <a:lnTo>
-                    <a:pt x="5013576" y="965805"/>
-                  </a:lnTo>
-                  <a:lnTo>
-                    <a:pt x="5085199" y="973755"/>
-                  </a:lnTo>
-                  <a:lnTo>
-                    <a:pt x="5156821" y="981591"/>
-                  </a:lnTo>
-                  <a:lnTo>
-                    <a:pt x="5228444" y="989316"/>
-                  </a:lnTo>
-                  <a:lnTo>
-                    <a:pt x="5300066" y="996931"/>
-                  </a:lnTo>
-                  <a:lnTo>
-                    <a:pt x="5371689" y="1004437"/>
-                  </a:lnTo>
-                  <a:lnTo>
-                    <a:pt x="5443311" y="1011837"/>
-                  </a:lnTo>
-                  <a:lnTo>
-                    <a:pt x="5514934" y="1019131"/>
-                  </a:lnTo>
-                  <a:lnTo>
-                    <a:pt x="5586557" y="1026321"/>
-                  </a:lnTo>
-                  <a:lnTo>
-                    <a:pt x="5658179" y="1033408"/>
-                  </a:lnTo>
-                  <a:lnTo>
-                    <a:pt x="5729802" y="1040394"/>
-                  </a:lnTo>
-                  <a:lnTo>
-                    <a:pt x="5801424" y="1047281"/>
-                  </a:lnTo>
-                  <a:lnTo>
-                    <a:pt x="5873047" y="1054070"/>
-                  </a:lnTo>
-                  <a:lnTo>
-                    <a:pt x="5944669" y="1060762"/>
-                  </a:lnTo>
-                  <a:lnTo>
-                    <a:pt x="6016292" y="1067359"/>
-                  </a:lnTo>
-                  <a:lnTo>
-                    <a:pt x="6087914" y="1073861"/>
-                  </a:lnTo>
-                  <a:lnTo>
-                    <a:pt x="6159537" y="1080271"/>
-                  </a:lnTo>
-                  <a:lnTo>
-                    <a:pt x="6231159" y="1086590"/>
-                  </a:lnTo>
-                  <a:lnTo>
-                    <a:pt x="6302782" y="1092818"/>
-                  </a:lnTo>
-                  <a:lnTo>
-                    <a:pt x="6374404" y="1098958"/>
-                  </a:lnTo>
-                  <a:lnTo>
-                    <a:pt x="6446027" y="1105010"/>
-                  </a:lnTo>
-                  <a:lnTo>
-                    <a:pt x="6517649" y="1110976"/>
-                  </a:lnTo>
-                  <a:lnTo>
-                    <a:pt x="6589272" y="1116857"/>
-                  </a:lnTo>
-                  <a:lnTo>
-                    <a:pt x="6660894" y="1122654"/>
-                  </a:lnTo>
-                  <a:lnTo>
-                    <a:pt x="6732517" y="1128369"/>
-                  </a:lnTo>
-                  <a:lnTo>
-                    <a:pt x="6804139" y="1134002"/>
-                  </a:lnTo>
-                  <a:lnTo>
-                    <a:pt x="6875762" y="1139555"/>
-                  </a:lnTo>
-                  <a:lnTo>
-                    <a:pt x="6947385" y="1145028"/>
-                  </a:lnTo>
-                  <a:lnTo>
-                    <a:pt x="7019007" y="1150424"/>
-                  </a:lnTo>
-                  <a:lnTo>
-                    <a:pt x="7090630" y="1155743"/>
+                    <a:pt x="70344" y="7836"/>
+                  </a:lnTo>
+                  <a:lnTo>
+                    <a:pt x="140688" y="15560"/>
+                  </a:lnTo>
+                  <a:lnTo>
+                    <a:pt x="211033" y="23175"/>
+                  </a:lnTo>
+                  <a:lnTo>
+                    <a:pt x="281377" y="30681"/>
+                  </a:lnTo>
+                  <a:lnTo>
+                    <a:pt x="351722" y="38080"/>
+                  </a:lnTo>
+                  <a:lnTo>
+                    <a:pt x="422066" y="45374"/>
+                  </a:lnTo>
+                  <a:lnTo>
+                    <a:pt x="492411" y="52563"/>
+                  </a:lnTo>
+                  <a:lnTo>
+                    <a:pt x="562755" y="59650"/>
+                  </a:lnTo>
+                  <a:lnTo>
+                    <a:pt x="633100" y="66637"/>
+                  </a:lnTo>
+                  <a:lnTo>
+                    <a:pt x="703444" y="73523"/>
+                  </a:lnTo>
+                  <a:lnTo>
+                    <a:pt x="773789" y="80312"/>
+                  </a:lnTo>
+                  <a:lnTo>
+                    <a:pt x="844133" y="87003"/>
+                  </a:lnTo>
+                  <a:lnTo>
+                    <a:pt x="914478" y="93600"/>
+                  </a:lnTo>
+                  <a:lnTo>
+                    <a:pt x="984822" y="100102"/>
+                  </a:lnTo>
+                  <a:lnTo>
+                    <a:pt x="1055167" y="106512"/>
+                  </a:lnTo>
+                  <a:lnTo>
+                    <a:pt x="1125511" y="112830"/>
+                  </a:lnTo>
+                  <a:lnTo>
+                    <a:pt x="1195856" y="119058"/>
+                  </a:lnTo>
+                  <a:lnTo>
+                    <a:pt x="1266200" y="125198"/>
+                  </a:lnTo>
+                  <a:lnTo>
+                    <a:pt x="1336545" y="131250"/>
+                  </a:lnTo>
+                  <a:lnTo>
+                    <a:pt x="1406889" y="137215"/>
+                  </a:lnTo>
+                  <a:lnTo>
+                    <a:pt x="1477234" y="143096"/>
+                  </a:lnTo>
+                  <a:lnTo>
+                    <a:pt x="1547578" y="148893"/>
+                  </a:lnTo>
+                  <a:lnTo>
+                    <a:pt x="1617923" y="154607"/>
+                  </a:lnTo>
+                  <a:lnTo>
+                    <a:pt x="1688267" y="160240"/>
+                  </a:lnTo>
+                  <a:lnTo>
+                    <a:pt x="1758612" y="165793"/>
+                  </a:lnTo>
+                  <a:lnTo>
+                    <a:pt x="1828956" y="171266"/>
+                  </a:lnTo>
+                  <a:lnTo>
+                    <a:pt x="1899301" y="176662"/>
+                  </a:lnTo>
+                  <a:lnTo>
+                    <a:pt x="1969645" y="181980"/>
+                  </a:lnTo>
+                  <a:lnTo>
+                    <a:pt x="2039990" y="187223"/>
+                  </a:lnTo>
+                  <a:lnTo>
+                    <a:pt x="2110334" y="192391"/>
+                  </a:lnTo>
+                  <a:lnTo>
+                    <a:pt x="2180679" y="197485"/>
+                  </a:lnTo>
+                  <a:lnTo>
+                    <a:pt x="2251023" y="202507"/>
+                  </a:lnTo>
+                  <a:lnTo>
+                    <a:pt x="2321368" y="207457"/>
+                  </a:lnTo>
+                  <a:lnTo>
+                    <a:pt x="2391712" y="212337"/>
+                  </a:lnTo>
+                  <a:lnTo>
+                    <a:pt x="2462057" y="217147"/>
+                  </a:lnTo>
+                  <a:lnTo>
+                    <a:pt x="2532401" y="221888"/>
+                  </a:lnTo>
+                  <a:lnTo>
+                    <a:pt x="2602746" y="226562"/>
+                  </a:lnTo>
+                  <a:lnTo>
+                    <a:pt x="2673090" y="231169"/>
+                  </a:lnTo>
+                  <a:lnTo>
+                    <a:pt x="2743435" y="235711"/>
+                  </a:lnTo>
+                  <a:lnTo>
+                    <a:pt x="2813779" y="240188"/>
+                  </a:lnTo>
+                  <a:lnTo>
+                    <a:pt x="2884124" y="244601"/>
+                  </a:lnTo>
+                  <a:lnTo>
+                    <a:pt x="2954468" y="248951"/>
+                  </a:lnTo>
+                  <a:lnTo>
+                    <a:pt x="3024813" y="253240"/>
+                  </a:lnTo>
+                  <a:lnTo>
+                    <a:pt x="3095157" y="257467"/>
+                  </a:lnTo>
+                  <a:lnTo>
+                    <a:pt x="3165502" y="261634"/>
+                  </a:lnTo>
+                  <a:lnTo>
+                    <a:pt x="3235846" y="265741"/>
+                  </a:lnTo>
+                  <a:lnTo>
+                    <a:pt x="3306191" y="269790"/>
+                  </a:lnTo>
+                  <a:lnTo>
+                    <a:pt x="3376535" y="273781"/>
+                  </a:lnTo>
+                  <a:lnTo>
+                    <a:pt x="3446880" y="277716"/>
+                  </a:lnTo>
+                  <a:lnTo>
+                    <a:pt x="3517224" y="281594"/>
+                  </a:lnTo>
+                  <a:lnTo>
+                    <a:pt x="3587569" y="285417"/>
+                  </a:lnTo>
+                  <a:lnTo>
+                    <a:pt x="3657913" y="289186"/>
+                  </a:lnTo>
+                  <a:lnTo>
+                    <a:pt x="3728257" y="292900"/>
+                  </a:lnTo>
+                  <a:lnTo>
+                    <a:pt x="3798602" y="296562"/>
+                  </a:lnTo>
+                  <a:lnTo>
+                    <a:pt x="3868946" y="300172"/>
+                  </a:lnTo>
+                  <a:lnTo>
+                    <a:pt x="3939291" y="303730"/>
+                  </a:lnTo>
+                  <a:lnTo>
+                    <a:pt x="4009635" y="307238"/>
+                  </a:lnTo>
+                  <a:lnTo>
+                    <a:pt x="4079980" y="310695"/>
+                  </a:lnTo>
+                  <a:lnTo>
+                    <a:pt x="4150324" y="314103"/>
+                  </a:lnTo>
+                  <a:lnTo>
+                    <a:pt x="4220669" y="317463"/>
+                  </a:lnTo>
+                  <a:lnTo>
+                    <a:pt x="4291013" y="320775"/>
+                  </a:lnTo>
+                  <a:lnTo>
+                    <a:pt x="4361358" y="324040"/>
+                  </a:lnTo>
+                  <a:lnTo>
+                    <a:pt x="4431702" y="327258"/>
+                  </a:lnTo>
+                  <a:lnTo>
+                    <a:pt x="4502047" y="330430"/>
+                  </a:lnTo>
+                  <a:lnTo>
+                    <a:pt x="4572391" y="333557"/>
+                  </a:lnTo>
+                  <a:lnTo>
+                    <a:pt x="4642736" y="336639"/>
+                  </a:lnTo>
+                  <a:lnTo>
+                    <a:pt x="4713080" y="339678"/>
+                  </a:lnTo>
+                  <a:lnTo>
+                    <a:pt x="4783425" y="342673"/>
+                  </a:lnTo>
+                  <a:lnTo>
+                    <a:pt x="4853769" y="345625"/>
+                  </a:lnTo>
+                  <a:lnTo>
+                    <a:pt x="4924114" y="348536"/>
+                  </a:lnTo>
+                  <a:lnTo>
+                    <a:pt x="4994458" y="351405"/>
+                  </a:lnTo>
+                  <a:lnTo>
+                    <a:pt x="5064803" y="354233"/>
+                  </a:lnTo>
+                  <a:lnTo>
+                    <a:pt x="5135147" y="357021"/>
+                  </a:lnTo>
+                  <a:lnTo>
+                    <a:pt x="5205492" y="359769"/>
+                  </a:lnTo>
+                  <a:lnTo>
+                    <a:pt x="5275836" y="362477"/>
+                  </a:lnTo>
+                  <a:lnTo>
+                    <a:pt x="5346181" y="365148"/>
+                  </a:lnTo>
+                  <a:lnTo>
+                    <a:pt x="5416525" y="367780"/>
+                  </a:lnTo>
+                  <a:lnTo>
+                    <a:pt x="5486870" y="370375"/>
+                  </a:lnTo>
+                  <a:lnTo>
+                    <a:pt x="5557214" y="372932"/>
+                  </a:lnTo>
+                  <a:lnTo>
+                    <a:pt x="5627559" y="375454"/>
+                  </a:lnTo>
+                  <a:lnTo>
+                    <a:pt x="5697903" y="377939"/>
+                  </a:lnTo>
+                  <a:lnTo>
+                    <a:pt x="5768248" y="380389"/>
+                  </a:lnTo>
+                  <a:lnTo>
+                    <a:pt x="5838592" y="382804"/>
+                  </a:lnTo>
+                  <a:lnTo>
+                    <a:pt x="5908937" y="385184"/>
+                  </a:lnTo>
+                  <a:lnTo>
+                    <a:pt x="5979281" y="387531"/>
+                  </a:lnTo>
+                  <a:lnTo>
+                    <a:pt x="6049626" y="389844"/>
+                  </a:lnTo>
+                  <a:lnTo>
+                    <a:pt x="6119970" y="392124"/>
+                  </a:lnTo>
+                  <a:lnTo>
+                    <a:pt x="6190315" y="394372"/>
+                  </a:lnTo>
+                  <a:lnTo>
+                    <a:pt x="6260659" y="396588"/>
+                  </a:lnTo>
+                  <a:lnTo>
+                    <a:pt x="6331004" y="398772"/>
+                  </a:lnTo>
+                  <a:lnTo>
+                    <a:pt x="6401348" y="400925"/>
+                  </a:lnTo>
+                  <a:lnTo>
+                    <a:pt x="6471693" y="403047"/>
+                  </a:lnTo>
+                  <a:lnTo>
+                    <a:pt x="6542037" y="405139"/>
+                  </a:lnTo>
+                  <a:lnTo>
+                    <a:pt x="6612382" y="407201"/>
+                  </a:lnTo>
+                  <a:lnTo>
+                    <a:pt x="6682726" y="409234"/>
+                  </a:lnTo>
+                  <a:lnTo>
+                    <a:pt x="6753071" y="411238"/>
+                  </a:lnTo>
+                  <a:lnTo>
+                    <a:pt x="6823415" y="413213"/>
+                  </a:lnTo>
+                  <a:lnTo>
+                    <a:pt x="6893760" y="415161"/>
+                  </a:lnTo>
+                  <a:lnTo>
+                    <a:pt x="6964104" y="417080"/>
                   </a:lnTo>
                 </a:path>
               </a:pathLst>
@@ -4654,27 +4689,27 @@
         </p:sp>
         <p:sp>
           <p:nvSpPr>
-            <p:cNvPr id="26" name="pl26"/>
+            <p:cNvPr id="27" name="pl27"/>
             <p:cNvSpPr/>
             <p:nvPr/>
           </p:nvSpPr>
           <p:spPr>
             <a:xfrm>
-              <a:off x="817517" y="4727786"/>
-              <a:ext cx="7799693" cy="0"/>
+              <a:off x="887106" y="3100960"/>
+              <a:ext cx="7660515" cy="0"/>
             </a:xfrm>
             <a:custGeom>
               <a:avLst/>
               <a:pathLst>
-                <a:path w="7799693" h="0">
+                <a:path w="7660515" h="0">
                   <a:moveTo>
                     <a:pt x="0" y="0"/>
                   </a:moveTo>
                   <a:lnTo>
-                    <a:pt x="7799693" y="0"/>
-                  </a:lnTo>
-                  <a:lnTo>
-                    <a:pt x="7799693" y="0"/>
+                    <a:pt x="7660515" y="0"/>
+                  </a:lnTo>
+                  <a:lnTo>
+                    <a:pt x="7660515" y="0"/>
                   </a:lnTo>
                 </a:path>
               </a:pathLst>
@@ -4697,21 +4732,21 @@
         </p:sp>
         <p:sp>
           <p:nvSpPr>
-            <p:cNvPr id="27" name="pl27"/>
+            <p:cNvPr id="28" name="pl28"/>
             <p:cNvSpPr/>
             <p:nvPr/>
           </p:nvSpPr>
           <p:spPr>
             <a:xfrm>
-              <a:off x="4205975" y="2073503"/>
-              <a:ext cx="0" cy="3649639"/>
+              <a:off x="4215100" y="2143092"/>
+              <a:ext cx="0" cy="1317069"/>
             </a:xfrm>
             <a:custGeom>
               <a:avLst/>
               <a:pathLst>
-                <a:path w="0" h="3649639">
+                <a:path w="0" h="1317069">
                   <a:moveTo>
-                    <a:pt x="0" y="3649639"/>
+                    <a:pt x="0" y="1317069"/>
                   </a:moveTo>
                   <a:lnTo>
                     <a:pt x="0" y="0"/>
@@ -4740,21 +4775,21 @@
         </p:sp>
         <p:sp>
           <p:nvSpPr>
-            <p:cNvPr id="28" name="pl28"/>
+            <p:cNvPr id="29" name="pl29"/>
             <p:cNvSpPr/>
             <p:nvPr/>
           </p:nvSpPr>
           <p:spPr>
             <a:xfrm>
-              <a:off x="3016442" y="2073503"/>
-              <a:ext cx="0" cy="3649639"/>
+              <a:off x="3046793" y="2143092"/>
+              <a:ext cx="0" cy="1317069"/>
             </a:xfrm>
             <a:custGeom>
               <a:avLst/>
               <a:pathLst>
-                <a:path w="0" h="3649639">
+                <a:path w="0" h="1317069">
                   <a:moveTo>
-                    <a:pt x="0" y="3649639"/>
+                    <a:pt x="0" y="1317069"/>
                   </a:moveTo>
                   <a:lnTo>
                     <a:pt x="0" y="0"/>
@@ -4783,21 +4818,21 @@
         </p:sp>
         <p:sp>
           <p:nvSpPr>
-            <p:cNvPr id="29" name="pl29"/>
+            <p:cNvPr id="30" name="pl30"/>
             <p:cNvSpPr/>
             <p:nvPr/>
           </p:nvSpPr>
           <p:spPr>
             <a:xfrm>
-              <a:off x="5421760" y="2073503"/>
-              <a:ext cx="0" cy="3649639"/>
+              <a:off x="5409191" y="2143092"/>
+              <a:ext cx="0" cy="1317069"/>
             </a:xfrm>
             <a:custGeom>
               <a:avLst/>
               <a:pathLst>
-                <a:path w="0" h="3649639">
+                <a:path w="0" h="1317069">
                   <a:moveTo>
-                    <a:pt x="0" y="3649639"/>
+                    <a:pt x="0" y="1317069"/>
                   </a:moveTo>
                   <a:lnTo>
                     <a:pt x="0" y="0"/>
@@ -4826,13 +4861,13 @@
         </p:sp>
         <p:sp>
           <p:nvSpPr>
-            <p:cNvPr id="30" name="tx30"/>
+            <p:cNvPr id="31" name="tx31"/>
             <p:cNvSpPr/>
             <p:nvPr/>
           </p:nvSpPr>
           <p:spPr>
             <a:xfrm>
-              <a:off x="692708" y="5517199"/>
+              <a:off x="762297" y="3360243"/>
               <a:ext cx="62179" cy="80101"/>
             </a:xfrm>
             <a:prstGeom prst="rect">
@@ -4872,13 +4907,13 @@
         </p:sp>
         <p:sp>
           <p:nvSpPr>
-            <p:cNvPr id="31" name="tx31"/>
+            <p:cNvPr id="32" name="tx32"/>
             <p:cNvSpPr/>
             <p:nvPr/>
           </p:nvSpPr>
           <p:spPr>
             <a:xfrm>
-              <a:off x="692708" y="4687735"/>
+              <a:off x="762297" y="3060909"/>
               <a:ext cx="62179" cy="80101"/>
             </a:xfrm>
             <a:prstGeom prst="rect">
@@ -4918,13 +4953,13 @@
         </p:sp>
         <p:sp>
           <p:nvSpPr>
-            <p:cNvPr id="32" name="tx32"/>
+            <p:cNvPr id="33" name="tx33"/>
             <p:cNvSpPr/>
             <p:nvPr/>
           </p:nvSpPr>
           <p:spPr>
             <a:xfrm>
-              <a:off x="692708" y="3858272"/>
+              <a:off x="762297" y="2761575"/>
               <a:ext cx="62179" cy="80101"/>
             </a:xfrm>
             <a:prstGeom prst="rect">
@@ -4964,13 +4999,13 @@
         </p:sp>
         <p:sp>
           <p:nvSpPr>
-            <p:cNvPr id="33" name="tx33"/>
+            <p:cNvPr id="34" name="tx34"/>
             <p:cNvSpPr/>
             <p:nvPr/>
           </p:nvSpPr>
           <p:spPr>
             <a:xfrm>
-              <a:off x="692708" y="3028808"/>
+              <a:off x="762297" y="2462242"/>
               <a:ext cx="62179" cy="80101"/>
             </a:xfrm>
             <a:prstGeom prst="rect">
@@ -5010,13 +5045,13 @@
         </p:sp>
         <p:sp>
           <p:nvSpPr>
-            <p:cNvPr id="34" name="tx34"/>
+            <p:cNvPr id="35" name="tx35"/>
             <p:cNvSpPr/>
             <p:nvPr/>
           </p:nvSpPr>
           <p:spPr>
             <a:xfrm>
-              <a:off x="692708" y="2199345"/>
+              <a:off x="762297" y="2162908"/>
               <a:ext cx="62179" cy="80101"/>
             </a:xfrm>
             <a:prstGeom prst="rect">
@@ -5056,13 +5091,13 @@
         </p:sp>
         <p:sp>
           <p:nvSpPr>
-            <p:cNvPr id="35" name="tx35"/>
+            <p:cNvPr id="36" name="tx36"/>
             <p:cNvSpPr/>
             <p:nvPr/>
           </p:nvSpPr>
           <p:spPr>
             <a:xfrm>
-              <a:off x="1977028" y="5785772"/>
+              <a:off x="2024485" y="3522791"/>
               <a:ext cx="161574" cy="80101"/>
             </a:xfrm>
             <a:prstGeom prst="rect">
@@ -5102,13 +5137,13 @@
         </p:sp>
         <p:sp>
           <p:nvSpPr>
-            <p:cNvPr id="36" name="tx36"/>
+            <p:cNvPr id="37" name="tx37"/>
             <p:cNvSpPr/>
             <p:nvPr/>
           </p:nvSpPr>
           <p:spPr>
             <a:xfrm>
-              <a:off x="3728813" y="5785772"/>
+              <a:off x="3745012" y="3522791"/>
               <a:ext cx="161574" cy="80101"/>
             </a:xfrm>
             <a:prstGeom prst="rect">
@@ -5148,13 +5183,13 @@
         </p:sp>
         <p:sp>
           <p:nvSpPr>
-            <p:cNvPr id="37" name="tx37"/>
+            <p:cNvPr id="38" name="tx38"/>
             <p:cNvSpPr/>
             <p:nvPr/>
           </p:nvSpPr>
           <p:spPr>
             <a:xfrm>
-              <a:off x="5530296" y="5785772"/>
+              <a:off x="5515235" y="3522791"/>
               <a:ext cx="62179" cy="80101"/>
             </a:xfrm>
             <a:prstGeom prst="rect">
@@ -5194,13 +5229,13 @@
         </p:sp>
         <p:sp>
           <p:nvSpPr>
-            <p:cNvPr id="38" name="tx38"/>
+            <p:cNvPr id="39" name="tx39"/>
             <p:cNvSpPr/>
             <p:nvPr/>
           </p:nvSpPr>
           <p:spPr>
             <a:xfrm>
-              <a:off x="7250992" y="5785772"/>
+              <a:off x="7204672" y="3522791"/>
               <a:ext cx="124358" cy="80101"/>
             </a:xfrm>
             <a:prstGeom prst="rect">
@@ -5240,13 +5275,13 @@
         </p:sp>
         <p:sp>
           <p:nvSpPr>
-            <p:cNvPr id="39" name="tx39"/>
+            <p:cNvPr id="40" name="tx40"/>
             <p:cNvSpPr/>
             <p:nvPr/>
           </p:nvSpPr>
           <p:spPr>
             <a:xfrm>
-              <a:off x="1561815" y="5925448"/>
+              <a:off x="1561815" y="3662467"/>
               <a:ext cx="6311097" cy="100218"/>
             </a:xfrm>
             <a:prstGeom prst="rect">
@@ -5286,13 +5321,13 @@
         </p:sp>
         <p:sp>
           <p:nvSpPr>
-            <p:cNvPr id="40" name="tx40"/>
+            <p:cNvPr id="41" name="tx41"/>
             <p:cNvSpPr/>
             <p:nvPr/>
           </p:nvSpPr>
           <p:spPr>
             <a:xfrm rot="-5400000">
-              <a:off x="68446" y="3848213"/>
+              <a:off x="138035" y="2751517"/>
               <a:ext cx="1016904" cy="100218"/>
             </a:xfrm>
             <a:prstGeom prst="rect">
@@ -5332,13 +5367,13 @@
         </p:sp>
         <p:sp>
           <p:nvSpPr>
-            <p:cNvPr id="41" name="tx41"/>
+            <p:cNvPr id="42" name="tx42"/>
             <p:cNvSpPr/>
             <p:nvPr/>
           </p:nvSpPr>
           <p:spPr>
             <a:xfrm>
-              <a:off x="817517" y="1896563"/>
+              <a:off x="887106" y="1966152"/>
               <a:ext cx="6959864" cy="82021"/>
             </a:xfrm>
             <a:prstGeom prst="rect">
@@ -5378,13 +5413,3746 @@
         </p:sp>
         <p:sp>
           <p:nvSpPr>
-            <p:cNvPr id="42" name="tx42"/>
+            <p:cNvPr id="43" name="tx43"/>
             <p:cNvSpPr/>
             <p:nvPr/>
           </p:nvSpPr>
           <p:spPr>
             <a:xfrm>
-              <a:off x="817517" y="1669789"/>
+              <a:off x="887106" y="1739378"/>
+              <a:ext cx="3333262" cy="120152"/>
+            </a:xfrm>
+            <a:prstGeom prst="rect">
+              <a:avLst/>
+            </a:prstGeom>
+            <a:noFill/>
+          </p:spPr>
+          <p:txBody>
+            <a:bodyPr lIns="0" rIns="0" tIns="0" bIns="0" anchorCtr="1" anchor="ctr" wrap="none"/>
+            <a:lstStyle/>
+            <a:p>
+              <a:pPr algn="l" marL="0" marR="0" indent="0">
+                <a:lnSpc>
+                  <a:spcPts val="1320"/>
+                </a:lnSpc>
+                <a:spcBef>
+                  <a:spcPts val="0"/>
+                </a:spcBef>
+                <a:spcAft>
+                  <a:spcPts val="0"/>
+                </a:spcAft>
+              </a:pPr>
+              <a:r>
+                <a:rPr sz="1320">
+                  <a:solidFill>
+                    <a:srgbClr val="000000">
+                      <a:alpha val="100000"/>
+                    </a:srgbClr>
+                  </a:solidFill>
+                  <a:latin typeface="Helvetica"/>
+                  <a:cs typeface="Helvetica"/>
+                </a:rPr>
+                <a:t>Platinum-Related Hospitalization (Sensitivity)</a:t>
+              </a:r>
+            </a:p>
+          </p:txBody>
+        </p:sp>
+        <p:sp>
+          <p:nvSpPr>
+            <p:cNvPr id="44" name="pl44"/>
+            <p:cNvSpPr/>
+            <p:nvPr/>
+          </p:nvSpPr>
+          <p:spPr>
+            <a:xfrm>
+              <a:off x="887106" y="5444019"/>
+              <a:ext cx="7660515" cy="0"/>
+            </a:xfrm>
+            <a:custGeom>
+              <a:avLst/>
+              <a:pathLst>
+                <a:path w="7660515" h="0">
+                  <a:moveTo>
+                    <a:pt x="0" y="0"/>
+                  </a:moveTo>
+                  <a:lnTo>
+                    <a:pt x="7660515" y="0"/>
+                  </a:lnTo>
+                  <a:lnTo>
+                    <a:pt x="7660515" y="0"/>
+                  </a:lnTo>
+                </a:path>
+              </a:pathLst>
+            </a:custGeom>
+            <a:ln w="6775" cap="flat">
+              <a:solidFill>
+                <a:srgbClr val="EBEBEB">
+                  <a:alpha val="100000"/>
+                </a:srgbClr>
+              </a:solidFill>
+              <a:prstDash val="solid"/>
+              <a:round/>
+            </a:ln>
+          </p:spPr>
+          <p:txBody>
+            <a:bodyPr/>
+            <a:lstStyle/>
+            <a:p/>
+          </p:txBody>
+        </p:sp>
+        <p:sp>
+          <p:nvSpPr>
+            <p:cNvPr id="45" name="pl45"/>
+            <p:cNvSpPr/>
+            <p:nvPr/>
+          </p:nvSpPr>
+          <p:spPr>
+            <a:xfrm>
+              <a:off x="887106" y="5144686"/>
+              <a:ext cx="7660515" cy="0"/>
+            </a:xfrm>
+            <a:custGeom>
+              <a:avLst/>
+              <a:pathLst>
+                <a:path w="7660515" h="0">
+                  <a:moveTo>
+                    <a:pt x="0" y="0"/>
+                  </a:moveTo>
+                  <a:lnTo>
+                    <a:pt x="7660515" y="0"/>
+                  </a:lnTo>
+                  <a:lnTo>
+                    <a:pt x="7660515" y="0"/>
+                  </a:lnTo>
+                </a:path>
+              </a:pathLst>
+            </a:custGeom>
+            <a:ln w="6775" cap="flat">
+              <a:solidFill>
+                <a:srgbClr val="EBEBEB">
+                  <a:alpha val="100000"/>
+                </a:srgbClr>
+              </a:solidFill>
+              <a:prstDash val="solid"/>
+              <a:round/>
+            </a:ln>
+          </p:spPr>
+          <p:txBody>
+            <a:bodyPr/>
+            <a:lstStyle/>
+            <a:p/>
+          </p:txBody>
+        </p:sp>
+        <p:sp>
+          <p:nvSpPr>
+            <p:cNvPr id="46" name="pl46"/>
+            <p:cNvSpPr/>
+            <p:nvPr/>
+          </p:nvSpPr>
+          <p:spPr>
+            <a:xfrm>
+              <a:off x="887106" y="4845352"/>
+              <a:ext cx="7660515" cy="0"/>
+            </a:xfrm>
+            <a:custGeom>
+              <a:avLst/>
+              <a:pathLst>
+                <a:path w="7660515" h="0">
+                  <a:moveTo>
+                    <a:pt x="0" y="0"/>
+                  </a:moveTo>
+                  <a:lnTo>
+                    <a:pt x="7660515" y="0"/>
+                  </a:lnTo>
+                  <a:lnTo>
+                    <a:pt x="7660515" y="0"/>
+                  </a:lnTo>
+                </a:path>
+              </a:pathLst>
+            </a:custGeom>
+            <a:ln w="6775" cap="flat">
+              <a:solidFill>
+                <a:srgbClr val="EBEBEB">
+                  <a:alpha val="100000"/>
+                </a:srgbClr>
+              </a:solidFill>
+              <a:prstDash val="solid"/>
+              <a:round/>
+            </a:ln>
+          </p:spPr>
+          <p:txBody>
+            <a:bodyPr/>
+            <a:lstStyle/>
+            <a:p/>
+          </p:txBody>
+        </p:sp>
+        <p:sp>
+          <p:nvSpPr>
+            <p:cNvPr id="47" name="pl47"/>
+            <p:cNvSpPr/>
+            <p:nvPr/>
+          </p:nvSpPr>
+          <p:spPr>
+            <a:xfrm>
+              <a:off x="887106" y="4546018"/>
+              <a:ext cx="7660515" cy="0"/>
+            </a:xfrm>
+            <a:custGeom>
+              <a:avLst/>
+              <a:pathLst>
+                <a:path w="7660515" h="0">
+                  <a:moveTo>
+                    <a:pt x="0" y="0"/>
+                  </a:moveTo>
+                  <a:lnTo>
+                    <a:pt x="7660515" y="0"/>
+                  </a:lnTo>
+                  <a:lnTo>
+                    <a:pt x="7660515" y="0"/>
+                  </a:lnTo>
+                </a:path>
+              </a:pathLst>
+            </a:custGeom>
+            <a:ln w="6775" cap="flat">
+              <a:solidFill>
+                <a:srgbClr val="EBEBEB">
+                  <a:alpha val="100000"/>
+                </a:srgbClr>
+              </a:solidFill>
+              <a:prstDash val="solid"/>
+              <a:round/>
+            </a:ln>
+          </p:spPr>
+          <p:txBody>
+            <a:bodyPr/>
+            <a:lstStyle/>
+            <a:p/>
+          </p:txBody>
+        </p:sp>
+        <p:sp>
+          <p:nvSpPr>
+            <p:cNvPr id="48" name="pl48"/>
+            <p:cNvSpPr/>
+            <p:nvPr/>
+          </p:nvSpPr>
+          <p:spPr>
+            <a:xfrm>
+              <a:off x="1675141" y="4336484"/>
+              <a:ext cx="0" cy="1317069"/>
+            </a:xfrm>
+            <a:custGeom>
+              <a:avLst/>
+              <a:pathLst>
+                <a:path w="0" h="1317069">
+                  <a:moveTo>
+                    <a:pt x="0" y="1317069"/>
+                  </a:moveTo>
+                  <a:lnTo>
+                    <a:pt x="0" y="0"/>
+                  </a:lnTo>
+                  <a:lnTo>
+                    <a:pt x="0" y="0"/>
+                  </a:lnTo>
+                </a:path>
+              </a:pathLst>
+            </a:custGeom>
+            <a:ln w="6775" cap="flat">
+              <a:solidFill>
+                <a:srgbClr val="EBEBEB">
+                  <a:alpha val="100000"/>
+                </a:srgbClr>
+              </a:solidFill>
+              <a:prstDash val="solid"/>
+              <a:round/>
+            </a:ln>
+          </p:spPr>
+          <p:txBody>
+            <a:bodyPr/>
+            <a:lstStyle/>
+            <a:p/>
+          </p:txBody>
+        </p:sp>
+        <p:sp>
+          <p:nvSpPr>
+            <p:cNvPr id="49" name="pl49"/>
+            <p:cNvSpPr/>
+            <p:nvPr/>
+          </p:nvSpPr>
+          <p:spPr>
+            <a:xfrm>
+              <a:off x="2535404" y="4336484"/>
+              <a:ext cx="0" cy="1317069"/>
+            </a:xfrm>
+            <a:custGeom>
+              <a:avLst/>
+              <a:pathLst>
+                <a:path w="0" h="1317069">
+                  <a:moveTo>
+                    <a:pt x="0" y="1317069"/>
+                  </a:moveTo>
+                  <a:lnTo>
+                    <a:pt x="0" y="0"/>
+                  </a:lnTo>
+                  <a:lnTo>
+                    <a:pt x="0" y="0"/>
+                  </a:lnTo>
+                </a:path>
+              </a:pathLst>
+            </a:custGeom>
+            <a:ln w="6775" cap="flat">
+              <a:solidFill>
+                <a:srgbClr val="EBEBEB">
+                  <a:alpha val="100000"/>
+                </a:srgbClr>
+              </a:solidFill>
+              <a:prstDash val="solid"/>
+              <a:round/>
+            </a:ln>
+          </p:spPr>
+          <p:txBody>
+            <a:bodyPr/>
+            <a:lstStyle/>
+            <a:p/>
+          </p:txBody>
+        </p:sp>
+        <p:sp>
+          <p:nvSpPr>
+            <p:cNvPr id="50" name="pl50"/>
+            <p:cNvSpPr/>
+            <p:nvPr/>
+          </p:nvSpPr>
+          <p:spPr>
+            <a:xfrm>
+              <a:off x="3395667" y="4336484"/>
+              <a:ext cx="0" cy="1317069"/>
+            </a:xfrm>
+            <a:custGeom>
+              <a:avLst/>
+              <a:pathLst>
+                <a:path w="0" h="1317069">
+                  <a:moveTo>
+                    <a:pt x="0" y="1317069"/>
+                  </a:moveTo>
+                  <a:lnTo>
+                    <a:pt x="0" y="0"/>
+                  </a:lnTo>
+                  <a:lnTo>
+                    <a:pt x="0" y="0"/>
+                  </a:lnTo>
+                </a:path>
+              </a:pathLst>
+            </a:custGeom>
+            <a:ln w="6775" cap="flat">
+              <a:solidFill>
+                <a:srgbClr val="EBEBEB">
+                  <a:alpha val="100000"/>
+                </a:srgbClr>
+              </a:solidFill>
+              <a:prstDash val="solid"/>
+              <a:round/>
+            </a:ln>
+          </p:spPr>
+          <p:txBody>
+            <a:bodyPr/>
+            <a:lstStyle/>
+            <a:p/>
+          </p:txBody>
+        </p:sp>
+        <p:sp>
+          <p:nvSpPr>
+            <p:cNvPr id="51" name="pl51"/>
+            <p:cNvSpPr/>
+            <p:nvPr/>
+          </p:nvSpPr>
+          <p:spPr>
+            <a:xfrm>
+              <a:off x="4255930" y="4336484"/>
+              <a:ext cx="0" cy="1317069"/>
+            </a:xfrm>
+            <a:custGeom>
+              <a:avLst/>
+              <a:pathLst>
+                <a:path w="0" h="1317069">
+                  <a:moveTo>
+                    <a:pt x="0" y="1317069"/>
+                  </a:moveTo>
+                  <a:lnTo>
+                    <a:pt x="0" y="0"/>
+                  </a:lnTo>
+                  <a:lnTo>
+                    <a:pt x="0" y="0"/>
+                  </a:lnTo>
+                </a:path>
+              </a:pathLst>
+            </a:custGeom>
+            <a:ln w="6775" cap="flat">
+              <a:solidFill>
+                <a:srgbClr val="EBEBEB">
+                  <a:alpha val="100000"/>
+                </a:srgbClr>
+              </a:solidFill>
+              <a:prstDash val="solid"/>
+              <a:round/>
+            </a:ln>
+          </p:spPr>
+          <p:txBody>
+            <a:bodyPr/>
+            <a:lstStyle/>
+            <a:p/>
+          </p:txBody>
+        </p:sp>
+        <p:sp>
+          <p:nvSpPr>
+            <p:cNvPr id="52" name="pl52"/>
+            <p:cNvSpPr/>
+            <p:nvPr/>
+          </p:nvSpPr>
+          <p:spPr>
+            <a:xfrm>
+              <a:off x="5116193" y="4336484"/>
+              <a:ext cx="0" cy="1317069"/>
+            </a:xfrm>
+            <a:custGeom>
+              <a:avLst/>
+              <a:pathLst>
+                <a:path w="0" h="1317069">
+                  <a:moveTo>
+                    <a:pt x="0" y="1317069"/>
+                  </a:moveTo>
+                  <a:lnTo>
+                    <a:pt x="0" y="0"/>
+                  </a:lnTo>
+                  <a:lnTo>
+                    <a:pt x="0" y="0"/>
+                  </a:lnTo>
+                </a:path>
+              </a:pathLst>
+            </a:custGeom>
+            <a:ln w="6775" cap="flat">
+              <a:solidFill>
+                <a:srgbClr val="EBEBEB">
+                  <a:alpha val="100000"/>
+                </a:srgbClr>
+              </a:solidFill>
+              <a:prstDash val="solid"/>
+              <a:round/>
+            </a:ln>
+          </p:spPr>
+          <p:txBody>
+            <a:bodyPr/>
+            <a:lstStyle/>
+            <a:p/>
+          </p:txBody>
+        </p:sp>
+        <p:sp>
+          <p:nvSpPr>
+            <p:cNvPr id="53" name="pl53"/>
+            <p:cNvSpPr/>
+            <p:nvPr/>
+          </p:nvSpPr>
+          <p:spPr>
+            <a:xfrm>
+              <a:off x="5976457" y="4336484"/>
+              <a:ext cx="0" cy="1317069"/>
+            </a:xfrm>
+            <a:custGeom>
+              <a:avLst/>
+              <a:pathLst>
+                <a:path w="0" h="1317069">
+                  <a:moveTo>
+                    <a:pt x="0" y="1317069"/>
+                  </a:moveTo>
+                  <a:lnTo>
+                    <a:pt x="0" y="0"/>
+                  </a:lnTo>
+                  <a:lnTo>
+                    <a:pt x="0" y="0"/>
+                  </a:lnTo>
+                </a:path>
+              </a:pathLst>
+            </a:custGeom>
+            <a:ln w="6775" cap="flat">
+              <a:solidFill>
+                <a:srgbClr val="EBEBEB">
+                  <a:alpha val="100000"/>
+                </a:srgbClr>
+              </a:solidFill>
+              <a:prstDash val="solid"/>
+              <a:round/>
+            </a:ln>
+          </p:spPr>
+          <p:txBody>
+            <a:bodyPr/>
+            <a:lstStyle/>
+            <a:p/>
+          </p:txBody>
+        </p:sp>
+        <p:sp>
+          <p:nvSpPr>
+            <p:cNvPr id="54" name="pl54"/>
+            <p:cNvSpPr/>
+            <p:nvPr/>
+          </p:nvSpPr>
+          <p:spPr>
+            <a:xfrm>
+              <a:off x="6836720" y="4336484"/>
+              <a:ext cx="0" cy="1317069"/>
+            </a:xfrm>
+            <a:custGeom>
+              <a:avLst/>
+              <a:pathLst>
+                <a:path w="0" h="1317069">
+                  <a:moveTo>
+                    <a:pt x="0" y="1317069"/>
+                  </a:moveTo>
+                  <a:lnTo>
+                    <a:pt x="0" y="0"/>
+                  </a:lnTo>
+                  <a:lnTo>
+                    <a:pt x="0" y="0"/>
+                  </a:lnTo>
+                </a:path>
+              </a:pathLst>
+            </a:custGeom>
+            <a:ln w="6775" cap="flat">
+              <a:solidFill>
+                <a:srgbClr val="EBEBEB">
+                  <a:alpha val="100000"/>
+                </a:srgbClr>
+              </a:solidFill>
+              <a:prstDash val="solid"/>
+              <a:round/>
+            </a:ln>
+          </p:spPr>
+          <p:txBody>
+            <a:bodyPr/>
+            <a:lstStyle/>
+            <a:p/>
+          </p:txBody>
+        </p:sp>
+        <p:sp>
+          <p:nvSpPr>
+            <p:cNvPr id="55" name="pl55"/>
+            <p:cNvSpPr/>
+            <p:nvPr/>
+          </p:nvSpPr>
+          <p:spPr>
+            <a:xfrm>
+              <a:off x="7696983" y="4336484"/>
+              <a:ext cx="0" cy="1317069"/>
+            </a:xfrm>
+            <a:custGeom>
+              <a:avLst/>
+              <a:pathLst>
+                <a:path w="0" h="1317069">
+                  <a:moveTo>
+                    <a:pt x="0" y="1317069"/>
+                  </a:moveTo>
+                  <a:lnTo>
+                    <a:pt x="0" y="0"/>
+                  </a:lnTo>
+                  <a:lnTo>
+                    <a:pt x="0" y="0"/>
+                  </a:lnTo>
+                </a:path>
+              </a:pathLst>
+            </a:custGeom>
+            <a:ln w="6775" cap="flat">
+              <a:solidFill>
+                <a:srgbClr val="EBEBEB">
+                  <a:alpha val="100000"/>
+                </a:srgbClr>
+              </a:solidFill>
+              <a:prstDash val="solid"/>
+              <a:round/>
+            </a:ln>
+          </p:spPr>
+          <p:txBody>
+            <a:bodyPr/>
+            <a:lstStyle/>
+            <a:p/>
+          </p:txBody>
+        </p:sp>
+        <p:sp>
+          <p:nvSpPr>
+            <p:cNvPr id="56" name="pl56"/>
+            <p:cNvSpPr/>
+            <p:nvPr/>
+          </p:nvSpPr>
+          <p:spPr>
+            <a:xfrm>
+              <a:off x="887106" y="5593686"/>
+              <a:ext cx="7660515" cy="0"/>
+            </a:xfrm>
+            <a:custGeom>
+              <a:avLst/>
+              <a:pathLst>
+                <a:path w="7660515" h="0">
+                  <a:moveTo>
+                    <a:pt x="0" y="0"/>
+                  </a:moveTo>
+                  <a:lnTo>
+                    <a:pt x="7660515" y="0"/>
+                  </a:lnTo>
+                  <a:lnTo>
+                    <a:pt x="7660515" y="0"/>
+                  </a:lnTo>
+                </a:path>
+              </a:pathLst>
+            </a:custGeom>
+            <a:ln w="13550" cap="flat">
+              <a:solidFill>
+                <a:srgbClr val="EBEBEB">
+                  <a:alpha val="100000"/>
+                </a:srgbClr>
+              </a:solidFill>
+              <a:prstDash val="solid"/>
+              <a:round/>
+            </a:ln>
+          </p:spPr>
+          <p:txBody>
+            <a:bodyPr/>
+            <a:lstStyle/>
+            <a:p/>
+          </p:txBody>
+        </p:sp>
+        <p:sp>
+          <p:nvSpPr>
+            <p:cNvPr id="57" name="pl57"/>
+            <p:cNvSpPr/>
+            <p:nvPr/>
+          </p:nvSpPr>
+          <p:spPr>
+            <a:xfrm>
+              <a:off x="887106" y="5294352"/>
+              <a:ext cx="7660515" cy="0"/>
+            </a:xfrm>
+            <a:custGeom>
+              <a:avLst/>
+              <a:pathLst>
+                <a:path w="7660515" h="0">
+                  <a:moveTo>
+                    <a:pt x="0" y="0"/>
+                  </a:moveTo>
+                  <a:lnTo>
+                    <a:pt x="7660515" y="0"/>
+                  </a:lnTo>
+                  <a:lnTo>
+                    <a:pt x="7660515" y="0"/>
+                  </a:lnTo>
+                </a:path>
+              </a:pathLst>
+            </a:custGeom>
+            <a:ln w="13550" cap="flat">
+              <a:solidFill>
+                <a:srgbClr val="EBEBEB">
+                  <a:alpha val="100000"/>
+                </a:srgbClr>
+              </a:solidFill>
+              <a:prstDash val="solid"/>
+              <a:round/>
+            </a:ln>
+          </p:spPr>
+          <p:txBody>
+            <a:bodyPr/>
+            <a:lstStyle/>
+            <a:p/>
+          </p:txBody>
+        </p:sp>
+        <p:sp>
+          <p:nvSpPr>
+            <p:cNvPr id="58" name="pl58"/>
+            <p:cNvSpPr/>
+            <p:nvPr/>
+          </p:nvSpPr>
+          <p:spPr>
+            <a:xfrm>
+              <a:off x="887106" y="4995019"/>
+              <a:ext cx="7660515" cy="0"/>
+            </a:xfrm>
+            <a:custGeom>
+              <a:avLst/>
+              <a:pathLst>
+                <a:path w="7660515" h="0">
+                  <a:moveTo>
+                    <a:pt x="0" y="0"/>
+                  </a:moveTo>
+                  <a:lnTo>
+                    <a:pt x="7660515" y="0"/>
+                  </a:lnTo>
+                  <a:lnTo>
+                    <a:pt x="7660515" y="0"/>
+                  </a:lnTo>
+                </a:path>
+              </a:pathLst>
+            </a:custGeom>
+            <a:ln w="13550" cap="flat">
+              <a:solidFill>
+                <a:srgbClr val="EBEBEB">
+                  <a:alpha val="100000"/>
+                </a:srgbClr>
+              </a:solidFill>
+              <a:prstDash val="solid"/>
+              <a:round/>
+            </a:ln>
+          </p:spPr>
+          <p:txBody>
+            <a:bodyPr/>
+            <a:lstStyle/>
+            <a:p/>
+          </p:txBody>
+        </p:sp>
+        <p:sp>
+          <p:nvSpPr>
+            <p:cNvPr id="59" name="pl59"/>
+            <p:cNvSpPr/>
+            <p:nvPr/>
+          </p:nvSpPr>
+          <p:spPr>
+            <a:xfrm>
+              <a:off x="887106" y="4695685"/>
+              <a:ext cx="7660515" cy="0"/>
+            </a:xfrm>
+            <a:custGeom>
+              <a:avLst/>
+              <a:pathLst>
+                <a:path w="7660515" h="0">
+                  <a:moveTo>
+                    <a:pt x="0" y="0"/>
+                  </a:moveTo>
+                  <a:lnTo>
+                    <a:pt x="7660515" y="0"/>
+                  </a:lnTo>
+                  <a:lnTo>
+                    <a:pt x="7660515" y="0"/>
+                  </a:lnTo>
+                </a:path>
+              </a:pathLst>
+            </a:custGeom>
+            <a:ln w="13550" cap="flat">
+              <a:solidFill>
+                <a:srgbClr val="EBEBEB">
+                  <a:alpha val="100000"/>
+                </a:srgbClr>
+              </a:solidFill>
+              <a:prstDash val="solid"/>
+              <a:round/>
+            </a:ln>
+          </p:spPr>
+          <p:txBody>
+            <a:bodyPr/>
+            <a:lstStyle/>
+            <a:p/>
+          </p:txBody>
+        </p:sp>
+        <p:sp>
+          <p:nvSpPr>
+            <p:cNvPr id="60" name="pl60"/>
+            <p:cNvSpPr/>
+            <p:nvPr/>
+          </p:nvSpPr>
+          <p:spPr>
+            <a:xfrm>
+              <a:off x="887106" y="4396351"/>
+              <a:ext cx="7660515" cy="0"/>
+            </a:xfrm>
+            <a:custGeom>
+              <a:avLst/>
+              <a:pathLst>
+                <a:path w="7660515" h="0">
+                  <a:moveTo>
+                    <a:pt x="0" y="0"/>
+                  </a:moveTo>
+                  <a:lnTo>
+                    <a:pt x="7660515" y="0"/>
+                  </a:lnTo>
+                  <a:lnTo>
+                    <a:pt x="7660515" y="0"/>
+                  </a:lnTo>
+                </a:path>
+              </a:pathLst>
+            </a:custGeom>
+            <a:ln w="13550" cap="flat">
+              <a:solidFill>
+                <a:srgbClr val="EBEBEB">
+                  <a:alpha val="100000"/>
+                </a:srgbClr>
+              </a:solidFill>
+              <a:prstDash val="solid"/>
+              <a:round/>
+            </a:ln>
+          </p:spPr>
+          <p:txBody>
+            <a:bodyPr/>
+            <a:lstStyle/>
+            <a:p/>
+          </p:txBody>
+        </p:sp>
+        <p:sp>
+          <p:nvSpPr>
+            <p:cNvPr id="61" name="pl61"/>
+            <p:cNvSpPr/>
+            <p:nvPr/>
+          </p:nvSpPr>
+          <p:spPr>
+            <a:xfrm>
+              <a:off x="1245010" y="4336484"/>
+              <a:ext cx="0" cy="1317069"/>
+            </a:xfrm>
+            <a:custGeom>
+              <a:avLst/>
+              <a:pathLst>
+                <a:path w="0" h="1317069">
+                  <a:moveTo>
+                    <a:pt x="0" y="1317069"/>
+                  </a:moveTo>
+                  <a:lnTo>
+                    <a:pt x="0" y="0"/>
+                  </a:lnTo>
+                  <a:lnTo>
+                    <a:pt x="0" y="0"/>
+                  </a:lnTo>
+                </a:path>
+              </a:pathLst>
+            </a:custGeom>
+            <a:ln w="13550" cap="flat">
+              <a:solidFill>
+                <a:srgbClr val="EBEBEB">
+                  <a:alpha val="100000"/>
+                </a:srgbClr>
+              </a:solidFill>
+              <a:prstDash val="solid"/>
+              <a:round/>
+            </a:ln>
+          </p:spPr>
+          <p:txBody>
+            <a:bodyPr/>
+            <a:lstStyle/>
+            <a:p/>
+          </p:txBody>
+        </p:sp>
+        <p:sp>
+          <p:nvSpPr>
+            <p:cNvPr id="62" name="pl62"/>
+            <p:cNvSpPr/>
+            <p:nvPr/>
+          </p:nvSpPr>
+          <p:spPr>
+            <a:xfrm>
+              <a:off x="2105273" y="4336484"/>
+              <a:ext cx="0" cy="1317069"/>
+            </a:xfrm>
+            <a:custGeom>
+              <a:avLst/>
+              <a:pathLst>
+                <a:path w="0" h="1317069">
+                  <a:moveTo>
+                    <a:pt x="0" y="1317069"/>
+                  </a:moveTo>
+                  <a:lnTo>
+                    <a:pt x="0" y="0"/>
+                  </a:lnTo>
+                  <a:lnTo>
+                    <a:pt x="0" y="0"/>
+                  </a:lnTo>
+                </a:path>
+              </a:pathLst>
+            </a:custGeom>
+            <a:ln w="13550" cap="flat">
+              <a:solidFill>
+                <a:srgbClr val="EBEBEB">
+                  <a:alpha val="100000"/>
+                </a:srgbClr>
+              </a:solidFill>
+              <a:prstDash val="solid"/>
+              <a:round/>
+            </a:ln>
+          </p:spPr>
+          <p:txBody>
+            <a:bodyPr/>
+            <a:lstStyle/>
+            <a:p/>
+          </p:txBody>
+        </p:sp>
+        <p:sp>
+          <p:nvSpPr>
+            <p:cNvPr id="63" name="pl63"/>
+            <p:cNvSpPr/>
+            <p:nvPr/>
+          </p:nvSpPr>
+          <p:spPr>
+            <a:xfrm>
+              <a:off x="2965536" y="4336484"/>
+              <a:ext cx="0" cy="1317069"/>
+            </a:xfrm>
+            <a:custGeom>
+              <a:avLst/>
+              <a:pathLst>
+                <a:path w="0" h="1317069">
+                  <a:moveTo>
+                    <a:pt x="0" y="1317069"/>
+                  </a:moveTo>
+                  <a:lnTo>
+                    <a:pt x="0" y="0"/>
+                  </a:lnTo>
+                  <a:lnTo>
+                    <a:pt x="0" y="0"/>
+                  </a:lnTo>
+                </a:path>
+              </a:pathLst>
+            </a:custGeom>
+            <a:ln w="13550" cap="flat">
+              <a:solidFill>
+                <a:srgbClr val="EBEBEB">
+                  <a:alpha val="100000"/>
+                </a:srgbClr>
+              </a:solidFill>
+              <a:prstDash val="solid"/>
+              <a:round/>
+            </a:ln>
+          </p:spPr>
+          <p:txBody>
+            <a:bodyPr/>
+            <a:lstStyle/>
+            <a:p/>
+          </p:txBody>
+        </p:sp>
+        <p:sp>
+          <p:nvSpPr>
+            <p:cNvPr id="64" name="pl64"/>
+            <p:cNvSpPr/>
+            <p:nvPr/>
+          </p:nvSpPr>
+          <p:spPr>
+            <a:xfrm>
+              <a:off x="3825799" y="4336484"/>
+              <a:ext cx="0" cy="1317069"/>
+            </a:xfrm>
+            <a:custGeom>
+              <a:avLst/>
+              <a:pathLst>
+                <a:path w="0" h="1317069">
+                  <a:moveTo>
+                    <a:pt x="0" y="1317069"/>
+                  </a:moveTo>
+                  <a:lnTo>
+                    <a:pt x="0" y="0"/>
+                  </a:lnTo>
+                  <a:lnTo>
+                    <a:pt x="0" y="0"/>
+                  </a:lnTo>
+                </a:path>
+              </a:pathLst>
+            </a:custGeom>
+            <a:ln w="13550" cap="flat">
+              <a:solidFill>
+                <a:srgbClr val="EBEBEB">
+                  <a:alpha val="100000"/>
+                </a:srgbClr>
+              </a:solidFill>
+              <a:prstDash val="solid"/>
+              <a:round/>
+            </a:ln>
+          </p:spPr>
+          <p:txBody>
+            <a:bodyPr/>
+            <a:lstStyle/>
+            <a:p/>
+          </p:txBody>
+        </p:sp>
+        <p:sp>
+          <p:nvSpPr>
+            <p:cNvPr id="65" name="pl65"/>
+            <p:cNvSpPr/>
+            <p:nvPr/>
+          </p:nvSpPr>
+          <p:spPr>
+            <a:xfrm>
+              <a:off x="4686062" y="4336484"/>
+              <a:ext cx="0" cy="1317069"/>
+            </a:xfrm>
+            <a:custGeom>
+              <a:avLst/>
+              <a:pathLst>
+                <a:path w="0" h="1317069">
+                  <a:moveTo>
+                    <a:pt x="0" y="1317069"/>
+                  </a:moveTo>
+                  <a:lnTo>
+                    <a:pt x="0" y="0"/>
+                  </a:lnTo>
+                  <a:lnTo>
+                    <a:pt x="0" y="0"/>
+                  </a:lnTo>
+                </a:path>
+              </a:pathLst>
+            </a:custGeom>
+            <a:ln w="13550" cap="flat">
+              <a:solidFill>
+                <a:srgbClr val="EBEBEB">
+                  <a:alpha val="100000"/>
+                </a:srgbClr>
+              </a:solidFill>
+              <a:prstDash val="solid"/>
+              <a:round/>
+            </a:ln>
+          </p:spPr>
+          <p:txBody>
+            <a:bodyPr/>
+            <a:lstStyle/>
+            <a:p/>
+          </p:txBody>
+        </p:sp>
+        <p:sp>
+          <p:nvSpPr>
+            <p:cNvPr id="66" name="pl66"/>
+            <p:cNvSpPr/>
+            <p:nvPr/>
+          </p:nvSpPr>
+          <p:spPr>
+            <a:xfrm>
+              <a:off x="5546325" y="4336484"/>
+              <a:ext cx="0" cy="1317069"/>
+            </a:xfrm>
+            <a:custGeom>
+              <a:avLst/>
+              <a:pathLst>
+                <a:path w="0" h="1317069">
+                  <a:moveTo>
+                    <a:pt x="0" y="1317069"/>
+                  </a:moveTo>
+                  <a:lnTo>
+                    <a:pt x="0" y="0"/>
+                  </a:lnTo>
+                  <a:lnTo>
+                    <a:pt x="0" y="0"/>
+                  </a:lnTo>
+                </a:path>
+              </a:pathLst>
+            </a:custGeom>
+            <a:ln w="13550" cap="flat">
+              <a:solidFill>
+                <a:srgbClr val="EBEBEB">
+                  <a:alpha val="100000"/>
+                </a:srgbClr>
+              </a:solidFill>
+              <a:prstDash val="solid"/>
+              <a:round/>
+            </a:ln>
+          </p:spPr>
+          <p:txBody>
+            <a:bodyPr/>
+            <a:lstStyle/>
+            <a:p/>
+          </p:txBody>
+        </p:sp>
+        <p:sp>
+          <p:nvSpPr>
+            <p:cNvPr id="67" name="pl67"/>
+            <p:cNvSpPr/>
+            <p:nvPr/>
+          </p:nvSpPr>
+          <p:spPr>
+            <a:xfrm>
+              <a:off x="6406588" y="4336484"/>
+              <a:ext cx="0" cy="1317069"/>
+            </a:xfrm>
+            <a:custGeom>
+              <a:avLst/>
+              <a:pathLst>
+                <a:path w="0" h="1317069">
+                  <a:moveTo>
+                    <a:pt x="0" y="1317069"/>
+                  </a:moveTo>
+                  <a:lnTo>
+                    <a:pt x="0" y="0"/>
+                  </a:lnTo>
+                  <a:lnTo>
+                    <a:pt x="0" y="0"/>
+                  </a:lnTo>
+                </a:path>
+              </a:pathLst>
+            </a:custGeom>
+            <a:ln w="13550" cap="flat">
+              <a:solidFill>
+                <a:srgbClr val="EBEBEB">
+                  <a:alpha val="100000"/>
+                </a:srgbClr>
+              </a:solidFill>
+              <a:prstDash val="solid"/>
+              <a:round/>
+            </a:ln>
+          </p:spPr>
+          <p:txBody>
+            <a:bodyPr/>
+            <a:lstStyle/>
+            <a:p/>
+          </p:txBody>
+        </p:sp>
+        <p:sp>
+          <p:nvSpPr>
+            <p:cNvPr id="68" name="pl68"/>
+            <p:cNvSpPr/>
+            <p:nvPr/>
+          </p:nvSpPr>
+          <p:spPr>
+            <a:xfrm>
+              <a:off x="7266851" y="4336484"/>
+              <a:ext cx="0" cy="1317069"/>
+            </a:xfrm>
+            <a:custGeom>
+              <a:avLst/>
+              <a:pathLst>
+                <a:path w="0" h="1317069">
+                  <a:moveTo>
+                    <a:pt x="0" y="1317069"/>
+                  </a:moveTo>
+                  <a:lnTo>
+                    <a:pt x="0" y="0"/>
+                  </a:lnTo>
+                  <a:lnTo>
+                    <a:pt x="0" y="0"/>
+                  </a:lnTo>
+                </a:path>
+              </a:pathLst>
+            </a:custGeom>
+            <a:ln w="13550" cap="flat">
+              <a:solidFill>
+                <a:srgbClr val="EBEBEB">
+                  <a:alpha val="100000"/>
+                </a:srgbClr>
+              </a:solidFill>
+              <a:prstDash val="solid"/>
+              <a:round/>
+            </a:ln>
+          </p:spPr>
+          <p:txBody>
+            <a:bodyPr/>
+            <a:lstStyle/>
+            <a:p/>
+          </p:txBody>
+        </p:sp>
+        <p:sp>
+          <p:nvSpPr>
+            <p:cNvPr id="69" name="pl69"/>
+            <p:cNvSpPr/>
+            <p:nvPr/>
+          </p:nvSpPr>
+          <p:spPr>
+            <a:xfrm>
+              <a:off x="8127114" y="4336484"/>
+              <a:ext cx="0" cy="1317069"/>
+            </a:xfrm>
+            <a:custGeom>
+              <a:avLst/>
+              <a:pathLst>
+                <a:path w="0" h="1317069">
+                  <a:moveTo>
+                    <a:pt x="0" y="1317069"/>
+                  </a:moveTo>
+                  <a:lnTo>
+                    <a:pt x="0" y="0"/>
+                  </a:lnTo>
+                  <a:lnTo>
+                    <a:pt x="0" y="0"/>
+                  </a:lnTo>
+                </a:path>
+              </a:pathLst>
+            </a:custGeom>
+            <a:ln w="13550" cap="flat">
+              <a:solidFill>
+                <a:srgbClr val="EBEBEB">
+                  <a:alpha val="100000"/>
+                </a:srgbClr>
+              </a:solidFill>
+              <a:prstDash val="solid"/>
+              <a:round/>
+            </a:ln>
+          </p:spPr>
+          <p:txBody>
+            <a:bodyPr/>
+            <a:lstStyle/>
+            <a:p/>
+          </p:txBody>
+        </p:sp>
+        <p:sp>
+          <p:nvSpPr>
+            <p:cNvPr id="70" name="pg70"/>
+            <p:cNvSpPr/>
+            <p:nvPr/>
+          </p:nvSpPr>
+          <p:spPr>
+            <a:xfrm>
+              <a:off x="1235312" y="4810673"/>
+              <a:ext cx="6964104" cy="700265"/>
+            </a:xfrm>
+            <a:custGeom>
+              <a:avLst/>
+              <a:pathLst>
+                <a:path w="6964104" h="700265">
+                  <a:moveTo>
+                    <a:pt x="0" y="0"/>
+                  </a:moveTo>
+                  <a:lnTo>
+                    <a:pt x="70344" y="17574"/>
+                  </a:lnTo>
+                  <a:lnTo>
+                    <a:pt x="140688" y="34754"/>
+                  </a:lnTo>
+                  <a:lnTo>
+                    <a:pt x="211033" y="51549"/>
+                  </a:lnTo>
+                  <a:lnTo>
+                    <a:pt x="281377" y="67966"/>
+                  </a:lnTo>
+                  <a:lnTo>
+                    <a:pt x="351722" y="84015"/>
+                  </a:lnTo>
+                  <a:lnTo>
+                    <a:pt x="422066" y="99704"/>
+                  </a:lnTo>
+                  <a:lnTo>
+                    <a:pt x="492411" y="115041"/>
+                  </a:lnTo>
+                  <a:lnTo>
+                    <a:pt x="562755" y="130033"/>
+                  </a:lnTo>
+                  <a:lnTo>
+                    <a:pt x="633100" y="144689"/>
+                  </a:lnTo>
+                  <a:lnTo>
+                    <a:pt x="703444" y="159016"/>
+                  </a:lnTo>
+                  <a:lnTo>
+                    <a:pt x="773789" y="173022"/>
+                  </a:lnTo>
+                  <a:lnTo>
+                    <a:pt x="844133" y="186713"/>
+                  </a:lnTo>
+                  <a:lnTo>
+                    <a:pt x="914478" y="200097"/>
+                  </a:lnTo>
+                  <a:lnTo>
+                    <a:pt x="984822" y="213180"/>
+                  </a:lnTo>
+                  <a:lnTo>
+                    <a:pt x="1055167" y="225970"/>
+                  </a:lnTo>
+                  <a:lnTo>
+                    <a:pt x="1125511" y="238473"/>
+                  </a:lnTo>
+                  <a:lnTo>
+                    <a:pt x="1195856" y="250695"/>
+                  </a:lnTo>
+                  <a:lnTo>
+                    <a:pt x="1266200" y="262642"/>
+                  </a:lnTo>
+                  <a:lnTo>
+                    <a:pt x="1336545" y="274322"/>
+                  </a:lnTo>
+                  <a:lnTo>
+                    <a:pt x="1406889" y="285739"/>
+                  </a:lnTo>
+                  <a:lnTo>
+                    <a:pt x="1477234" y="296901"/>
+                  </a:lnTo>
+                  <a:lnTo>
+                    <a:pt x="1547578" y="307811"/>
+                  </a:lnTo>
+                  <a:lnTo>
+                    <a:pt x="1617923" y="318477"/>
+                  </a:lnTo>
+                  <a:lnTo>
+                    <a:pt x="1688267" y="328903"/>
+                  </a:lnTo>
+                  <a:lnTo>
+                    <a:pt x="1758612" y="339096"/>
+                  </a:lnTo>
+                  <a:lnTo>
+                    <a:pt x="1828956" y="349059"/>
+                  </a:lnTo>
+                  <a:lnTo>
+                    <a:pt x="1899301" y="358799"/>
+                  </a:lnTo>
+                  <a:lnTo>
+                    <a:pt x="1969645" y="368321"/>
+                  </a:lnTo>
+                  <a:lnTo>
+                    <a:pt x="2039990" y="377628"/>
+                  </a:lnTo>
+                  <a:lnTo>
+                    <a:pt x="2110334" y="386727"/>
+                  </a:lnTo>
+                  <a:lnTo>
+                    <a:pt x="2180679" y="395622"/>
+                  </a:lnTo>
+                  <a:lnTo>
+                    <a:pt x="2251023" y="404317"/>
+                  </a:lnTo>
+                  <a:lnTo>
+                    <a:pt x="2321368" y="412816"/>
+                  </a:lnTo>
+                  <a:lnTo>
+                    <a:pt x="2391712" y="421125"/>
+                  </a:lnTo>
+                  <a:lnTo>
+                    <a:pt x="2462057" y="429248"/>
+                  </a:lnTo>
+                  <a:lnTo>
+                    <a:pt x="2532401" y="437188"/>
+                  </a:lnTo>
+                  <a:lnTo>
+                    <a:pt x="2602746" y="444950"/>
+                  </a:lnTo>
+                  <a:lnTo>
+                    <a:pt x="2673090" y="452538"/>
+                  </a:lnTo>
+                  <a:lnTo>
+                    <a:pt x="2743435" y="459955"/>
+                  </a:lnTo>
+                  <a:lnTo>
+                    <a:pt x="2813779" y="467206"/>
+                  </a:lnTo>
+                  <a:lnTo>
+                    <a:pt x="2884124" y="474294"/>
+                  </a:lnTo>
+                  <a:lnTo>
+                    <a:pt x="2954468" y="481224"/>
+                  </a:lnTo>
+                  <a:lnTo>
+                    <a:pt x="3024813" y="484828"/>
+                  </a:lnTo>
+                  <a:lnTo>
+                    <a:pt x="3095157" y="486615"/>
+                  </a:lnTo>
+                  <a:lnTo>
+                    <a:pt x="3165502" y="488390"/>
+                  </a:lnTo>
+                  <a:lnTo>
+                    <a:pt x="3235846" y="490155"/>
+                  </a:lnTo>
+                  <a:lnTo>
+                    <a:pt x="3306191" y="491910"/>
+                  </a:lnTo>
+                  <a:lnTo>
+                    <a:pt x="3376535" y="493654"/>
+                  </a:lnTo>
+                  <a:lnTo>
+                    <a:pt x="3446880" y="495387"/>
+                  </a:lnTo>
+                  <a:lnTo>
+                    <a:pt x="3517224" y="497110"/>
+                  </a:lnTo>
+                  <a:lnTo>
+                    <a:pt x="3587569" y="498823"/>
+                  </a:lnTo>
+                  <a:lnTo>
+                    <a:pt x="3657913" y="500526"/>
+                  </a:lnTo>
+                  <a:lnTo>
+                    <a:pt x="3728257" y="502218"/>
+                  </a:lnTo>
+                  <a:lnTo>
+                    <a:pt x="3798602" y="503900"/>
+                  </a:lnTo>
+                  <a:lnTo>
+                    <a:pt x="3868946" y="505572"/>
+                  </a:lnTo>
+                  <a:lnTo>
+                    <a:pt x="3939291" y="507234"/>
+                  </a:lnTo>
+                  <a:lnTo>
+                    <a:pt x="4009635" y="508886"/>
+                  </a:lnTo>
+                  <a:lnTo>
+                    <a:pt x="4079980" y="510529"/>
+                  </a:lnTo>
+                  <a:lnTo>
+                    <a:pt x="4150324" y="512161"/>
+                  </a:lnTo>
+                  <a:lnTo>
+                    <a:pt x="4220669" y="513784"/>
+                  </a:lnTo>
+                  <a:lnTo>
+                    <a:pt x="4291013" y="515397"/>
+                  </a:lnTo>
+                  <a:lnTo>
+                    <a:pt x="4361358" y="517000"/>
+                  </a:lnTo>
+                  <a:lnTo>
+                    <a:pt x="4431702" y="518593"/>
+                  </a:lnTo>
+                  <a:lnTo>
+                    <a:pt x="4502047" y="520178"/>
+                  </a:lnTo>
+                  <a:lnTo>
+                    <a:pt x="4572391" y="521752"/>
+                  </a:lnTo>
+                  <a:lnTo>
+                    <a:pt x="4642736" y="523317"/>
+                  </a:lnTo>
+                  <a:lnTo>
+                    <a:pt x="4713080" y="524873"/>
+                  </a:lnTo>
+                  <a:lnTo>
+                    <a:pt x="4783425" y="526420"/>
+                  </a:lnTo>
+                  <a:lnTo>
+                    <a:pt x="4853769" y="527957"/>
+                  </a:lnTo>
+                  <a:lnTo>
+                    <a:pt x="4924114" y="529485"/>
+                  </a:lnTo>
+                  <a:lnTo>
+                    <a:pt x="4994458" y="531004"/>
+                  </a:lnTo>
+                  <a:lnTo>
+                    <a:pt x="5064803" y="532513"/>
+                  </a:lnTo>
+                  <a:lnTo>
+                    <a:pt x="5135147" y="534014"/>
+                  </a:lnTo>
+                  <a:lnTo>
+                    <a:pt x="5205492" y="535506"/>
+                  </a:lnTo>
+                  <a:lnTo>
+                    <a:pt x="5275836" y="536988"/>
+                  </a:lnTo>
+                  <a:lnTo>
+                    <a:pt x="5346181" y="538462"/>
+                  </a:lnTo>
+                  <a:lnTo>
+                    <a:pt x="5416525" y="539927"/>
+                  </a:lnTo>
+                  <a:lnTo>
+                    <a:pt x="5486870" y="541384"/>
+                  </a:lnTo>
+                  <a:lnTo>
+                    <a:pt x="5557214" y="542831"/>
+                  </a:lnTo>
+                  <a:lnTo>
+                    <a:pt x="5627559" y="544270"/>
+                  </a:lnTo>
+                  <a:lnTo>
+                    <a:pt x="5697903" y="545700"/>
+                  </a:lnTo>
+                  <a:lnTo>
+                    <a:pt x="5768248" y="547122"/>
+                  </a:lnTo>
+                  <a:lnTo>
+                    <a:pt x="5838592" y="548535"/>
+                  </a:lnTo>
+                  <a:lnTo>
+                    <a:pt x="5908937" y="549940"/>
+                  </a:lnTo>
+                  <a:lnTo>
+                    <a:pt x="5979281" y="551336"/>
+                  </a:lnTo>
+                  <a:lnTo>
+                    <a:pt x="6049626" y="552724"/>
+                  </a:lnTo>
+                  <a:lnTo>
+                    <a:pt x="6119970" y="554104"/>
+                  </a:lnTo>
+                  <a:lnTo>
+                    <a:pt x="6190315" y="555475"/>
+                  </a:lnTo>
+                  <a:lnTo>
+                    <a:pt x="6260659" y="556838"/>
+                  </a:lnTo>
+                  <a:lnTo>
+                    <a:pt x="6331004" y="558193"/>
+                  </a:lnTo>
+                  <a:lnTo>
+                    <a:pt x="6401348" y="559540"/>
+                  </a:lnTo>
+                  <a:lnTo>
+                    <a:pt x="6471693" y="560879"/>
+                  </a:lnTo>
+                  <a:lnTo>
+                    <a:pt x="6542037" y="562209"/>
+                  </a:lnTo>
+                  <a:lnTo>
+                    <a:pt x="6612382" y="563532"/>
+                  </a:lnTo>
+                  <a:lnTo>
+                    <a:pt x="6682726" y="564847"/>
+                  </a:lnTo>
+                  <a:lnTo>
+                    <a:pt x="6753071" y="566154"/>
+                  </a:lnTo>
+                  <a:lnTo>
+                    <a:pt x="6823415" y="567453"/>
+                  </a:lnTo>
+                  <a:lnTo>
+                    <a:pt x="6893760" y="568745"/>
+                  </a:lnTo>
+                  <a:lnTo>
+                    <a:pt x="6964104" y="570028"/>
+                  </a:lnTo>
+                  <a:lnTo>
+                    <a:pt x="6964104" y="700265"/>
+                  </a:lnTo>
+                  <a:lnTo>
+                    <a:pt x="6893760" y="698365"/>
+                  </a:lnTo>
+                  <a:lnTo>
+                    <a:pt x="6823415" y="696421"/>
+                  </a:lnTo>
+                  <a:lnTo>
+                    <a:pt x="6753071" y="694433"/>
+                  </a:lnTo>
+                  <a:lnTo>
+                    <a:pt x="6682726" y="692400"/>
+                  </a:lnTo>
+                  <a:lnTo>
+                    <a:pt x="6612382" y="690319"/>
+                  </a:lnTo>
+                  <a:lnTo>
+                    <a:pt x="6542037" y="688191"/>
+                  </a:lnTo>
+                  <a:lnTo>
+                    <a:pt x="6471693" y="686014"/>
+                  </a:lnTo>
+                  <a:lnTo>
+                    <a:pt x="6401348" y="683786"/>
+                  </a:lnTo>
+                  <a:lnTo>
+                    <a:pt x="6331004" y="681508"/>
+                  </a:lnTo>
+                  <a:lnTo>
+                    <a:pt x="6260659" y="679178"/>
+                  </a:lnTo>
+                  <a:lnTo>
+                    <a:pt x="6190315" y="676794"/>
+                  </a:lnTo>
+                  <a:lnTo>
+                    <a:pt x="6119970" y="674355"/>
+                  </a:lnTo>
+                  <a:lnTo>
+                    <a:pt x="6049626" y="671860"/>
+                  </a:lnTo>
+                  <a:lnTo>
+                    <a:pt x="5979281" y="669308"/>
+                  </a:lnTo>
+                  <a:lnTo>
+                    <a:pt x="5908937" y="666697"/>
+                  </a:lnTo>
+                  <a:lnTo>
+                    <a:pt x="5838592" y="664027"/>
+                  </a:lnTo>
+                  <a:lnTo>
+                    <a:pt x="5768248" y="661295"/>
+                  </a:lnTo>
+                  <a:lnTo>
+                    <a:pt x="5697903" y="658500"/>
+                  </a:lnTo>
+                  <a:lnTo>
+                    <a:pt x="5627559" y="655641"/>
+                  </a:lnTo>
+                  <a:lnTo>
+                    <a:pt x="5557214" y="652717"/>
+                  </a:lnTo>
+                  <a:lnTo>
+                    <a:pt x="5486870" y="649725"/>
+                  </a:lnTo>
+                  <a:lnTo>
+                    <a:pt x="5416525" y="646665"/>
+                  </a:lnTo>
+                  <a:lnTo>
+                    <a:pt x="5346181" y="643534"/>
+                  </a:lnTo>
+                  <a:lnTo>
+                    <a:pt x="5275836" y="640332"/>
+                  </a:lnTo>
+                  <a:lnTo>
+                    <a:pt x="5205492" y="637056"/>
+                  </a:lnTo>
+                  <a:lnTo>
+                    <a:pt x="5135147" y="633705"/>
+                  </a:lnTo>
+                  <a:lnTo>
+                    <a:pt x="5064803" y="630276"/>
+                  </a:lnTo>
+                  <a:lnTo>
+                    <a:pt x="4994458" y="626770"/>
+                  </a:lnTo>
+                  <a:lnTo>
+                    <a:pt x="4924114" y="623182"/>
+                  </a:lnTo>
+                  <a:lnTo>
+                    <a:pt x="4853769" y="619512"/>
+                  </a:lnTo>
+                  <a:lnTo>
+                    <a:pt x="4783425" y="615758"/>
+                  </a:lnTo>
+                  <a:lnTo>
+                    <a:pt x="4713080" y="611918"/>
+                  </a:lnTo>
+                  <a:lnTo>
+                    <a:pt x="4642736" y="607990"/>
+                  </a:lnTo>
+                  <a:lnTo>
+                    <a:pt x="4572391" y="603971"/>
+                  </a:lnTo>
+                  <a:lnTo>
+                    <a:pt x="4502047" y="599861"/>
+                  </a:lnTo>
+                  <a:lnTo>
+                    <a:pt x="4431702" y="595655"/>
+                  </a:lnTo>
+                  <a:lnTo>
+                    <a:pt x="4361358" y="591354"/>
+                  </a:lnTo>
+                  <a:lnTo>
+                    <a:pt x="4291013" y="586953"/>
+                  </a:lnTo>
+                  <a:lnTo>
+                    <a:pt x="4220669" y="582452"/>
+                  </a:lnTo>
+                  <a:lnTo>
+                    <a:pt x="4150324" y="577847"/>
+                  </a:lnTo>
+                  <a:lnTo>
+                    <a:pt x="4079980" y="573136"/>
+                  </a:lnTo>
+                  <a:lnTo>
+                    <a:pt x="4009635" y="568317"/>
+                  </a:lnTo>
+                  <a:lnTo>
+                    <a:pt x="3939291" y="563388"/>
+                  </a:lnTo>
+                  <a:lnTo>
+                    <a:pt x="3868946" y="558345"/>
+                  </a:lnTo>
+                  <a:lnTo>
+                    <a:pt x="3798602" y="553187"/>
+                  </a:lnTo>
+                  <a:lnTo>
+                    <a:pt x="3728257" y="547910"/>
+                  </a:lnTo>
+                  <a:lnTo>
+                    <a:pt x="3657913" y="542512"/>
+                  </a:lnTo>
+                  <a:lnTo>
+                    <a:pt x="3587569" y="536990"/>
+                  </a:lnTo>
+                  <a:lnTo>
+                    <a:pt x="3517224" y="531341"/>
+                  </a:lnTo>
+                  <a:lnTo>
+                    <a:pt x="3446880" y="525563"/>
+                  </a:lnTo>
+                  <a:lnTo>
+                    <a:pt x="3376535" y="519652"/>
+                  </a:lnTo>
+                  <a:lnTo>
+                    <a:pt x="3306191" y="513605"/>
+                  </a:lnTo>
+                  <a:lnTo>
+                    <a:pt x="3235846" y="507419"/>
+                  </a:lnTo>
+                  <a:lnTo>
+                    <a:pt x="3165502" y="501092"/>
+                  </a:lnTo>
+                  <a:lnTo>
+                    <a:pt x="3095157" y="494619"/>
+                  </a:lnTo>
+                  <a:lnTo>
+                    <a:pt x="3024813" y="487997"/>
+                  </a:lnTo>
+                  <a:lnTo>
+                    <a:pt x="2954468" y="483031"/>
+                  </a:lnTo>
+                  <a:lnTo>
+                    <a:pt x="2884124" y="481223"/>
+                  </a:lnTo>
+                  <a:lnTo>
+                    <a:pt x="2813779" y="479404"/>
+                  </a:lnTo>
+                  <a:lnTo>
+                    <a:pt x="2743435" y="477575"/>
+                  </a:lnTo>
+                  <a:lnTo>
+                    <a:pt x="2673090" y="475734"/>
+                  </a:lnTo>
+                  <a:lnTo>
+                    <a:pt x="2602746" y="473882"/>
+                  </a:lnTo>
+                  <a:lnTo>
+                    <a:pt x="2532401" y="472019"/>
+                  </a:lnTo>
+                  <a:lnTo>
+                    <a:pt x="2462057" y="470144"/>
+                  </a:lnTo>
+                  <a:lnTo>
+                    <a:pt x="2391712" y="468259"/>
+                  </a:lnTo>
+                  <a:lnTo>
+                    <a:pt x="2321368" y="466362"/>
+                  </a:lnTo>
+                  <a:lnTo>
+                    <a:pt x="2251023" y="464453"/>
+                  </a:lnTo>
+                  <a:lnTo>
+                    <a:pt x="2180679" y="462533"/>
+                  </a:lnTo>
+                  <a:lnTo>
+                    <a:pt x="2110334" y="460602"/>
+                  </a:lnTo>
+                  <a:lnTo>
+                    <a:pt x="2039990" y="458659"/>
+                  </a:lnTo>
+                  <a:lnTo>
+                    <a:pt x="1969645" y="456704"/>
+                  </a:lnTo>
+                  <a:lnTo>
+                    <a:pt x="1899301" y="454737"/>
+                  </a:lnTo>
+                  <a:lnTo>
+                    <a:pt x="1828956" y="452759"/>
+                  </a:lnTo>
+                  <a:lnTo>
+                    <a:pt x="1758612" y="450768"/>
+                  </a:lnTo>
+                  <a:lnTo>
+                    <a:pt x="1688267" y="448766"/>
+                  </a:lnTo>
+                  <a:lnTo>
+                    <a:pt x="1617923" y="446752"/>
+                  </a:lnTo>
+                  <a:lnTo>
+                    <a:pt x="1547578" y="444725"/>
+                  </a:lnTo>
+                  <a:lnTo>
+                    <a:pt x="1477234" y="442686"/>
+                  </a:lnTo>
+                  <a:lnTo>
+                    <a:pt x="1406889" y="440635"/>
+                  </a:lnTo>
+                  <a:lnTo>
+                    <a:pt x="1336545" y="438572"/>
+                  </a:lnTo>
+                  <a:lnTo>
+                    <a:pt x="1266200" y="436496"/>
+                  </a:lnTo>
+                  <a:lnTo>
+                    <a:pt x="1195856" y="434407"/>
+                  </a:lnTo>
+                  <a:lnTo>
+                    <a:pt x="1125511" y="432306"/>
+                  </a:lnTo>
+                  <a:lnTo>
+                    <a:pt x="1055167" y="430193"/>
+                  </a:lnTo>
+                  <a:lnTo>
+                    <a:pt x="984822" y="428066"/>
+                  </a:lnTo>
+                  <a:lnTo>
+                    <a:pt x="914478" y="425927"/>
+                  </a:lnTo>
+                  <a:lnTo>
+                    <a:pt x="844133" y="423775"/>
+                  </a:lnTo>
+                  <a:lnTo>
+                    <a:pt x="773789" y="421610"/>
+                  </a:lnTo>
+                  <a:lnTo>
+                    <a:pt x="703444" y="419432"/>
+                  </a:lnTo>
+                  <a:lnTo>
+                    <a:pt x="633100" y="417240"/>
+                  </a:lnTo>
+                  <a:lnTo>
+                    <a:pt x="562755" y="415036"/>
+                  </a:lnTo>
+                  <a:lnTo>
+                    <a:pt x="492411" y="412818"/>
+                  </a:lnTo>
+                  <a:lnTo>
+                    <a:pt x="422066" y="410587"/>
+                  </a:lnTo>
+                  <a:lnTo>
+                    <a:pt x="351722" y="408342"/>
+                  </a:lnTo>
+                  <a:lnTo>
+                    <a:pt x="281377" y="406084"/>
+                  </a:lnTo>
+                  <a:lnTo>
+                    <a:pt x="211033" y="403813"/>
+                  </a:lnTo>
+                  <a:lnTo>
+                    <a:pt x="140688" y="401527"/>
+                  </a:lnTo>
+                  <a:lnTo>
+                    <a:pt x="70344" y="399228"/>
+                  </a:lnTo>
+                  <a:lnTo>
+                    <a:pt x="0" y="396915"/>
+                  </a:lnTo>
+                  <a:close/>
+                </a:path>
+              </a:pathLst>
+            </a:custGeom>
+            <a:solidFill>
+              <a:srgbClr val="FF8C00">
+                <a:alpha val="20000"/>
+              </a:srgbClr>
+            </a:solidFill>
+          </p:spPr>
+          <p:txBody>
+            <a:bodyPr/>
+            <a:lstStyle/>
+            <a:p/>
+          </p:txBody>
+        </p:sp>
+        <p:sp>
+          <p:nvSpPr>
+            <p:cNvPr id="71" name="pl71"/>
+            <p:cNvSpPr/>
+            <p:nvPr/>
+          </p:nvSpPr>
+          <p:spPr>
+            <a:xfrm>
+              <a:off x="1235312" y="4810673"/>
+              <a:ext cx="6964104" cy="570028"/>
+            </a:xfrm>
+            <a:custGeom>
+              <a:avLst/>
+              <a:pathLst>
+                <a:path w="6964104" h="570028">
+                  <a:moveTo>
+                    <a:pt x="0" y="0"/>
+                  </a:moveTo>
+                  <a:lnTo>
+                    <a:pt x="70344" y="17574"/>
+                  </a:lnTo>
+                  <a:lnTo>
+                    <a:pt x="140688" y="34754"/>
+                  </a:lnTo>
+                  <a:lnTo>
+                    <a:pt x="211033" y="51549"/>
+                  </a:lnTo>
+                  <a:lnTo>
+                    <a:pt x="281377" y="67966"/>
+                  </a:lnTo>
+                  <a:lnTo>
+                    <a:pt x="351722" y="84015"/>
+                  </a:lnTo>
+                  <a:lnTo>
+                    <a:pt x="422066" y="99704"/>
+                  </a:lnTo>
+                  <a:lnTo>
+                    <a:pt x="492411" y="115041"/>
+                  </a:lnTo>
+                  <a:lnTo>
+                    <a:pt x="562755" y="130033"/>
+                  </a:lnTo>
+                  <a:lnTo>
+                    <a:pt x="633100" y="144689"/>
+                  </a:lnTo>
+                  <a:lnTo>
+                    <a:pt x="703444" y="159016"/>
+                  </a:lnTo>
+                  <a:lnTo>
+                    <a:pt x="773789" y="173022"/>
+                  </a:lnTo>
+                  <a:lnTo>
+                    <a:pt x="844133" y="186713"/>
+                  </a:lnTo>
+                  <a:lnTo>
+                    <a:pt x="914478" y="200097"/>
+                  </a:lnTo>
+                  <a:lnTo>
+                    <a:pt x="984822" y="213180"/>
+                  </a:lnTo>
+                  <a:lnTo>
+                    <a:pt x="1055167" y="225970"/>
+                  </a:lnTo>
+                  <a:lnTo>
+                    <a:pt x="1125511" y="238473"/>
+                  </a:lnTo>
+                  <a:lnTo>
+                    <a:pt x="1195856" y="250695"/>
+                  </a:lnTo>
+                  <a:lnTo>
+                    <a:pt x="1266200" y="262642"/>
+                  </a:lnTo>
+                  <a:lnTo>
+                    <a:pt x="1336545" y="274322"/>
+                  </a:lnTo>
+                  <a:lnTo>
+                    <a:pt x="1406889" y="285739"/>
+                  </a:lnTo>
+                  <a:lnTo>
+                    <a:pt x="1477234" y="296901"/>
+                  </a:lnTo>
+                  <a:lnTo>
+                    <a:pt x="1547578" y="307811"/>
+                  </a:lnTo>
+                  <a:lnTo>
+                    <a:pt x="1617923" y="318477"/>
+                  </a:lnTo>
+                  <a:lnTo>
+                    <a:pt x="1688267" y="328903"/>
+                  </a:lnTo>
+                  <a:lnTo>
+                    <a:pt x="1758612" y="339096"/>
+                  </a:lnTo>
+                  <a:lnTo>
+                    <a:pt x="1828956" y="349059"/>
+                  </a:lnTo>
+                  <a:lnTo>
+                    <a:pt x="1899301" y="358799"/>
+                  </a:lnTo>
+                  <a:lnTo>
+                    <a:pt x="1969645" y="368321"/>
+                  </a:lnTo>
+                  <a:lnTo>
+                    <a:pt x="2039990" y="377628"/>
+                  </a:lnTo>
+                  <a:lnTo>
+                    <a:pt x="2110334" y="386727"/>
+                  </a:lnTo>
+                  <a:lnTo>
+                    <a:pt x="2180679" y="395622"/>
+                  </a:lnTo>
+                  <a:lnTo>
+                    <a:pt x="2251023" y="404317"/>
+                  </a:lnTo>
+                  <a:lnTo>
+                    <a:pt x="2321368" y="412816"/>
+                  </a:lnTo>
+                  <a:lnTo>
+                    <a:pt x="2391712" y="421125"/>
+                  </a:lnTo>
+                  <a:lnTo>
+                    <a:pt x="2462057" y="429248"/>
+                  </a:lnTo>
+                  <a:lnTo>
+                    <a:pt x="2532401" y="437188"/>
+                  </a:lnTo>
+                  <a:lnTo>
+                    <a:pt x="2602746" y="444950"/>
+                  </a:lnTo>
+                  <a:lnTo>
+                    <a:pt x="2673090" y="452538"/>
+                  </a:lnTo>
+                  <a:lnTo>
+                    <a:pt x="2743435" y="459955"/>
+                  </a:lnTo>
+                  <a:lnTo>
+                    <a:pt x="2813779" y="467206"/>
+                  </a:lnTo>
+                  <a:lnTo>
+                    <a:pt x="2884124" y="474294"/>
+                  </a:lnTo>
+                  <a:lnTo>
+                    <a:pt x="2954468" y="481224"/>
+                  </a:lnTo>
+                  <a:lnTo>
+                    <a:pt x="3024813" y="484828"/>
+                  </a:lnTo>
+                  <a:lnTo>
+                    <a:pt x="3095157" y="486615"/>
+                  </a:lnTo>
+                  <a:lnTo>
+                    <a:pt x="3165502" y="488390"/>
+                  </a:lnTo>
+                  <a:lnTo>
+                    <a:pt x="3235846" y="490155"/>
+                  </a:lnTo>
+                  <a:lnTo>
+                    <a:pt x="3306191" y="491910"/>
+                  </a:lnTo>
+                  <a:lnTo>
+                    <a:pt x="3376535" y="493654"/>
+                  </a:lnTo>
+                  <a:lnTo>
+                    <a:pt x="3446880" y="495387"/>
+                  </a:lnTo>
+                  <a:lnTo>
+                    <a:pt x="3517224" y="497110"/>
+                  </a:lnTo>
+                  <a:lnTo>
+                    <a:pt x="3587569" y="498823"/>
+                  </a:lnTo>
+                  <a:lnTo>
+                    <a:pt x="3657913" y="500526"/>
+                  </a:lnTo>
+                  <a:lnTo>
+                    <a:pt x="3728257" y="502218"/>
+                  </a:lnTo>
+                  <a:lnTo>
+                    <a:pt x="3798602" y="503900"/>
+                  </a:lnTo>
+                  <a:lnTo>
+                    <a:pt x="3868946" y="505572"/>
+                  </a:lnTo>
+                  <a:lnTo>
+                    <a:pt x="3939291" y="507234"/>
+                  </a:lnTo>
+                  <a:lnTo>
+                    <a:pt x="4009635" y="508886"/>
+                  </a:lnTo>
+                  <a:lnTo>
+                    <a:pt x="4079980" y="510529"/>
+                  </a:lnTo>
+                  <a:lnTo>
+                    <a:pt x="4150324" y="512161"/>
+                  </a:lnTo>
+                  <a:lnTo>
+                    <a:pt x="4220669" y="513784"/>
+                  </a:lnTo>
+                  <a:lnTo>
+                    <a:pt x="4291013" y="515397"/>
+                  </a:lnTo>
+                  <a:lnTo>
+                    <a:pt x="4361358" y="517000"/>
+                  </a:lnTo>
+                  <a:lnTo>
+                    <a:pt x="4431702" y="518593"/>
+                  </a:lnTo>
+                  <a:lnTo>
+                    <a:pt x="4502047" y="520178"/>
+                  </a:lnTo>
+                  <a:lnTo>
+                    <a:pt x="4572391" y="521752"/>
+                  </a:lnTo>
+                  <a:lnTo>
+                    <a:pt x="4642736" y="523317"/>
+                  </a:lnTo>
+                  <a:lnTo>
+                    <a:pt x="4713080" y="524873"/>
+                  </a:lnTo>
+                  <a:lnTo>
+                    <a:pt x="4783425" y="526420"/>
+                  </a:lnTo>
+                  <a:lnTo>
+                    <a:pt x="4853769" y="527957"/>
+                  </a:lnTo>
+                  <a:lnTo>
+                    <a:pt x="4924114" y="529485"/>
+                  </a:lnTo>
+                  <a:lnTo>
+                    <a:pt x="4994458" y="531004"/>
+                  </a:lnTo>
+                  <a:lnTo>
+                    <a:pt x="5064803" y="532513"/>
+                  </a:lnTo>
+                  <a:lnTo>
+                    <a:pt x="5135147" y="534014"/>
+                  </a:lnTo>
+                  <a:lnTo>
+                    <a:pt x="5205492" y="535506"/>
+                  </a:lnTo>
+                  <a:lnTo>
+                    <a:pt x="5275836" y="536988"/>
+                  </a:lnTo>
+                  <a:lnTo>
+                    <a:pt x="5346181" y="538462"/>
+                  </a:lnTo>
+                  <a:lnTo>
+                    <a:pt x="5416525" y="539927"/>
+                  </a:lnTo>
+                  <a:lnTo>
+                    <a:pt x="5486870" y="541384"/>
+                  </a:lnTo>
+                  <a:lnTo>
+                    <a:pt x="5557214" y="542831"/>
+                  </a:lnTo>
+                  <a:lnTo>
+                    <a:pt x="5627559" y="544270"/>
+                  </a:lnTo>
+                  <a:lnTo>
+                    <a:pt x="5697903" y="545700"/>
+                  </a:lnTo>
+                  <a:lnTo>
+                    <a:pt x="5768248" y="547122"/>
+                  </a:lnTo>
+                  <a:lnTo>
+                    <a:pt x="5838592" y="548535"/>
+                  </a:lnTo>
+                  <a:lnTo>
+                    <a:pt x="5908937" y="549940"/>
+                  </a:lnTo>
+                  <a:lnTo>
+                    <a:pt x="5979281" y="551336"/>
+                  </a:lnTo>
+                  <a:lnTo>
+                    <a:pt x="6049626" y="552724"/>
+                  </a:lnTo>
+                  <a:lnTo>
+                    <a:pt x="6119970" y="554104"/>
+                  </a:lnTo>
+                  <a:lnTo>
+                    <a:pt x="6190315" y="555475"/>
+                  </a:lnTo>
+                  <a:lnTo>
+                    <a:pt x="6260659" y="556838"/>
+                  </a:lnTo>
+                  <a:lnTo>
+                    <a:pt x="6331004" y="558193"/>
+                  </a:lnTo>
+                  <a:lnTo>
+                    <a:pt x="6401348" y="559540"/>
+                  </a:lnTo>
+                  <a:lnTo>
+                    <a:pt x="6471693" y="560879"/>
+                  </a:lnTo>
+                  <a:lnTo>
+                    <a:pt x="6542037" y="562209"/>
+                  </a:lnTo>
+                  <a:lnTo>
+                    <a:pt x="6612382" y="563532"/>
+                  </a:lnTo>
+                  <a:lnTo>
+                    <a:pt x="6682726" y="564847"/>
+                  </a:lnTo>
+                  <a:lnTo>
+                    <a:pt x="6753071" y="566154"/>
+                  </a:lnTo>
+                  <a:lnTo>
+                    <a:pt x="6823415" y="567453"/>
+                  </a:lnTo>
+                  <a:lnTo>
+                    <a:pt x="6893760" y="568745"/>
+                  </a:lnTo>
+                  <a:lnTo>
+                    <a:pt x="6964104" y="570028"/>
+                  </a:lnTo>
+                </a:path>
+              </a:pathLst>
+            </a:custGeom>
+          </p:spPr>
+          <p:txBody>
+            <a:bodyPr/>
+            <a:lstStyle/>
+            <a:p/>
+          </p:txBody>
+        </p:sp>
+        <p:sp>
+          <p:nvSpPr>
+            <p:cNvPr id="72" name="pl72"/>
+            <p:cNvSpPr/>
+            <p:nvPr/>
+          </p:nvSpPr>
+          <p:spPr>
+            <a:xfrm>
+              <a:off x="1235312" y="5207588"/>
+              <a:ext cx="6964104" cy="303349"/>
+            </a:xfrm>
+            <a:custGeom>
+              <a:avLst/>
+              <a:pathLst>
+                <a:path w="6964104" h="303349">
+                  <a:moveTo>
+                    <a:pt x="6964104" y="303349"/>
+                  </a:moveTo>
+                  <a:lnTo>
+                    <a:pt x="6893760" y="301449"/>
+                  </a:lnTo>
+                  <a:lnTo>
+                    <a:pt x="6823415" y="299506"/>
+                  </a:lnTo>
+                  <a:lnTo>
+                    <a:pt x="6753071" y="297518"/>
+                  </a:lnTo>
+                  <a:lnTo>
+                    <a:pt x="6682726" y="295484"/>
+                  </a:lnTo>
+                  <a:lnTo>
+                    <a:pt x="6612382" y="293403"/>
+                  </a:lnTo>
+                  <a:lnTo>
+                    <a:pt x="6542037" y="291275"/>
+                  </a:lnTo>
+                  <a:lnTo>
+                    <a:pt x="6471693" y="289098"/>
+                  </a:lnTo>
+                  <a:lnTo>
+                    <a:pt x="6401348" y="286871"/>
+                  </a:lnTo>
+                  <a:lnTo>
+                    <a:pt x="6331004" y="284593"/>
+                  </a:lnTo>
+                  <a:lnTo>
+                    <a:pt x="6260659" y="282262"/>
+                  </a:lnTo>
+                  <a:lnTo>
+                    <a:pt x="6190315" y="279878"/>
+                  </a:lnTo>
+                  <a:lnTo>
+                    <a:pt x="6119970" y="277439"/>
+                  </a:lnTo>
+                  <a:lnTo>
+                    <a:pt x="6049626" y="274944"/>
+                  </a:lnTo>
+                  <a:lnTo>
+                    <a:pt x="5979281" y="272392"/>
+                  </a:lnTo>
+                  <a:lnTo>
+                    <a:pt x="5908937" y="269782"/>
+                  </a:lnTo>
+                  <a:lnTo>
+                    <a:pt x="5838592" y="267111"/>
+                  </a:lnTo>
+                  <a:lnTo>
+                    <a:pt x="5768248" y="264379"/>
+                  </a:lnTo>
+                  <a:lnTo>
+                    <a:pt x="5697903" y="261584"/>
+                  </a:lnTo>
+                  <a:lnTo>
+                    <a:pt x="5627559" y="258726"/>
+                  </a:lnTo>
+                  <a:lnTo>
+                    <a:pt x="5557214" y="255801"/>
+                  </a:lnTo>
+                  <a:lnTo>
+                    <a:pt x="5486870" y="252809"/>
+                  </a:lnTo>
+                  <a:lnTo>
+                    <a:pt x="5416525" y="249749"/>
+                  </a:lnTo>
+                  <a:lnTo>
+                    <a:pt x="5346181" y="246619"/>
+                  </a:lnTo>
+                  <a:lnTo>
+                    <a:pt x="5275836" y="243416"/>
+                  </a:lnTo>
+                  <a:lnTo>
+                    <a:pt x="5205492" y="240140"/>
+                  </a:lnTo>
+                  <a:lnTo>
+                    <a:pt x="5135147" y="236789"/>
+                  </a:lnTo>
+                  <a:lnTo>
+                    <a:pt x="5064803" y="233361"/>
+                  </a:lnTo>
+                  <a:lnTo>
+                    <a:pt x="4994458" y="229854"/>
+                  </a:lnTo>
+                  <a:lnTo>
+                    <a:pt x="4924114" y="226267"/>
+                  </a:lnTo>
+                  <a:lnTo>
+                    <a:pt x="4853769" y="222597"/>
+                  </a:lnTo>
+                  <a:lnTo>
+                    <a:pt x="4783425" y="218843"/>
+                  </a:lnTo>
+                  <a:lnTo>
+                    <a:pt x="4713080" y="215003"/>
+                  </a:lnTo>
+                  <a:lnTo>
+                    <a:pt x="4642736" y="211074"/>
+                  </a:lnTo>
+                  <a:lnTo>
+                    <a:pt x="4572391" y="207056"/>
+                  </a:lnTo>
+                  <a:lnTo>
+                    <a:pt x="4502047" y="202945"/>
+                  </a:lnTo>
+                  <a:lnTo>
+                    <a:pt x="4431702" y="198740"/>
+                  </a:lnTo>
+                  <a:lnTo>
+                    <a:pt x="4361358" y="194438"/>
+                  </a:lnTo>
+                  <a:lnTo>
+                    <a:pt x="4291013" y="190037"/>
+                  </a:lnTo>
+                  <a:lnTo>
+                    <a:pt x="4220669" y="185536"/>
+                  </a:lnTo>
+                  <a:lnTo>
+                    <a:pt x="4150324" y="180931"/>
+                  </a:lnTo>
+                  <a:lnTo>
+                    <a:pt x="4079980" y="176220"/>
+                  </a:lnTo>
+                  <a:lnTo>
+                    <a:pt x="4009635" y="171402"/>
+                  </a:lnTo>
+                  <a:lnTo>
+                    <a:pt x="3939291" y="166472"/>
+                  </a:lnTo>
+                  <a:lnTo>
+                    <a:pt x="3868946" y="161429"/>
+                  </a:lnTo>
+                  <a:lnTo>
+                    <a:pt x="3798602" y="156271"/>
+                  </a:lnTo>
+                  <a:lnTo>
+                    <a:pt x="3728257" y="150994"/>
+                  </a:lnTo>
+                  <a:lnTo>
+                    <a:pt x="3657913" y="145596"/>
+                  </a:lnTo>
+                  <a:lnTo>
+                    <a:pt x="3587569" y="140074"/>
+                  </a:lnTo>
+                  <a:lnTo>
+                    <a:pt x="3517224" y="134426"/>
+                  </a:lnTo>
+                  <a:lnTo>
+                    <a:pt x="3446880" y="128647"/>
+                  </a:lnTo>
+                  <a:lnTo>
+                    <a:pt x="3376535" y="122736"/>
+                  </a:lnTo>
+                  <a:lnTo>
+                    <a:pt x="3306191" y="116689"/>
+                  </a:lnTo>
+                  <a:lnTo>
+                    <a:pt x="3235846" y="110504"/>
+                  </a:lnTo>
+                  <a:lnTo>
+                    <a:pt x="3165502" y="104176"/>
+                  </a:lnTo>
+                  <a:lnTo>
+                    <a:pt x="3095157" y="97703"/>
+                  </a:lnTo>
+                  <a:lnTo>
+                    <a:pt x="3024813" y="91081"/>
+                  </a:lnTo>
+                  <a:lnTo>
+                    <a:pt x="2954468" y="86116"/>
+                  </a:lnTo>
+                  <a:lnTo>
+                    <a:pt x="2884124" y="84308"/>
+                  </a:lnTo>
+                  <a:lnTo>
+                    <a:pt x="2813779" y="82489"/>
+                  </a:lnTo>
+                  <a:lnTo>
+                    <a:pt x="2743435" y="80659"/>
+                  </a:lnTo>
+                  <a:lnTo>
+                    <a:pt x="2673090" y="78818"/>
+                  </a:lnTo>
+                  <a:lnTo>
+                    <a:pt x="2602746" y="76966"/>
+                  </a:lnTo>
+                  <a:lnTo>
+                    <a:pt x="2532401" y="75103"/>
+                  </a:lnTo>
+                  <a:lnTo>
+                    <a:pt x="2462057" y="73229"/>
+                  </a:lnTo>
+                  <a:lnTo>
+                    <a:pt x="2391712" y="71343"/>
+                  </a:lnTo>
+                  <a:lnTo>
+                    <a:pt x="2321368" y="69446"/>
+                  </a:lnTo>
+                  <a:lnTo>
+                    <a:pt x="2251023" y="67538"/>
+                  </a:lnTo>
+                  <a:lnTo>
+                    <a:pt x="2180679" y="65618"/>
+                  </a:lnTo>
+                  <a:lnTo>
+                    <a:pt x="2110334" y="63686"/>
+                  </a:lnTo>
+                  <a:lnTo>
+                    <a:pt x="2039990" y="61743"/>
+                  </a:lnTo>
+                  <a:lnTo>
+                    <a:pt x="1969645" y="59788"/>
+                  </a:lnTo>
+                  <a:lnTo>
+                    <a:pt x="1899301" y="57822"/>
+                  </a:lnTo>
+                  <a:lnTo>
+                    <a:pt x="1828956" y="55843"/>
+                  </a:lnTo>
+                  <a:lnTo>
+                    <a:pt x="1758612" y="53853"/>
+                  </a:lnTo>
+                  <a:lnTo>
+                    <a:pt x="1688267" y="51850"/>
+                  </a:lnTo>
+                  <a:lnTo>
+                    <a:pt x="1617923" y="49836"/>
+                  </a:lnTo>
+                  <a:lnTo>
+                    <a:pt x="1547578" y="47809"/>
+                  </a:lnTo>
+                  <a:lnTo>
+                    <a:pt x="1477234" y="45771"/>
+                  </a:lnTo>
+                  <a:lnTo>
+                    <a:pt x="1406889" y="43719"/>
+                  </a:lnTo>
+                  <a:lnTo>
+                    <a:pt x="1336545" y="41656"/>
+                  </a:lnTo>
+                  <a:lnTo>
+                    <a:pt x="1266200" y="39580"/>
+                  </a:lnTo>
+                  <a:lnTo>
+                    <a:pt x="1195856" y="37492"/>
+                  </a:lnTo>
+                  <a:lnTo>
+                    <a:pt x="1125511" y="35391"/>
+                  </a:lnTo>
+                  <a:lnTo>
+                    <a:pt x="1055167" y="33277"/>
+                  </a:lnTo>
+                  <a:lnTo>
+                    <a:pt x="984822" y="31151"/>
+                  </a:lnTo>
+                  <a:lnTo>
+                    <a:pt x="914478" y="29011"/>
+                  </a:lnTo>
+                  <a:lnTo>
+                    <a:pt x="844133" y="26859"/>
+                  </a:lnTo>
+                  <a:lnTo>
+                    <a:pt x="773789" y="24694"/>
+                  </a:lnTo>
+                  <a:lnTo>
+                    <a:pt x="703444" y="22516"/>
+                  </a:lnTo>
+                  <a:lnTo>
+                    <a:pt x="633100" y="20325"/>
+                  </a:lnTo>
+                  <a:lnTo>
+                    <a:pt x="562755" y="18120"/>
+                  </a:lnTo>
+                  <a:lnTo>
+                    <a:pt x="492411" y="15903"/>
+                  </a:lnTo>
+                  <a:lnTo>
+                    <a:pt x="422066" y="13671"/>
+                  </a:lnTo>
+                  <a:lnTo>
+                    <a:pt x="351722" y="11427"/>
+                  </a:lnTo>
+                  <a:lnTo>
+                    <a:pt x="281377" y="9169"/>
+                  </a:lnTo>
+                  <a:lnTo>
+                    <a:pt x="211033" y="6897"/>
+                  </a:lnTo>
+                  <a:lnTo>
+                    <a:pt x="140688" y="4612"/>
+                  </a:lnTo>
+                  <a:lnTo>
+                    <a:pt x="70344" y="2313"/>
+                  </a:lnTo>
+                  <a:lnTo>
+                    <a:pt x="0" y="0"/>
+                  </a:lnTo>
+                </a:path>
+              </a:pathLst>
+            </a:custGeom>
+          </p:spPr>
+          <p:txBody>
+            <a:bodyPr/>
+            <a:lstStyle/>
+            <a:p/>
+          </p:txBody>
+        </p:sp>
+        <p:sp>
+          <p:nvSpPr>
+            <p:cNvPr id="73" name="pl73"/>
+            <p:cNvSpPr/>
+            <p:nvPr/>
+          </p:nvSpPr>
+          <p:spPr>
+            <a:xfrm>
+              <a:off x="1235312" y="5043850"/>
+              <a:ext cx="6964104" cy="417080"/>
+            </a:xfrm>
+            <a:custGeom>
+              <a:avLst/>
+              <a:pathLst>
+                <a:path w="6964104" h="417080">
+                  <a:moveTo>
+                    <a:pt x="0" y="0"/>
+                  </a:moveTo>
+                  <a:lnTo>
+                    <a:pt x="70344" y="7836"/>
+                  </a:lnTo>
+                  <a:lnTo>
+                    <a:pt x="140688" y="15560"/>
+                  </a:lnTo>
+                  <a:lnTo>
+                    <a:pt x="211033" y="23175"/>
+                  </a:lnTo>
+                  <a:lnTo>
+                    <a:pt x="281377" y="30681"/>
+                  </a:lnTo>
+                  <a:lnTo>
+                    <a:pt x="351722" y="38080"/>
+                  </a:lnTo>
+                  <a:lnTo>
+                    <a:pt x="422066" y="45374"/>
+                  </a:lnTo>
+                  <a:lnTo>
+                    <a:pt x="492411" y="52563"/>
+                  </a:lnTo>
+                  <a:lnTo>
+                    <a:pt x="562755" y="59650"/>
+                  </a:lnTo>
+                  <a:lnTo>
+                    <a:pt x="633100" y="66637"/>
+                  </a:lnTo>
+                  <a:lnTo>
+                    <a:pt x="703444" y="73523"/>
+                  </a:lnTo>
+                  <a:lnTo>
+                    <a:pt x="773789" y="80312"/>
+                  </a:lnTo>
+                  <a:lnTo>
+                    <a:pt x="844133" y="87003"/>
+                  </a:lnTo>
+                  <a:lnTo>
+                    <a:pt x="914478" y="93600"/>
+                  </a:lnTo>
+                  <a:lnTo>
+                    <a:pt x="984822" y="100102"/>
+                  </a:lnTo>
+                  <a:lnTo>
+                    <a:pt x="1055167" y="106512"/>
+                  </a:lnTo>
+                  <a:lnTo>
+                    <a:pt x="1125511" y="112830"/>
+                  </a:lnTo>
+                  <a:lnTo>
+                    <a:pt x="1195856" y="119058"/>
+                  </a:lnTo>
+                  <a:lnTo>
+                    <a:pt x="1266200" y="125198"/>
+                  </a:lnTo>
+                  <a:lnTo>
+                    <a:pt x="1336545" y="131250"/>
+                  </a:lnTo>
+                  <a:lnTo>
+                    <a:pt x="1406889" y="137215"/>
+                  </a:lnTo>
+                  <a:lnTo>
+                    <a:pt x="1477234" y="143096"/>
+                  </a:lnTo>
+                  <a:lnTo>
+                    <a:pt x="1547578" y="148893"/>
+                  </a:lnTo>
+                  <a:lnTo>
+                    <a:pt x="1617923" y="154607"/>
+                  </a:lnTo>
+                  <a:lnTo>
+                    <a:pt x="1688267" y="160240"/>
+                  </a:lnTo>
+                  <a:lnTo>
+                    <a:pt x="1758612" y="165793"/>
+                  </a:lnTo>
+                  <a:lnTo>
+                    <a:pt x="1828956" y="171266"/>
+                  </a:lnTo>
+                  <a:lnTo>
+                    <a:pt x="1899301" y="176662"/>
+                  </a:lnTo>
+                  <a:lnTo>
+                    <a:pt x="1969645" y="181980"/>
+                  </a:lnTo>
+                  <a:lnTo>
+                    <a:pt x="2039990" y="187223"/>
+                  </a:lnTo>
+                  <a:lnTo>
+                    <a:pt x="2110334" y="192391"/>
+                  </a:lnTo>
+                  <a:lnTo>
+                    <a:pt x="2180679" y="197485"/>
+                  </a:lnTo>
+                  <a:lnTo>
+                    <a:pt x="2251023" y="202507"/>
+                  </a:lnTo>
+                  <a:lnTo>
+                    <a:pt x="2321368" y="207457"/>
+                  </a:lnTo>
+                  <a:lnTo>
+                    <a:pt x="2391712" y="212337"/>
+                  </a:lnTo>
+                  <a:lnTo>
+                    <a:pt x="2462057" y="217147"/>
+                  </a:lnTo>
+                  <a:lnTo>
+                    <a:pt x="2532401" y="221888"/>
+                  </a:lnTo>
+                  <a:lnTo>
+                    <a:pt x="2602746" y="226562"/>
+                  </a:lnTo>
+                  <a:lnTo>
+                    <a:pt x="2673090" y="231169"/>
+                  </a:lnTo>
+                  <a:lnTo>
+                    <a:pt x="2743435" y="235711"/>
+                  </a:lnTo>
+                  <a:lnTo>
+                    <a:pt x="2813779" y="240188"/>
+                  </a:lnTo>
+                  <a:lnTo>
+                    <a:pt x="2884124" y="244601"/>
+                  </a:lnTo>
+                  <a:lnTo>
+                    <a:pt x="2954468" y="248951"/>
+                  </a:lnTo>
+                  <a:lnTo>
+                    <a:pt x="3024813" y="253240"/>
+                  </a:lnTo>
+                  <a:lnTo>
+                    <a:pt x="3095157" y="257467"/>
+                  </a:lnTo>
+                  <a:lnTo>
+                    <a:pt x="3165502" y="261634"/>
+                  </a:lnTo>
+                  <a:lnTo>
+                    <a:pt x="3235846" y="265741"/>
+                  </a:lnTo>
+                  <a:lnTo>
+                    <a:pt x="3306191" y="269790"/>
+                  </a:lnTo>
+                  <a:lnTo>
+                    <a:pt x="3376535" y="273781"/>
+                  </a:lnTo>
+                  <a:lnTo>
+                    <a:pt x="3446880" y="277716"/>
+                  </a:lnTo>
+                  <a:lnTo>
+                    <a:pt x="3517224" y="281594"/>
+                  </a:lnTo>
+                  <a:lnTo>
+                    <a:pt x="3587569" y="285417"/>
+                  </a:lnTo>
+                  <a:lnTo>
+                    <a:pt x="3657913" y="289186"/>
+                  </a:lnTo>
+                  <a:lnTo>
+                    <a:pt x="3728257" y="292900"/>
+                  </a:lnTo>
+                  <a:lnTo>
+                    <a:pt x="3798602" y="296562"/>
+                  </a:lnTo>
+                  <a:lnTo>
+                    <a:pt x="3868946" y="300172"/>
+                  </a:lnTo>
+                  <a:lnTo>
+                    <a:pt x="3939291" y="303730"/>
+                  </a:lnTo>
+                  <a:lnTo>
+                    <a:pt x="4009635" y="307238"/>
+                  </a:lnTo>
+                  <a:lnTo>
+                    <a:pt x="4079980" y="310695"/>
+                  </a:lnTo>
+                  <a:lnTo>
+                    <a:pt x="4150324" y="314103"/>
+                  </a:lnTo>
+                  <a:lnTo>
+                    <a:pt x="4220669" y="317463"/>
+                  </a:lnTo>
+                  <a:lnTo>
+                    <a:pt x="4291013" y="320775"/>
+                  </a:lnTo>
+                  <a:lnTo>
+                    <a:pt x="4361358" y="324040"/>
+                  </a:lnTo>
+                  <a:lnTo>
+                    <a:pt x="4431702" y="327258"/>
+                  </a:lnTo>
+                  <a:lnTo>
+                    <a:pt x="4502047" y="330430"/>
+                  </a:lnTo>
+                  <a:lnTo>
+                    <a:pt x="4572391" y="333557"/>
+                  </a:lnTo>
+                  <a:lnTo>
+                    <a:pt x="4642736" y="336639"/>
+                  </a:lnTo>
+                  <a:lnTo>
+                    <a:pt x="4713080" y="339678"/>
+                  </a:lnTo>
+                  <a:lnTo>
+                    <a:pt x="4783425" y="342673"/>
+                  </a:lnTo>
+                  <a:lnTo>
+                    <a:pt x="4853769" y="345625"/>
+                  </a:lnTo>
+                  <a:lnTo>
+                    <a:pt x="4924114" y="348536"/>
+                  </a:lnTo>
+                  <a:lnTo>
+                    <a:pt x="4994458" y="351405"/>
+                  </a:lnTo>
+                  <a:lnTo>
+                    <a:pt x="5064803" y="354233"/>
+                  </a:lnTo>
+                  <a:lnTo>
+                    <a:pt x="5135147" y="357021"/>
+                  </a:lnTo>
+                  <a:lnTo>
+                    <a:pt x="5205492" y="359769"/>
+                  </a:lnTo>
+                  <a:lnTo>
+                    <a:pt x="5275836" y="362477"/>
+                  </a:lnTo>
+                  <a:lnTo>
+                    <a:pt x="5346181" y="365148"/>
+                  </a:lnTo>
+                  <a:lnTo>
+                    <a:pt x="5416525" y="367780"/>
+                  </a:lnTo>
+                  <a:lnTo>
+                    <a:pt x="5486870" y="370375"/>
+                  </a:lnTo>
+                  <a:lnTo>
+                    <a:pt x="5557214" y="372932"/>
+                  </a:lnTo>
+                  <a:lnTo>
+                    <a:pt x="5627559" y="375454"/>
+                  </a:lnTo>
+                  <a:lnTo>
+                    <a:pt x="5697903" y="377939"/>
+                  </a:lnTo>
+                  <a:lnTo>
+                    <a:pt x="5768248" y="380389"/>
+                  </a:lnTo>
+                  <a:lnTo>
+                    <a:pt x="5838592" y="382804"/>
+                  </a:lnTo>
+                  <a:lnTo>
+                    <a:pt x="5908937" y="385184"/>
+                  </a:lnTo>
+                  <a:lnTo>
+                    <a:pt x="5979281" y="387531"/>
+                  </a:lnTo>
+                  <a:lnTo>
+                    <a:pt x="6049626" y="389844"/>
+                  </a:lnTo>
+                  <a:lnTo>
+                    <a:pt x="6119970" y="392124"/>
+                  </a:lnTo>
+                  <a:lnTo>
+                    <a:pt x="6190315" y="394372"/>
+                  </a:lnTo>
+                  <a:lnTo>
+                    <a:pt x="6260659" y="396588"/>
+                  </a:lnTo>
+                  <a:lnTo>
+                    <a:pt x="6331004" y="398772"/>
+                  </a:lnTo>
+                  <a:lnTo>
+                    <a:pt x="6401348" y="400925"/>
+                  </a:lnTo>
+                  <a:lnTo>
+                    <a:pt x="6471693" y="403047"/>
+                  </a:lnTo>
+                  <a:lnTo>
+                    <a:pt x="6542037" y="405139"/>
+                  </a:lnTo>
+                  <a:lnTo>
+                    <a:pt x="6612382" y="407201"/>
+                  </a:lnTo>
+                  <a:lnTo>
+                    <a:pt x="6682726" y="409234"/>
+                  </a:lnTo>
+                  <a:lnTo>
+                    <a:pt x="6753071" y="411238"/>
+                  </a:lnTo>
+                  <a:lnTo>
+                    <a:pt x="6823415" y="413213"/>
+                  </a:lnTo>
+                  <a:lnTo>
+                    <a:pt x="6893760" y="415161"/>
+                  </a:lnTo>
+                  <a:lnTo>
+                    <a:pt x="6964104" y="417080"/>
+                  </a:lnTo>
+                </a:path>
+              </a:pathLst>
+            </a:custGeom>
+            <a:ln w="27101" cap="flat">
+              <a:solidFill>
+                <a:srgbClr val="FF8C00">
+                  <a:alpha val="100000"/>
+                </a:srgbClr>
+              </a:solidFill>
+              <a:prstDash val="solid"/>
+              <a:round/>
+            </a:ln>
+          </p:spPr>
+          <p:txBody>
+            <a:bodyPr/>
+            <a:lstStyle/>
+            <a:p/>
+          </p:txBody>
+        </p:sp>
+        <p:sp>
+          <p:nvSpPr>
+            <p:cNvPr id="74" name="pl74"/>
+            <p:cNvSpPr/>
+            <p:nvPr/>
+          </p:nvSpPr>
+          <p:spPr>
+            <a:xfrm>
+              <a:off x="887106" y="5294352"/>
+              <a:ext cx="7660515" cy="0"/>
+            </a:xfrm>
+            <a:custGeom>
+              <a:avLst/>
+              <a:pathLst>
+                <a:path w="7660515" h="0">
+                  <a:moveTo>
+                    <a:pt x="0" y="0"/>
+                  </a:moveTo>
+                  <a:lnTo>
+                    <a:pt x="7660515" y="0"/>
+                  </a:lnTo>
+                  <a:lnTo>
+                    <a:pt x="7660515" y="0"/>
+                  </a:lnTo>
+                </a:path>
+              </a:pathLst>
+            </a:custGeom>
+            <a:ln w="13550" cap="flat">
+              <a:solidFill>
+                <a:srgbClr val="7F7F7F">
+                  <a:alpha val="100000"/>
+                </a:srgbClr>
+              </a:solidFill>
+              <a:prstDash val="dash"/>
+              <a:round/>
+            </a:ln>
+          </p:spPr>
+          <p:txBody>
+            <a:bodyPr/>
+            <a:lstStyle/>
+            <a:p/>
+          </p:txBody>
+        </p:sp>
+        <p:sp>
+          <p:nvSpPr>
+            <p:cNvPr id="75" name="pl75"/>
+            <p:cNvSpPr/>
+            <p:nvPr/>
+          </p:nvSpPr>
+          <p:spPr>
+            <a:xfrm>
+              <a:off x="4215100" y="4336484"/>
+              <a:ext cx="0" cy="1317069"/>
+            </a:xfrm>
+            <a:custGeom>
+              <a:avLst/>
+              <a:pathLst>
+                <a:path w="0" h="1317069">
+                  <a:moveTo>
+                    <a:pt x="0" y="1317069"/>
+                  </a:moveTo>
+                  <a:lnTo>
+                    <a:pt x="0" y="0"/>
+                  </a:lnTo>
+                  <a:lnTo>
+                    <a:pt x="0" y="0"/>
+                  </a:lnTo>
+                </a:path>
+              </a:pathLst>
+            </a:custGeom>
+            <a:ln w="13550" cap="flat">
+              <a:solidFill>
+                <a:srgbClr val="666666">
+                  <a:alpha val="100000"/>
+                </a:srgbClr>
+              </a:solidFill>
+              <a:prstDash val="dot"/>
+              <a:round/>
+            </a:ln>
+          </p:spPr>
+          <p:txBody>
+            <a:bodyPr/>
+            <a:lstStyle/>
+            <a:p/>
+          </p:txBody>
+        </p:sp>
+        <p:sp>
+          <p:nvSpPr>
+            <p:cNvPr id="76" name="pl76"/>
+            <p:cNvSpPr/>
+            <p:nvPr/>
+          </p:nvSpPr>
+          <p:spPr>
+            <a:xfrm>
+              <a:off x="3046793" y="4336484"/>
+              <a:ext cx="0" cy="1317069"/>
+            </a:xfrm>
+            <a:custGeom>
+              <a:avLst/>
+              <a:pathLst>
+                <a:path w="0" h="1317069">
+                  <a:moveTo>
+                    <a:pt x="0" y="1317069"/>
+                  </a:moveTo>
+                  <a:lnTo>
+                    <a:pt x="0" y="0"/>
+                  </a:lnTo>
+                  <a:lnTo>
+                    <a:pt x="0" y="0"/>
+                  </a:lnTo>
+                </a:path>
+              </a:pathLst>
+            </a:custGeom>
+            <a:ln w="13550" cap="flat">
+              <a:solidFill>
+                <a:srgbClr val="4682B4">
+                  <a:alpha val="69803"/>
+                </a:srgbClr>
+              </a:solidFill>
+              <a:prstDash val="dash"/>
+              <a:round/>
+            </a:ln>
+          </p:spPr>
+          <p:txBody>
+            <a:bodyPr/>
+            <a:lstStyle/>
+            <a:p/>
+          </p:txBody>
+        </p:sp>
+        <p:sp>
+          <p:nvSpPr>
+            <p:cNvPr id="77" name="pl77"/>
+            <p:cNvSpPr/>
+            <p:nvPr/>
+          </p:nvSpPr>
+          <p:spPr>
+            <a:xfrm>
+              <a:off x="5409191" y="4336484"/>
+              <a:ext cx="0" cy="1317069"/>
+            </a:xfrm>
+            <a:custGeom>
+              <a:avLst/>
+              <a:pathLst>
+                <a:path w="0" h="1317069">
+                  <a:moveTo>
+                    <a:pt x="0" y="1317069"/>
+                  </a:moveTo>
+                  <a:lnTo>
+                    <a:pt x="0" y="0"/>
+                  </a:lnTo>
+                  <a:lnTo>
+                    <a:pt x="0" y="0"/>
+                  </a:lnTo>
+                </a:path>
+              </a:pathLst>
+            </a:custGeom>
+            <a:ln w="13550" cap="flat">
+              <a:solidFill>
+                <a:srgbClr val="4682B4">
+                  <a:alpha val="69803"/>
+                </a:srgbClr>
+              </a:solidFill>
+              <a:prstDash val="dash"/>
+              <a:round/>
+            </a:ln>
+          </p:spPr>
+          <p:txBody>
+            <a:bodyPr/>
+            <a:lstStyle/>
+            <a:p/>
+          </p:txBody>
+        </p:sp>
+        <p:sp>
+          <p:nvSpPr>
+            <p:cNvPr id="78" name="tx78"/>
+            <p:cNvSpPr/>
+            <p:nvPr/>
+          </p:nvSpPr>
+          <p:spPr>
+            <a:xfrm>
+              <a:off x="762297" y="5553636"/>
+              <a:ext cx="62179" cy="80101"/>
+            </a:xfrm>
+            <a:prstGeom prst="rect">
+              <a:avLst/>
+            </a:prstGeom>
+            <a:noFill/>
+          </p:spPr>
+          <p:txBody>
+            <a:bodyPr lIns="0" rIns="0" tIns="0" bIns="0" anchorCtr="1" anchor="ctr" wrap="none"/>
+            <a:lstStyle/>
+            <a:p>
+              <a:pPr algn="l" marL="0" marR="0" indent="0">
+                <a:lnSpc>
+                  <a:spcPts val="880"/>
+                </a:lnSpc>
+                <a:spcBef>
+                  <a:spcPts val="0"/>
+                </a:spcBef>
+                <a:spcAft>
+                  <a:spcPts val="0"/>
+                </a:spcAft>
+              </a:pPr>
+              <a:r>
+                <a:rPr sz="880">
+                  <a:solidFill>
+                    <a:srgbClr val="4D4D4D">
+                      <a:alpha val="100000"/>
+                    </a:srgbClr>
+                  </a:solidFill>
+                  <a:latin typeface="Helvetica"/>
+                  <a:cs typeface="Helvetica"/>
+                </a:rPr>
+                <a:t>0</a:t>
+              </a:r>
+            </a:p>
+          </p:txBody>
+        </p:sp>
+        <p:sp>
+          <p:nvSpPr>
+            <p:cNvPr id="79" name="tx79"/>
+            <p:cNvSpPr/>
+            <p:nvPr/>
+          </p:nvSpPr>
+          <p:spPr>
+            <a:xfrm>
+              <a:off x="762297" y="5254302"/>
+              <a:ext cx="62179" cy="80101"/>
+            </a:xfrm>
+            <a:prstGeom prst="rect">
+              <a:avLst/>
+            </a:prstGeom>
+            <a:noFill/>
+          </p:spPr>
+          <p:txBody>
+            <a:bodyPr lIns="0" rIns="0" tIns="0" bIns="0" anchorCtr="1" anchor="ctr" wrap="none"/>
+            <a:lstStyle/>
+            <a:p>
+              <a:pPr algn="l" marL="0" marR="0" indent="0">
+                <a:lnSpc>
+                  <a:spcPts val="880"/>
+                </a:lnSpc>
+                <a:spcBef>
+                  <a:spcPts val="0"/>
+                </a:spcBef>
+                <a:spcAft>
+                  <a:spcPts val="0"/>
+                </a:spcAft>
+              </a:pPr>
+              <a:r>
+                <a:rPr sz="880">
+                  <a:solidFill>
+                    <a:srgbClr val="4D4D4D">
+                      <a:alpha val="100000"/>
+                    </a:srgbClr>
+                  </a:solidFill>
+                  <a:latin typeface="Helvetica"/>
+                  <a:cs typeface="Helvetica"/>
+                </a:rPr>
+                <a:t>1</a:t>
+              </a:r>
+            </a:p>
+          </p:txBody>
+        </p:sp>
+        <p:sp>
+          <p:nvSpPr>
+            <p:cNvPr id="80" name="tx80"/>
+            <p:cNvSpPr/>
+            <p:nvPr/>
+          </p:nvSpPr>
+          <p:spPr>
+            <a:xfrm>
+              <a:off x="762297" y="4954968"/>
+              <a:ext cx="62179" cy="80101"/>
+            </a:xfrm>
+            <a:prstGeom prst="rect">
+              <a:avLst/>
+            </a:prstGeom>
+            <a:noFill/>
+          </p:spPr>
+          <p:txBody>
+            <a:bodyPr lIns="0" rIns="0" tIns="0" bIns="0" anchorCtr="1" anchor="ctr" wrap="none"/>
+            <a:lstStyle/>
+            <a:p>
+              <a:pPr algn="l" marL="0" marR="0" indent="0">
+                <a:lnSpc>
+                  <a:spcPts val="880"/>
+                </a:lnSpc>
+                <a:spcBef>
+                  <a:spcPts val="0"/>
+                </a:spcBef>
+                <a:spcAft>
+                  <a:spcPts val="0"/>
+                </a:spcAft>
+              </a:pPr>
+              <a:r>
+                <a:rPr sz="880">
+                  <a:solidFill>
+                    <a:srgbClr val="4D4D4D">
+                      <a:alpha val="100000"/>
+                    </a:srgbClr>
+                  </a:solidFill>
+                  <a:latin typeface="Helvetica"/>
+                  <a:cs typeface="Helvetica"/>
+                </a:rPr>
+                <a:t>2</a:t>
+              </a:r>
+            </a:p>
+          </p:txBody>
+        </p:sp>
+        <p:sp>
+          <p:nvSpPr>
+            <p:cNvPr id="81" name="tx81"/>
+            <p:cNvSpPr/>
+            <p:nvPr/>
+          </p:nvSpPr>
+          <p:spPr>
+            <a:xfrm>
+              <a:off x="762297" y="4655634"/>
+              <a:ext cx="62179" cy="80101"/>
+            </a:xfrm>
+            <a:prstGeom prst="rect">
+              <a:avLst/>
+            </a:prstGeom>
+            <a:noFill/>
+          </p:spPr>
+          <p:txBody>
+            <a:bodyPr lIns="0" rIns="0" tIns="0" bIns="0" anchorCtr="1" anchor="ctr" wrap="none"/>
+            <a:lstStyle/>
+            <a:p>
+              <a:pPr algn="l" marL="0" marR="0" indent="0">
+                <a:lnSpc>
+                  <a:spcPts val="880"/>
+                </a:lnSpc>
+                <a:spcBef>
+                  <a:spcPts val="0"/>
+                </a:spcBef>
+                <a:spcAft>
+                  <a:spcPts val="0"/>
+                </a:spcAft>
+              </a:pPr>
+              <a:r>
+                <a:rPr sz="880">
+                  <a:solidFill>
+                    <a:srgbClr val="4D4D4D">
+                      <a:alpha val="100000"/>
+                    </a:srgbClr>
+                  </a:solidFill>
+                  <a:latin typeface="Helvetica"/>
+                  <a:cs typeface="Helvetica"/>
+                </a:rPr>
+                <a:t>3</a:t>
+              </a:r>
+            </a:p>
+          </p:txBody>
+        </p:sp>
+        <p:sp>
+          <p:nvSpPr>
+            <p:cNvPr id="82" name="tx82"/>
+            <p:cNvSpPr/>
+            <p:nvPr/>
+          </p:nvSpPr>
+          <p:spPr>
+            <a:xfrm>
+              <a:off x="762297" y="4356300"/>
+              <a:ext cx="62179" cy="80101"/>
+            </a:xfrm>
+            <a:prstGeom prst="rect">
+              <a:avLst/>
+            </a:prstGeom>
+            <a:noFill/>
+          </p:spPr>
+          <p:txBody>
+            <a:bodyPr lIns="0" rIns="0" tIns="0" bIns="0" anchorCtr="1" anchor="ctr" wrap="none"/>
+            <a:lstStyle/>
+            <a:p>
+              <a:pPr algn="l" marL="0" marR="0" indent="0">
+                <a:lnSpc>
+                  <a:spcPts val="880"/>
+                </a:lnSpc>
+                <a:spcBef>
+                  <a:spcPts val="0"/>
+                </a:spcBef>
+                <a:spcAft>
+                  <a:spcPts val="0"/>
+                </a:spcAft>
+              </a:pPr>
+              <a:r>
+                <a:rPr sz="880">
+                  <a:solidFill>
+                    <a:srgbClr val="4D4D4D">
+                      <a:alpha val="100000"/>
+                    </a:srgbClr>
+                  </a:solidFill>
+                  <a:latin typeface="Helvetica"/>
+                  <a:cs typeface="Helvetica"/>
+                </a:rPr>
+                <a:t>4</a:t>
+              </a:r>
+            </a:p>
+          </p:txBody>
+        </p:sp>
+        <p:sp>
+          <p:nvSpPr>
+            <p:cNvPr id="83" name="tx83"/>
+            <p:cNvSpPr/>
+            <p:nvPr/>
+          </p:nvSpPr>
+          <p:spPr>
+            <a:xfrm>
+              <a:off x="1164222" y="5716183"/>
+              <a:ext cx="161574" cy="80101"/>
+            </a:xfrm>
+            <a:prstGeom prst="rect">
+              <a:avLst/>
+            </a:prstGeom>
+            <a:noFill/>
+          </p:spPr>
+          <p:txBody>
+            <a:bodyPr lIns="0" rIns="0" tIns="0" bIns="0" anchorCtr="1" anchor="ctr" wrap="none"/>
+            <a:lstStyle/>
+            <a:p>
+              <a:pPr algn="l" marL="0" marR="0" indent="0">
+                <a:lnSpc>
+                  <a:spcPts val="880"/>
+                </a:lnSpc>
+                <a:spcBef>
+                  <a:spcPts val="0"/>
+                </a:spcBef>
+                <a:spcAft>
+                  <a:spcPts val="0"/>
+                </a:spcAft>
+              </a:pPr>
+              <a:r>
+                <a:rPr sz="880">
+                  <a:solidFill>
+                    <a:srgbClr val="4D4D4D">
+                      <a:alpha val="100000"/>
+                    </a:srgbClr>
+                  </a:solidFill>
+                  <a:latin typeface="Helvetica"/>
+                  <a:cs typeface="Helvetica"/>
+                </a:rPr>
+                <a:t>-50</a:t>
+              </a:r>
+            </a:p>
+          </p:txBody>
+        </p:sp>
+        <p:sp>
+          <p:nvSpPr>
+            <p:cNvPr id="84" name="tx84"/>
+            <p:cNvSpPr/>
+            <p:nvPr/>
+          </p:nvSpPr>
+          <p:spPr>
+            <a:xfrm>
+              <a:off x="2024485" y="5716183"/>
+              <a:ext cx="161574" cy="80101"/>
+            </a:xfrm>
+            <a:prstGeom prst="rect">
+              <a:avLst/>
+            </a:prstGeom>
+            <a:noFill/>
+          </p:spPr>
+          <p:txBody>
+            <a:bodyPr lIns="0" rIns="0" tIns="0" bIns="0" anchorCtr="1" anchor="ctr" wrap="none"/>
+            <a:lstStyle/>
+            <a:p>
+              <a:pPr algn="l" marL="0" marR="0" indent="0">
+                <a:lnSpc>
+                  <a:spcPts val="880"/>
+                </a:lnSpc>
+                <a:spcBef>
+                  <a:spcPts val="0"/>
+                </a:spcBef>
+                <a:spcAft>
+                  <a:spcPts val="0"/>
+                </a:spcAft>
+              </a:pPr>
+              <a:r>
+                <a:rPr sz="880">
+                  <a:solidFill>
+                    <a:srgbClr val="4D4D4D">
+                      <a:alpha val="100000"/>
+                    </a:srgbClr>
+                  </a:solidFill>
+                  <a:latin typeface="Helvetica"/>
+                  <a:cs typeface="Helvetica"/>
+                </a:rPr>
+                <a:t>-40</a:t>
+              </a:r>
+            </a:p>
+          </p:txBody>
+        </p:sp>
+        <p:sp>
+          <p:nvSpPr>
+            <p:cNvPr id="85" name="tx85"/>
+            <p:cNvSpPr/>
+            <p:nvPr/>
+          </p:nvSpPr>
+          <p:spPr>
+            <a:xfrm>
+              <a:off x="2884749" y="5716183"/>
+              <a:ext cx="161574" cy="80101"/>
+            </a:xfrm>
+            <a:prstGeom prst="rect">
+              <a:avLst/>
+            </a:prstGeom>
+            <a:noFill/>
+          </p:spPr>
+          <p:txBody>
+            <a:bodyPr lIns="0" rIns="0" tIns="0" bIns="0" anchorCtr="1" anchor="ctr" wrap="none"/>
+            <a:lstStyle/>
+            <a:p>
+              <a:pPr algn="l" marL="0" marR="0" indent="0">
+                <a:lnSpc>
+                  <a:spcPts val="880"/>
+                </a:lnSpc>
+                <a:spcBef>
+                  <a:spcPts val="0"/>
+                </a:spcBef>
+                <a:spcAft>
+                  <a:spcPts val="0"/>
+                </a:spcAft>
+              </a:pPr>
+              <a:r>
+                <a:rPr sz="880">
+                  <a:solidFill>
+                    <a:srgbClr val="4D4D4D">
+                      <a:alpha val="100000"/>
+                    </a:srgbClr>
+                  </a:solidFill>
+                  <a:latin typeface="Helvetica"/>
+                  <a:cs typeface="Helvetica"/>
+                </a:rPr>
+                <a:t>-30</a:t>
+              </a:r>
+            </a:p>
+          </p:txBody>
+        </p:sp>
+        <p:sp>
+          <p:nvSpPr>
+            <p:cNvPr id="86" name="tx86"/>
+            <p:cNvSpPr/>
+            <p:nvPr/>
+          </p:nvSpPr>
+          <p:spPr>
+            <a:xfrm>
+              <a:off x="3745012" y="5716183"/>
+              <a:ext cx="161574" cy="80101"/>
+            </a:xfrm>
+            <a:prstGeom prst="rect">
+              <a:avLst/>
+            </a:prstGeom>
+            <a:noFill/>
+          </p:spPr>
+          <p:txBody>
+            <a:bodyPr lIns="0" rIns="0" tIns="0" bIns="0" anchorCtr="1" anchor="ctr" wrap="none"/>
+            <a:lstStyle/>
+            <a:p>
+              <a:pPr algn="l" marL="0" marR="0" indent="0">
+                <a:lnSpc>
+                  <a:spcPts val="880"/>
+                </a:lnSpc>
+                <a:spcBef>
+                  <a:spcPts val="0"/>
+                </a:spcBef>
+                <a:spcAft>
+                  <a:spcPts val="0"/>
+                </a:spcAft>
+              </a:pPr>
+              <a:r>
+                <a:rPr sz="880">
+                  <a:solidFill>
+                    <a:srgbClr val="4D4D4D">
+                      <a:alpha val="100000"/>
+                    </a:srgbClr>
+                  </a:solidFill>
+                  <a:latin typeface="Helvetica"/>
+                  <a:cs typeface="Helvetica"/>
+                </a:rPr>
+                <a:t>-20</a:t>
+              </a:r>
+            </a:p>
+          </p:txBody>
+        </p:sp>
+        <p:sp>
+          <p:nvSpPr>
+            <p:cNvPr id="87" name="tx87"/>
+            <p:cNvSpPr/>
+            <p:nvPr/>
+          </p:nvSpPr>
+          <p:spPr>
+            <a:xfrm>
+              <a:off x="4605275" y="5716183"/>
+              <a:ext cx="161574" cy="80101"/>
+            </a:xfrm>
+            <a:prstGeom prst="rect">
+              <a:avLst/>
+            </a:prstGeom>
+            <a:noFill/>
+          </p:spPr>
+          <p:txBody>
+            <a:bodyPr lIns="0" rIns="0" tIns="0" bIns="0" anchorCtr="1" anchor="ctr" wrap="none"/>
+            <a:lstStyle/>
+            <a:p>
+              <a:pPr algn="l" marL="0" marR="0" indent="0">
+                <a:lnSpc>
+                  <a:spcPts val="880"/>
+                </a:lnSpc>
+                <a:spcBef>
+                  <a:spcPts val="0"/>
+                </a:spcBef>
+                <a:spcAft>
+                  <a:spcPts val="0"/>
+                </a:spcAft>
+              </a:pPr>
+              <a:r>
+                <a:rPr sz="880">
+                  <a:solidFill>
+                    <a:srgbClr val="4D4D4D">
+                      <a:alpha val="100000"/>
+                    </a:srgbClr>
+                  </a:solidFill>
+                  <a:latin typeface="Helvetica"/>
+                  <a:cs typeface="Helvetica"/>
+                </a:rPr>
+                <a:t>-10</a:t>
+              </a:r>
+            </a:p>
+          </p:txBody>
+        </p:sp>
+        <p:sp>
+          <p:nvSpPr>
+            <p:cNvPr id="88" name="tx88"/>
+            <p:cNvSpPr/>
+            <p:nvPr/>
+          </p:nvSpPr>
+          <p:spPr>
+            <a:xfrm>
+              <a:off x="5515235" y="5716183"/>
+              <a:ext cx="62179" cy="80101"/>
+            </a:xfrm>
+            <a:prstGeom prst="rect">
+              <a:avLst/>
+            </a:prstGeom>
+            <a:noFill/>
+          </p:spPr>
+          <p:txBody>
+            <a:bodyPr lIns="0" rIns="0" tIns="0" bIns="0" anchorCtr="1" anchor="ctr" wrap="none"/>
+            <a:lstStyle/>
+            <a:p>
+              <a:pPr algn="l" marL="0" marR="0" indent="0">
+                <a:lnSpc>
+                  <a:spcPts val="880"/>
+                </a:lnSpc>
+                <a:spcBef>
+                  <a:spcPts val="0"/>
+                </a:spcBef>
+                <a:spcAft>
+                  <a:spcPts val="0"/>
+                </a:spcAft>
+              </a:pPr>
+              <a:r>
+                <a:rPr sz="880">
+                  <a:solidFill>
+                    <a:srgbClr val="4D4D4D">
+                      <a:alpha val="100000"/>
+                    </a:srgbClr>
+                  </a:solidFill>
+                  <a:latin typeface="Helvetica"/>
+                  <a:cs typeface="Helvetica"/>
+                </a:rPr>
+                <a:t>0</a:t>
+              </a:r>
+            </a:p>
+          </p:txBody>
+        </p:sp>
+        <p:sp>
+          <p:nvSpPr>
+            <p:cNvPr id="89" name="tx89"/>
+            <p:cNvSpPr/>
+            <p:nvPr/>
+          </p:nvSpPr>
+          <p:spPr>
+            <a:xfrm>
+              <a:off x="6344409" y="5716183"/>
+              <a:ext cx="124358" cy="80101"/>
+            </a:xfrm>
+            <a:prstGeom prst="rect">
+              <a:avLst/>
+            </a:prstGeom>
+            <a:noFill/>
+          </p:spPr>
+          <p:txBody>
+            <a:bodyPr lIns="0" rIns="0" tIns="0" bIns="0" anchorCtr="1" anchor="ctr" wrap="none"/>
+            <a:lstStyle/>
+            <a:p>
+              <a:pPr algn="l" marL="0" marR="0" indent="0">
+                <a:lnSpc>
+                  <a:spcPts val="880"/>
+                </a:lnSpc>
+                <a:spcBef>
+                  <a:spcPts val="0"/>
+                </a:spcBef>
+                <a:spcAft>
+                  <a:spcPts val="0"/>
+                </a:spcAft>
+              </a:pPr>
+              <a:r>
+                <a:rPr sz="880">
+                  <a:solidFill>
+                    <a:srgbClr val="4D4D4D">
+                      <a:alpha val="100000"/>
+                    </a:srgbClr>
+                  </a:solidFill>
+                  <a:latin typeface="Helvetica"/>
+                  <a:cs typeface="Helvetica"/>
+                </a:rPr>
+                <a:t>10</a:t>
+              </a:r>
+            </a:p>
+          </p:txBody>
+        </p:sp>
+        <p:sp>
+          <p:nvSpPr>
+            <p:cNvPr id="90" name="tx90"/>
+            <p:cNvSpPr/>
+            <p:nvPr/>
+          </p:nvSpPr>
+          <p:spPr>
+            <a:xfrm>
+              <a:off x="7204672" y="5716183"/>
+              <a:ext cx="124358" cy="80101"/>
+            </a:xfrm>
+            <a:prstGeom prst="rect">
+              <a:avLst/>
+            </a:prstGeom>
+            <a:noFill/>
+          </p:spPr>
+          <p:txBody>
+            <a:bodyPr lIns="0" rIns="0" tIns="0" bIns="0" anchorCtr="1" anchor="ctr" wrap="none"/>
+            <a:lstStyle/>
+            <a:p>
+              <a:pPr algn="l" marL="0" marR="0" indent="0">
+                <a:lnSpc>
+                  <a:spcPts val="880"/>
+                </a:lnSpc>
+                <a:spcBef>
+                  <a:spcPts val="0"/>
+                </a:spcBef>
+                <a:spcAft>
+                  <a:spcPts val="0"/>
+                </a:spcAft>
+              </a:pPr>
+              <a:r>
+                <a:rPr sz="880">
+                  <a:solidFill>
+                    <a:srgbClr val="4D4D4D">
+                      <a:alpha val="100000"/>
+                    </a:srgbClr>
+                  </a:solidFill>
+                  <a:latin typeface="Helvetica"/>
+                  <a:cs typeface="Helvetica"/>
+                </a:rPr>
+                <a:t>20</a:t>
+              </a:r>
+            </a:p>
+          </p:txBody>
+        </p:sp>
+        <p:sp>
+          <p:nvSpPr>
+            <p:cNvPr id="91" name="tx91"/>
+            <p:cNvSpPr/>
+            <p:nvPr/>
+          </p:nvSpPr>
+          <p:spPr>
+            <a:xfrm>
+              <a:off x="8064935" y="5716183"/>
+              <a:ext cx="124358" cy="80101"/>
+            </a:xfrm>
+            <a:prstGeom prst="rect">
+              <a:avLst/>
+            </a:prstGeom>
+            <a:noFill/>
+          </p:spPr>
+          <p:txBody>
+            <a:bodyPr lIns="0" rIns="0" tIns="0" bIns="0" anchorCtr="1" anchor="ctr" wrap="none"/>
+            <a:lstStyle/>
+            <a:p>
+              <a:pPr algn="l" marL="0" marR="0" indent="0">
+                <a:lnSpc>
+                  <a:spcPts val="880"/>
+                </a:lnSpc>
+                <a:spcBef>
+                  <a:spcPts val="0"/>
+                </a:spcBef>
+                <a:spcAft>
+                  <a:spcPts val="0"/>
+                </a:spcAft>
+              </a:pPr>
+              <a:r>
+                <a:rPr sz="880">
+                  <a:solidFill>
+                    <a:srgbClr val="4D4D4D">
+                      <a:alpha val="100000"/>
+                    </a:srgbClr>
+                  </a:solidFill>
+                  <a:latin typeface="Helvetica"/>
+                  <a:cs typeface="Helvetica"/>
+                </a:rPr>
+                <a:t>30</a:t>
+              </a:r>
+            </a:p>
+          </p:txBody>
+        </p:sp>
+        <p:sp>
+          <p:nvSpPr>
+            <p:cNvPr id="92" name="tx92"/>
+            <p:cNvSpPr/>
+            <p:nvPr/>
+          </p:nvSpPr>
+          <p:spPr>
+            <a:xfrm>
+              <a:off x="1561815" y="5855859"/>
+              <a:ext cx="6311097" cy="100218"/>
+            </a:xfrm>
+            <a:prstGeom prst="rect">
+              <a:avLst/>
+            </a:prstGeom>
+            <a:noFill/>
+          </p:spPr>
+          <p:txBody>
+            <a:bodyPr lIns="0" rIns="0" tIns="0" bIns="0" anchorCtr="1" anchor="ctr" wrap="none"/>
+            <a:lstStyle/>
+            <a:p>
+              <a:pPr algn="l" marL="0" marR="0" indent="0">
+                <a:lnSpc>
+                  <a:spcPts val="1100"/>
+                </a:lnSpc>
+                <a:spcBef>
+                  <a:spcPts val="0"/>
+                </a:spcBef>
+                <a:spcAft>
+                  <a:spcPts val="0"/>
+                </a:spcAft>
+              </a:pPr>
+              <a:r>
+                <a:rPr sz="1100">
+                  <a:solidFill>
+                    <a:srgbClr val="000000">
+                      <a:alpha val="100000"/>
+                    </a:srgbClr>
+                  </a:solidFill>
+                  <a:latin typeface="Helvetica"/>
+                  <a:cs typeface="Helvetica"/>
+                </a:rPr>
+                <a:t>Sensitivity eGFR Difference (%): 100 × (CKD-EPI 2012 CysC − CKD-EPI 2021 Cr) / CKD-EPI 2021 Cr</a:t>
+              </a:r>
+            </a:p>
+          </p:txBody>
+        </p:sp>
+        <p:sp>
+          <p:nvSpPr>
+            <p:cNvPr id="93" name="tx93"/>
+            <p:cNvSpPr/>
+            <p:nvPr/>
+          </p:nvSpPr>
+          <p:spPr>
+            <a:xfrm rot="-5400000">
+              <a:off x="138035" y="4944909"/>
+              <a:ext cx="1016904" cy="100218"/>
+            </a:xfrm>
+            <a:prstGeom prst="rect">
+              <a:avLst/>
+            </a:prstGeom>
+            <a:noFill/>
+          </p:spPr>
+          <p:txBody>
+            <a:bodyPr lIns="0" rIns="0" tIns="0" bIns="0" anchorCtr="1" anchor="ctr" wrap="none"/>
+            <a:lstStyle/>
+            <a:p>
+              <a:pPr algn="l" marL="0" marR="0" indent="0">
+                <a:lnSpc>
+                  <a:spcPts val="1100"/>
+                </a:lnSpc>
+                <a:spcBef>
+                  <a:spcPts val="0"/>
+                </a:spcBef>
+                <a:spcAft>
+                  <a:spcPts val="0"/>
+                </a:spcAft>
+              </a:pPr>
+              <a:r>
+                <a:rPr sz="1100">
+                  <a:solidFill>
+                    <a:srgbClr val="000000">
+                      <a:alpha val="100000"/>
+                    </a:srgbClr>
+                  </a:solidFill>
+                  <a:latin typeface="Helvetica"/>
+                  <a:cs typeface="Helvetica"/>
+                </a:rPr>
+                <a:t>subHR (95% CI)</a:t>
+              </a:r>
+            </a:p>
+          </p:txBody>
+        </p:sp>
+        <p:sp>
+          <p:nvSpPr>
+            <p:cNvPr id="94" name="tx94"/>
+            <p:cNvSpPr/>
+            <p:nvPr/>
+          </p:nvSpPr>
+          <p:spPr>
+            <a:xfrm>
+              <a:off x="887106" y="4159544"/>
+              <a:ext cx="6959864" cy="82021"/>
+            </a:xfrm>
+            <a:prstGeom prst="rect">
+              <a:avLst/>
+            </a:prstGeom>
+            <a:noFill/>
+          </p:spPr>
+          <p:txBody>
+            <a:bodyPr lIns="0" rIns="0" tIns="0" bIns="0" anchorCtr="1" anchor="ctr" wrap="none"/>
+            <a:lstStyle/>
+            <a:p>
+              <a:pPr algn="l" marL="0" marR="0" indent="0">
+                <a:lnSpc>
+                  <a:spcPts val="900"/>
+                </a:lnSpc>
+                <a:spcBef>
+                  <a:spcPts val="0"/>
+                </a:spcBef>
+                <a:spcAft>
+                  <a:spcPts val="0"/>
+                </a:spcAft>
+              </a:pPr>
+              <a:r>
+                <a:rPr sz="900">
+                  <a:solidFill>
+                    <a:srgbClr val="404040">
+                      <a:alpha val="100000"/>
+                    </a:srgbClr>
+                  </a:solidFill>
+                  <a:latin typeface="Helvetica"/>
+                  <a:cs typeface="Helvetica"/>
+                </a:rPr>
+                <a:t>subHR per 10 % decline: 1.19 (1.08-1.32), p_Bonf = 0.004 (n = 6)  |  per IQR decline (Δ = 27.5 %): 1.62 (1.22-2.14)  |  IQR: [-29.1, -1.6] %</a:t>
+              </a:r>
+            </a:p>
+          </p:txBody>
+        </p:sp>
+        <p:sp>
+          <p:nvSpPr>
+            <p:cNvPr id="95" name="tx95"/>
+            <p:cNvSpPr/>
+            <p:nvPr/>
+          </p:nvSpPr>
+          <p:spPr>
+            <a:xfrm>
+              <a:off x="887106" y="3932770"/>
               <a:ext cx="3333262" cy="120152"/>
             </a:xfrm>
             <a:prstGeom prst="rect">
